--- a/מצגת.pptx
+++ b/מצגת.pptx
@@ -13,11 +13,11 @@
     <p:sldId id="260" r:id="rId4"/>
     <p:sldId id="259" r:id="rId5"/>
     <p:sldId id="262" r:id="rId6"/>
-    <p:sldId id="263" r:id="rId7"/>
-    <p:sldId id="264" r:id="rId8"/>
-    <p:sldId id="265" r:id="rId9"/>
-    <p:sldId id="266" r:id="rId10"/>
-    <p:sldId id="267" r:id="rId11"/>
+    <p:sldId id="267" r:id="rId7"/>
+    <p:sldId id="263" r:id="rId8"/>
+    <p:sldId id="264" r:id="rId9"/>
+    <p:sldId id="265" r:id="rId10"/>
+    <p:sldId id="266" r:id="rId11"/>
     <p:sldId id="261" r:id="rId12"/>
   </p:sldIdLst>
   <p:sldSz cx="12192000" cy="6858000"/>
@@ -207,7 +207,7 @@
           <a:p>
             <a:fld id="{BBCCBFA6-B51C-4C55-A048-214D83A203B2}" type="datetimeFigureOut">
               <a:rPr lang="he-IL" smtClean="0"/>
-              <a:t>ז'/אייר/תשפ"ה</a:t>
+              <a:t>א'/סיון/תשפ"ה</a:t>
             </a:fld>
             <a:endParaRPr lang="he-IL"/>
           </a:p>
@@ -614,29 +614,16 @@
           <a:p>
             <a:r>
               <a:rPr lang="he-IL" dirty="0"/>
-              <a:t>המערכת שלנו מאובטחת באמצעות </a:t>
+              <a:t>לאחר שקיבלנו את התוכן המסונן נשלח אותו לקליינט באמצעות שרת </a:t>
             </a:r>
             <a:r>
-              <a:rPr lang="en-US" dirty="0"/>
-              <a:t>JWT</a:t>
+              <a:rPr lang="he-IL" dirty="0" err="1"/>
+              <a:t>הנוטפיקציה</a:t>
             </a:r>
             <a:r>
               <a:rPr lang="he-IL" dirty="0"/>
-              <a:t> ומשתמשת ב</a:t>
+              <a:t> להיכן שהמשתמש ביקש לקבל אותו</a:t>
             </a:r>
-            <a:r>
-              <a:rPr lang="en-US" dirty="0"/>
-              <a:t>KEYCLOAK</a:t>
-            </a:r>
-            <a:r>
-              <a:rPr lang="he-IL" dirty="0"/>
-              <a:t> כשרת </a:t>
-            </a:r>
-            <a:r>
-              <a:rPr lang="he-IL" dirty="0" err="1"/>
-              <a:t>אוטנטיקציה</a:t>
-            </a:r>
-            <a:endParaRPr lang="he-IL" dirty="0"/>
           </a:p>
         </p:txBody>
       </p:sp>
@@ -666,7 +653,7 @@
     </p:spTree>
     <p:extLst>
       <p:ext uri="{BB962C8B-B14F-4D97-AF65-F5344CB8AC3E}">
-        <p14:creationId xmlns:p14="http://schemas.microsoft.com/office/powerpoint/2010/main" val="1613392483"/>
+        <p14:creationId xmlns:p14="http://schemas.microsoft.com/office/powerpoint/2010/main" val="2261794034"/>
       </p:ext>
     </p:extLst>
   </p:cSld>
@@ -1049,9 +1036,26 @@
           <a:bodyPr/>
           <a:lstStyle/>
           <a:p>
+            <a:pPr marL="0" marR="0" lvl="0" indent="0" algn="r" defTabSz="914400" rtl="1" eaLnBrk="1" fontAlgn="auto" latinLnBrk="0" hangingPunct="1">
+              <a:lnSpc>
+                <a:spcPct val="100000"/>
+              </a:lnSpc>
+              <a:spcBef>
+                <a:spcPts val="0"/>
+              </a:spcBef>
+              <a:spcAft>
+                <a:spcPts val="0"/>
+              </a:spcAft>
+              <a:buClrTx/>
+              <a:buSzTx/>
+              <a:buFontTx/>
+              <a:buNone/>
+              <a:tabLst/>
+              <a:defRPr/>
+            </a:pPr>
             <a:r>
               <a:rPr lang="he-IL" dirty="0"/>
-              <a:t>כאשר יש לנו את </a:t>
+              <a:t>את הבקשות הקליינט נקבל באמצעות שרת </a:t>
             </a:r>
             <a:r>
               <a:rPr lang="he-IL" dirty="0" err="1"/>
@@ -1059,38 +1063,50 @@
             </a:r>
             <a:r>
               <a:rPr lang="he-IL" dirty="0"/>
-              <a:t> שמקבל את הבקשות מהקליינט ושולח לסרוויס הרלוונטי.</a:t>
+              <a:t> שידע לנתב את הבקשות לסרוויס המתאים.</a:t>
             </a:r>
-            <a:br>
-              <a:rPr lang="en-US" dirty="0"/>
-            </a:br>
+          </a:p>
+          <a:p>
+            <a:pPr marL="0" marR="0" lvl="0" indent="0" algn="r" defTabSz="914400" rtl="1" eaLnBrk="1" fontAlgn="auto" latinLnBrk="0" hangingPunct="1">
+              <a:lnSpc>
+                <a:spcPct val="100000"/>
+              </a:lnSpc>
+              <a:spcBef>
+                <a:spcPts val="0"/>
+              </a:spcBef>
+              <a:spcAft>
+                <a:spcPts val="0"/>
+              </a:spcAft>
+              <a:buClrTx/>
+              <a:buSzTx/>
+              <a:buFontTx/>
+              <a:buNone/>
+              <a:tabLst/>
+              <a:defRPr/>
+            </a:pPr>
+            <a:r>
+              <a:rPr lang="he-IL" dirty="0"/>
+              <a:t>את הבקשות הסינכרוניות הוא ינתב </a:t>
+            </a:r>
             <a:r>
               <a:rPr lang="he-IL" dirty="0" err="1"/>
-              <a:t>הגייטוואי</a:t>
+              <a:t>באצמעות</a:t>
             </a:r>
             <a:r>
               <a:rPr lang="he-IL" dirty="0"/>
-              <a:t> יתקשר עם הסרוויסים באמצעות </a:t>
+              <a:t> בקשות </a:t>
             </a:r>
             <a:r>
-              <a:rPr lang="en-US" dirty="0" err="1"/>
-              <a:t>restapi</a:t>
-            </a:r>
-            <a:r>
-              <a:rPr lang="en-US" dirty="0"/>
-              <a:t> </a:t>
+              <a:rPr lang="he-IL" dirty="0" err="1"/>
+              <a:t>רסט</a:t>
             </a:r>
             <a:r>
               <a:rPr lang="he-IL" dirty="0"/>
-              <a:t>או </a:t>
+              <a:t>, ואת האסינכרוניות באמצעות </a:t>
             </a:r>
             <a:r>
-              <a:rPr lang="en-US" dirty="0" err="1"/>
-              <a:t>kafka</a:t>
-            </a:r>
-            <a:r>
-              <a:rPr lang="en-US" dirty="0"/>
-              <a:t> </a:t>
+              <a:rPr lang="he-IL" dirty="0" err="1"/>
+              <a:t>קפקה</a:t>
             </a:r>
             <a:endParaRPr lang="he-IL" dirty="0"/>
           </a:p>
@@ -1178,7 +1194,153 @@
           <a:p>
             <a:r>
               <a:rPr lang="he-IL" dirty="0"/>
-              <a:t>מתחתיו יש לנו את הדאטה מנג'ר שאחראי על המידע של הקליינט. </a:t>
+              <a:t>המערכת שלנו מאובטחת באמצעות </a:t>
+            </a:r>
+            <a:r>
+              <a:rPr lang="en-US" dirty="0"/>
+              <a:t>JWT</a:t>
+            </a:r>
+            <a:r>
+              <a:rPr lang="he-IL" dirty="0"/>
+              <a:t> ומשתמשת ב</a:t>
+            </a:r>
+            <a:r>
+              <a:rPr lang="en-US" dirty="0"/>
+              <a:t>KEYCLOAK</a:t>
+            </a:r>
+            <a:r>
+              <a:rPr lang="he-IL" dirty="0"/>
+              <a:t> כשרת </a:t>
+            </a:r>
+            <a:r>
+              <a:rPr lang="he-IL" dirty="0" err="1"/>
+              <a:t>אוטנטיקציה</a:t>
+            </a:r>
+            <a:endParaRPr lang="he-IL" dirty="0"/>
+          </a:p>
+          <a:p>
+            <a:r>
+              <a:rPr lang="he-IL" dirty="0"/>
+              <a:t>שיבצע אימות למשתמשים וינפיק לנו את הטוקנים, כאשר כל משתמש מקבל טוקן </a:t>
+            </a:r>
+            <a:r>
+              <a:rPr lang="he-IL" dirty="0" err="1"/>
+              <a:t>ורפרש</a:t>
+            </a:r>
+            <a:r>
+              <a:rPr lang="he-IL" dirty="0"/>
+              <a:t> טוקן</a:t>
+            </a:r>
+          </a:p>
+        </p:txBody>
+      </p:sp>
+      <p:sp>
+        <p:nvSpPr>
+          <p:cNvPr id="4" name="מציין מיקום של מספר שקופית 3"/>
+          <p:cNvSpPr>
+            <a:spLocks noGrp="1"/>
+          </p:cNvSpPr>
+          <p:nvPr>
+            <p:ph type="sldNum" sz="quarter" idx="5"/>
+          </p:nvPr>
+        </p:nvSpPr>
+        <p:spPr/>
+        <p:txBody>
+          <a:bodyPr/>
+          <a:lstStyle/>
+          <a:p>
+            <a:fld id="{17FB74C7-A202-4D47-A07B-46D45A5C73E5}" type="slidenum">
+              <a:rPr lang="he-IL" smtClean="0"/>
+              <a:t>6</a:t>
+            </a:fld>
+            <a:endParaRPr lang="he-IL"/>
+          </a:p>
+        </p:txBody>
+      </p:sp>
+    </p:spTree>
+    <p:extLst>
+      <p:ext uri="{BB962C8B-B14F-4D97-AF65-F5344CB8AC3E}">
+        <p14:creationId xmlns:p14="http://schemas.microsoft.com/office/powerpoint/2010/main" val="1613392483"/>
+      </p:ext>
+    </p:extLst>
+  </p:cSld>
+  <p:clrMapOvr>
+    <a:masterClrMapping/>
+  </p:clrMapOvr>
+</p:notes>
+</file>
+
+<file path=ppt/notesSlides/notesSlide7.xml><?xml version="1.0" encoding="utf-8"?>
+<p:notes xmlns:a="http://schemas.openxmlformats.org/drawingml/2006/main" xmlns:r="http://schemas.openxmlformats.org/officeDocument/2006/relationships" xmlns:p="http://schemas.openxmlformats.org/presentationml/2006/main">
+  <p:cSld>
+    <p:spTree>
+      <p:nvGrpSpPr>
+        <p:cNvPr id="1" name=""/>
+        <p:cNvGrpSpPr/>
+        <p:nvPr/>
+      </p:nvGrpSpPr>
+      <p:grpSpPr>
+        <a:xfrm>
+          <a:off x="0" y="0"/>
+          <a:ext cx="0" cy="0"/>
+          <a:chOff x="0" y="0"/>
+          <a:chExt cx="0" cy="0"/>
+        </a:xfrm>
+      </p:grpSpPr>
+      <p:sp>
+        <p:nvSpPr>
+          <p:cNvPr id="2" name="מציין מיקום של תמונת שקופית 1"/>
+          <p:cNvSpPr>
+            <a:spLocks noGrp="1" noRot="1" noChangeAspect="1"/>
+          </p:cNvSpPr>
+          <p:nvPr>
+            <p:ph type="sldImg"/>
+          </p:nvPr>
+        </p:nvSpPr>
+        <p:spPr/>
+      </p:sp>
+      <p:sp>
+        <p:nvSpPr>
+          <p:cNvPr id="3" name="מציין מיקום של הערות 2"/>
+          <p:cNvSpPr>
+            <a:spLocks noGrp="1"/>
+          </p:cNvSpPr>
+          <p:nvPr>
+            <p:ph type="body" idx="1"/>
+          </p:nvPr>
+        </p:nvSpPr>
+        <p:spPr/>
+        <p:txBody>
+          <a:bodyPr/>
+          <a:lstStyle/>
+          <a:p>
+            <a:r>
+              <a:rPr lang="he-IL" dirty="0"/>
+              <a:t>את המידע ששייך לקליינט ננהל באמצעות ה</a:t>
+            </a:r>
+            <a:r>
+              <a:rPr lang="en-US" dirty="0" err="1"/>
+              <a:t>datamanger</a:t>
+            </a:r>
+            <a:r>
+              <a:rPr lang="he-IL" dirty="0"/>
+              <a:t> שיודע גם לדבר עם ה</a:t>
+            </a:r>
+            <a:r>
+              <a:rPr lang="en-US" dirty="0"/>
+              <a:t>KEYCLOAK</a:t>
+            </a:r>
+            <a:r>
+              <a:rPr lang="he-IL" dirty="0"/>
+              <a:t> כדי להוסיף </a:t>
+            </a:r>
+            <a:r>
+              <a:rPr lang="he-IL" dirty="0" err="1"/>
+              <a:t>יוזרים</a:t>
+            </a:r>
+            <a:r>
+              <a:rPr lang="he-IL" dirty="0"/>
+              <a:t> ולבצע אימות כניסה. </a:t>
             </a:r>
             <a:br>
               <a:rPr lang="en-US" dirty="0"/>
@@ -1224,7 +1386,7 @@
           <a:p>
             <a:fld id="{17FB74C7-A202-4D47-A07B-46D45A5C73E5}" type="slidenum">
               <a:rPr lang="he-IL" smtClean="0"/>
-              <a:t>6</a:t>
+              <a:t>7</a:t>
             </a:fld>
             <a:endParaRPr lang="he-IL"/>
           </a:p>
@@ -1243,7 +1405,7 @@
 </p:notes>
 </file>
 
-<file path=ppt/notesSlides/notesSlide7.xml><?xml version="1.0" encoding="utf-8"?>
+<file path=ppt/notesSlides/notesSlide8.xml><?xml version="1.0" encoding="utf-8"?>
 <p:notes xmlns:a="http://schemas.openxmlformats.org/drawingml/2006/main" xmlns:r="http://schemas.openxmlformats.org/officeDocument/2006/relationships" xmlns:p="http://schemas.openxmlformats.org/presentationml/2006/main">
   <p:cSld>
     <p:spTree>
@@ -1360,7 +1522,7 @@
                   <a:schemeClr val="bg1"/>
                 </a:solidFill>
               </a:rPr>
-              <a:t>קבלת הכתבות מתבצעת בצורה אסינכרונית באמצעות </a:t>
+              <a:t>תהליך קבלת הכתבות מתבצעת בצורה אסינכרונית באמצעות </a:t>
             </a:r>
             <a:r>
               <a:rPr lang="he-IL" dirty="0" err="1">
@@ -1451,7 +1613,7 @@
           <a:p>
             <a:fld id="{17FB74C7-A202-4D47-A07B-46D45A5C73E5}" type="slidenum">
               <a:rPr lang="he-IL" smtClean="0"/>
-              <a:t>7</a:t>
+              <a:t>8</a:t>
             </a:fld>
             <a:endParaRPr lang="he-IL"/>
           </a:p>
@@ -1461,90 +1623,6 @@
     <p:extLst>
       <p:ext uri="{BB962C8B-B14F-4D97-AF65-F5344CB8AC3E}">
         <p14:creationId xmlns:p14="http://schemas.microsoft.com/office/powerpoint/2010/main" val="2567172769"/>
-      </p:ext>
-    </p:extLst>
-  </p:cSld>
-  <p:clrMapOvr>
-    <a:masterClrMapping/>
-  </p:clrMapOvr>
-</p:notes>
-</file>
-
-<file path=ppt/notesSlides/notesSlide8.xml><?xml version="1.0" encoding="utf-8"?>
-<p:notes xmlns:a="http://schemas.openxmlformats.org/drawingml/2006/main" xmlns:r="http://schemas.openxmlformats.org/officeDocument/2006/relationships" xmlns:p="http://schemas.openxmlformats.org/presentationml/2006/main">
-  <p:cSld>
-    <p:spTree>
-      <p:nvGrpSpPr>
-        <p:cNvPr id="1" name=""/>
-        <p:cNvGrpSpPr/>
-        <p:nvPr/>
-      </p:nvGrpSpPr>
-      <p:grpSpPr>
-        <a:xfrm>
-          <a:off x="0" y="0"/>
-          <a:ext cx="0" cy="0"/>
-          <a:chOff x="0" y="0"/>
-          <a:chExt cx="0" cy="0"/>
-        </a:xfrm>
-      </p:grpSpPr>
-      <p:sp>
-        <p:nvSpPr>
-          <p:cNvPr id="2" name="מציין מיקום של תמונת שקופית 1"/>
-          <p:cNvSpPr>
-            <a:spLocks noGrp="1" noRot="1" noChangeAspect="1"/>
-          </p:cNvSpPr>
-          <p:nvPr>
-            <p:ph type="sldImg"/>
-          </p:nvPr>
-        </p:nvSpPr>
-        <p:spPr/>
-      </p:sp>
-      <p:sp>
-        <p:nvSpPr>
-          <p:cNvPr id="3" name="מציין מיקום של הערות 2"/>
-          <p:cNvSpPr>
-            <a:spLocks noGrp="1"/>
-          </p:cNvSpPr>
-          <p:nvPr>
-            <p:ph type="body" idx="1"/>
-          </p:nvPr>
-        </p:nvSpPr>
-        <p:spPr/>
-        <p:txBody>
-          <a:bodyPr/>
-          <a:lstStyle/>
-          <a:p>
-            <a:endParaRPr lang="he-IL" dirty="0"/>
-          </a:p>
-        </p:txBody>
-      </p:sp>
-      <p:sp>
-        <p:nvSpPr>
-          <p:cNvPr id="4" name="מציין מיקום של מספר שקופית 3"/>
-          <p:cNvSpPr>
-            <a:spLocks noGrp="1"/>
-          </p:cNvSpPr>
-          <p:nvPr>
-            <p:ph type="sldNum" sz="quarter" idx="5"/>
-          </p:nvPr>
-        </p:nvSpPr>
-        <p:spPr/>
-        <p:txBody>
-          <a:bodyPr/>
-          <a:lstStyle/>
-          <a:p>
-            <a:fld id="{17FB74C7-A202-4D47-A07B-46D45A5C73E5}" type="slidenum">
-              <a:rPr lang="he-IL" smtClean="0"/>
-              <a:t>8</a:t>
-            </a:fld>
-            <a:endParaRPr lang="he-IL"/>
-          </a:p>
-        </p:txBody>
-      </p:sp>
-    </p:spTree>
-    <p:extLst>
-      <p:ext uri="{BB962C8B-B14F-4D97-AF65-F5344CB8AC3E}">
-        <p14:creationId xmlns:p14="http://schemas.microsoft.com/office/powerpoint/2010/main" val="3079076449"/>
       </p:ext>
     </p:extLst>
   </p:cSld>
@@ -1598,7 +1676,32 @@
           <a:bodyPr/>
           <a:lstStyle/>
           <a:p>
-            <a:endParaRPr lang="he-IL" dirty="0"/>
+            <a:r>
+              <a:rPr lang="he-IL" dirty="0"/>
+              <a:t>ה</a:t>
+            </a:r>
+            <a:r>
+              <a:rPr lang="en-US" dirty="0"/>
+              <a:t>LLM</a:t>
+            </a:r>
+            <a:r>
+              <a:rPr lang="he-IL" dirty="0"/>
+              <a:t> יקבל את הכתבות ויסנן אותם בהתאם להעדפות הקליינט.</a:t>
+            </a:r>
+          </a:p>
+          <a:p>
+            <a:r>
+              <a:rPr lang="he-IL" dirty="0"/>
+              <a:t>את הסינון נעשה באמצעות </a:t>
+            </a:r>
+            <a:r>
+              <a:rPr lang="en-US" dirty="0"/>
+              <a:t>GEMINI</a:t>
+            </a:r>
+            <a:r>
+              <a:rPr lang="he-IL" dirty="0"/>
+              <a:t> 2.5</a:t>
+            </a:r>
           </a:p>
         </p:txBody>
       </p:sp>
@@ -1628,7 +1731,7 @@
     </p:spTree>
     <p:extLst>
       <p:ext uri="{BB962C8B-B14F-4D97-AF65-F5344CB8AC3E}">
-        <p14:creationId xmlns:p14="http://schemas.microsoft.com/office/powerpoint/2010/main" val="2261794034"/>
+        <p14:creationId xmlns:p14="http://schemas.microsoft.com/office/powerpoint/2010/main" val="3079076449"/>
       </p:ext>
     </p:extLst>
   </p:cSld>
@@ -1785,7 +1888,7 @@
           <a:p>
             <a:fld id="{B473996B-4291-4A11-B81F-85FF913FEA71}" type="datetimeFigureOut">
               <a:rPr lang="he-IL" smtClean="0"/>
-              <a:t>ז'/אייר/תשפ"ה</a:t>
+              <a:t>א'/סיון/תשפ"ה</a:t>
             </a:fld>
             <a:endParaRPr lang="he-IL"/>
           </a:p>
@@ -1983,7 +2086,7 @@
           <a:p>
             <a:fld id="{B473996B-4291-4A11-B81F-85FF913FEA71}" type="datetimeFigureOut">
               <a:rPr lang="he-IL" smtClean="0"/>
-              <a:t>ז'/אייר/תשפ"ה</a:t>
+              <a:t>א'/סיון/תשפ"ה</a:t>
             </a:fld>
             <a:endParaRPr lang="he-IL"/>
           </a:p>
@@ -2191,7 +2294,7 @@
           <a:p>
             <a:fld id="{B473996B-4291-4A11-B81F-85FF913FEA71}" type="datetimeFigureOut">
               <a:rPr lang="he-IL" smtClean="0"/>
-              <a:t>ז'/אייר/תשפ"ה</a:t>
+              <a:t>א'/סיון/תשפ"ה</a:t>
             </a:fld>
             <a:endParaRPr lang="he-IL"/>
           </a:p>
@@ -2389,7 +2492,7 @@
           <a:p>
             <a:fld id="{B473996B-4291-4A11-B81F-85FF913FEA71}" type="datetimeFigureOut">
               <a:rPr lang="he-IL" smtClean="0"/>
-              <a:t>ז'/אייר/תשפ"ה</a:t>
+              <a:t>א'/סיון/תשפ"ה</a:t>
             </a:fld>
             <a:endParaRPr lang="he-IL"/>
           </a:p>
@@ -2664,7 +2767,7 @@
           <a:p>
             <a:fld id="{B473996B-4291-4A11-B81F-85FF913FEA71}" type="datetimeFigureOut">
               <a:rPr lang="he-IL" smtClean="0"/>
-              <a:t>ז'/אייר/תשפ"ה</a:t>
+              <a:t>א'/סיון/תשפ"ה</a:t>
             </a:fld>
             <a:endParaRPr lang="he-IL"/>
           </a:p>
@@ -2929,7 +3032,7 @@
           <a:p>
             <a:fld id="{B473996B-4291-4A11-B81F-85FF913FEA71}" type="datetimeFigureOut">
               <a:rPr lang="he-IL" smtClean="0"/>
-              <a:t>ז'/אייר/תשפ"ה</a:t>
+              <a:t>א'/סיון/תשפ"ה</a:t>
             </a:fld>
             <a:endParaRPr lang="he-IL"/>
           </a:p>
@@ -3341,7 +3444,7 @@
           <a:p>
             <a:fld id="{B473996B-4291-4A11-B81F-85FF913FEA71}" type="datetimeFigureOut">
               <a:rPr lang="he-IL" smtClean="0"/>
-              <a:t>ז'/אייר/תשפ"ה</a:t>
+              <a:t>א'/סיון/תשפ"ה</a:t>
             </a:fld>
             <a:endParaRPr lang="he-IL"/>
           </a:p>
@@ -3482,7 +3585,7 @@
           <a:p>
             <a:fld id="{B473996B-4291-4A11-B81F-85FF913FEA71}" type="datetimeFigureOut">
               <a:rPr lang="he-IL" smtClean="0"/>
-              <a:t>ז'/אייר/תשפ"ה</a:t>
+              <a:t>א'/סיון/תשפ"ה</a:t>
             </a:fld>
             <a:endParaRPr lang="he-IL"/>
           </a:p>
@@ -3595,7 +3698,7 @@
           <a:p>
             <a:fld id="{B473996B-4291-4A11-B81F-85FF913FEA71}" type="datetimeFigureOut">
               <a:rPr lang="he-IL" smtClean="0"/>
-              <a:t>ז'/אייר/תשפ"ה</a:t>
+              <a:t>א'/סיון/תשפ"ה</a:t>
             </a:fld>
             <a:endParaRPr lang="he-IL"/>
           </a:p>
@@ -3906,7 +4009,7 @@
           <a:p>
             <a:fld id="{B473996B-4291-4A11-B81F-85FF913FEA71}" type="datetimeFigureOut">
               <a:rPr lang="he-IL" smtClean="0"/>
-              <a:t>ז'/אייר/תשפ"ה</a:t>
+              <a:t>א'/סיון/תשפ"ה</a:t>
             </a:fld>
             <a:endParaRPr lang="he-IL"/>
           </a:p>
@@ -4194,7 +4297,7 @@
           <a:p>
             <a:fld id="{B473996B-4291-4A11-B81F-85FF913FEA71}" type="datetimeFigureOut">
               <a:rPr lang="he-IL" smtClean="0"/>
-              <a:t>ז'/אייר/תשפ"ה</a:t>
+              <a:t>א'/סיון/תשפ"ה</a:t>
             </a:fld>
             <a:endParaRPr lang="he-IL"/>
           </a:p>
@@ -4444,7 +4547,7 @@
           <a:p>
             <a:fld id="{B473996B-4291-4A11-B81F-85FF913FEA71}" type="datetimeFigureOut">
               <a:rPr lang="he-IL" smtClean="0"/>
-              <a:t>ז'/אייר/תשפ"ה</a:t>
+              <a:t>א'/סיון/תשפ"ה</a:t>
             </a:fld>
             <a:endParaRPr lang="he-IL"/>
           </a:p>
@@ -5555,7 +5658,7 @@
         <p:cNvPr id="1" name="">
           <a:extLst>
             <a:ext uri="{FF2B5EF4-FFF2-40B4-BE49-F238E27FC236}">
-              <a16:creationId xmlns:a16="http://schemas.microsoft.com/office/drawing/2014/main" id="{D4402788-F6AF-D444-A7CF-2847CC59A251}"/>
+              <a16:creationId xmlns:a16="http://schemas.microsoft.com/office/drawing/2014/main" id="{D3BCC0DA-8717-33B4-DE23-9406CE72731C}"/>
             </a:ext>
           </a:extLst>
         </p:cNvPr>
@@ -5575,7 +5678,7 @@
           <p:cNvPr id="6" name="תמונה 5" descr="תמונה שמכילה גרפיקה, לוגו, עיצוב גרפי, צילום מסך&#10;&#10;תוכן שנוצר על-ידי בינה מלאכותית עשוי להיות שגוי.">
             <a:extLst>
               <a:ext uri="{FF2B5EF4-FFF2-40B4-BE49-F238E27FC236}">
-                <a16:creationId xmlns:a16="http://schemas.microsoft.com/office/drawing/2014/main" id="{E0545743-03DC-DF3B-4D37-6A4E3DE37236}"/>
+                <a16:creationId xmlns:a16="http://schemas.microsoft.com/office/drawing/2014/main" id="{51F2B015-B084-3F60-7E61-A5CE297E276E}"/>
               </a:ext>
             </a:extLst>
           </p:cNvPr>
@@ -5611,7 +5714,7 @@
           <p:cNvPr id="2" name="קבוצה 1">
             <a:extLst>
               <a:ext uri="{FF2B5EF4-FFF2-40B4-BE49-F238E27FC236}">
-                <a16:creationId xmlns:a16="http://schemas.microsoft.com/office/drawing/2014/main" id="{812986DE-FB38-3CF6-655A-9D4F9DE93160}"/>
+                <a16:creationId xmlns:a16="http://schemas.microsoft.com/office/drawing/2014/main" id="{E3FF6BA5-E812-BF64-B7D2-F19F8F84B1D9}"/>
               </a:ext>
             </a:extLst>
           </p:cNvPr>
@@ -5631,7 +5734,7 @@
             <p:cNvPr id="4" name="תיבת טקסט 3">
               <a:extLst>
                 <a:ext uri="{FF2B5EF4-FFF2-40B4-BE49-F238E27FC236}">
-                  <a16:creationId xmlns:a16="http://schemas.microsoft.com/office/drawing/2014/main" id="{FCA67BAC-9E18-8CA0-F998-AD48F95ABFCF}"/>
+                  <a16:creationId xmlns:a16="http://schemas.microsoft.com/office/drawing/2014/main" id="{BA6393D9-4802-E68C-2918-61FA47E425E0}"/>
                 </a:ext>
               </a:extLst>
             </p:cNvPr>
@@ -5680,7 +5783,7 @@
             <p:cNvPr id="7" name="תיבת טקסט 6">
               <a:extLst>
                 <a:ext uri="{FF2B5EF4-FFF2-40B4-BE49-F238E27FC236}">
-                  <a16:creationId xmlns:a16="http://schemas.microsoft.com/office/drawing/2014/main" id="{3F855C44-A984-7E8A-5105-3E28830582F8}"/>
+                  <a16:creationId xmlns:a16="http://schemas.microsoft.com/office/drawing/2014/main" id="{08CA930A-30F5-49EE-4412-58C28B5B4150}"/>
                 </a:ext>
               </a:extLst>
             </p:cNvPr>
@@ -5729,7 +5832,7 @@
             <p:cNvPr id="8" name="תיבת טקסט 7">
               <a:extLst>
                 <a:ext uri="{FF2B5EF4-FFF2-40B4-BE49-F238E27FC236}">
-                  <a16:creationId xmlns:a16="http://schemas.microsoft.com/office/drawing/2014/main" id="{A00E5443-D2A7-F32B-9FEB-5DD535B2C9E8}"/>
+                  <a16:creationId xmlns:a16="http://schemas.microsoft.com/office/drawing/2014/main" id="{C51A0F83-69F4-2FF5-7831-5C534E20A13F}"/>
                 </a:ext>
               </a:extLst>
             </p:cNvPr>
@@ -5745,9 +5848,9 @@
               <a:avLst/>
             </a:prstGeom>
             <a:noFill/>
-            <a:ln w="38100">
+            <a:ln>
               <a:solidFill>
-                <a:srgbClr val="00B050"/>
+                <a:schemeClr val="bg1"/>
               </a:solidFill>
             </a:ln>
           </p:spPr>
@@ -5758,17 +5861,17 @@
             <a:lstStyle/>
             <a:p>
               <a:r>
-                <a:rPr lang="en-US" dirty="0" err="1">
-                  <a:highlight>
-                    <a:srgbClr val="00FFFF"/>
-                  </a:highlight>
+                <a:rPr lang="en-US" dirty="0">
+                  <a:solidFill>
+                    <a:schemeClr val="bg1"/>
+                  </a:solidFill>
                 </a:rPr>
                 <a:t>KeyCloak</a:t>
               </a:r>
               <a:endParaRPr lang="he-IL" dirty="0">
-                <a:highlight>
-                  <a:srgbClr val="00FFFF"/>
-                </a:highlight>
+                <a:solidFill>
+                  <a:schemeClr val="bg1"/>
+                </a:solidFill>
               </a:endParaRPr>
             </a:p>
           </p:txBody>
@@ -5778,7 +5881,7 @@
             <p:cNvPr id="9" name="תיבת טקסט 8">
               <a:extLst>
                 <a:ext uri="{FF2B5EF4-FFF2-40B4-BE49-F238E27FC236}">
-                  <a16:creationId xmlns:a16="http://schemas.microsoft.com/office/drawing/2014/main" id="{7D176EE1-BCA3-D2AF-EF81-4181720B800A}"/>
+                  <a16:creationId xmlns:a16="http://schemas.microsoft.com/office/drawing/2014/main" id="{C7CD45FC-78A7-7ED8-1692-75097C80B968}"/>
                 </a:ext>
               </a:extLst>
             </p:cNvPr>
@@ -5827,7 +5930,7 @@
             <p:cNvPr id="10" name="תיבת טקסט 9">
               <a:extLst>
                 <a:ext uri="{FF2B5EF4-FFF2-40B4-BE49-F238E27FC236}">
-                  <a16:creationId xmlns:a16="http://schemas.microsoft.com/office/drawing/2014/main" id="{2F5F76F9-E0F1-0102-AC15-7D71926BC0BA}"/>
+                  <a16:creationId xmlns:a16="http://schemas.microsoft.com/office/drawing/2014/main" id="{E033A260-C7EC-46BD-A3B1-B4983EF0DA05}"/>
                 </a:ext>
               </a:extLst>
             </p:cNvPr>
@@ -5876,7 +5979,7 @@
             <p:cNvPr id="11" name="תיבת טקסט 10">
               <a:extLst>
                 <a:ext uri="{FF2B5EF4-FFF2-40B4-BE49-F238E27FC236}">
-                  <a16:creationId xmlns:a16="http://schemas.microsoft.com/office/drawing/2014/main" id="{E010532E-3778-BBD2-C361-A1FF3C64D3FA}"/>
+                  <a16:creationId xmlns:a16="http://schemas.microsoft.com/office/drawing/2014/main" id="{5EB1DD46-8ABC-CF58-0386-C4D6E61B57EB}"/>
                 </a:ext>
               </a:extLst>
             </p:cNvPr>
@@ -5892,9 +5995,9 @@
               <a:avLst/>
             </a:prstGeom>
             <a:noFill/>
-            <a:ln>
+            <a:ln w="38100">
               <a:solidFill>
-                <a:schemeClr val="bg1"/>
+                <a:srgbClr val="00B050"/>
               </a:solidFill>
             </a:ln>
           </p:spPr>
@@ -5906,16 +6009,16 @@
             <a:p>
               <a:r>
                 <a:rPr lang="en-US" dirty="0">
-                  <a:solidFill>
-                    <a:schemeClr val="bg1"/>
-                  </a:solidFill>
+                  <a:highlight>
+                    <a:srgbClr val="00FFFF"/>
+                  </a:highlight>
                 </a:rPr>
                 <a:t>Notification</a:t>
               </a:r>
               <a:endParaRPr lang="he-IL" dirty="0">
-                <a:solidFill>
-                  <a:schemeClr val="bg1"/>
-                </a:solidFill>
+                <a:highlight>
+                  <a:srgbClr val="00FFFF"/>
+                </a:highlight>
               </a:endParaRPr>
             </a:p>
           </p:txBody>
@@ -5925,7 +6028,7 @@
             <p:cNvPr id="12" name="תיבת טקסט 11">
               <a:extLst>
                 <a:ext uri="{FF2B5EF4-FFF2-40B4-BE49-F238E27FC236}">
-                  <a16:creationId xmlns:a16="http://schemas.microsoft.com/office/drawing/2014/main" id="{0F86DEB8-8394-8303-AB85-D6B5152F6D1B}"/>
+                  <a16:creationId xmlns:a16="http://schemas.microsoft.com/office/drawing/2014/main" id="{8611CB22-DB38-AB47-1121-CC9495594C46}"/>
                 </a:ext>
               </a:extLst>
             </p:cNvPr>
@@ -5974,7 +6077,7 @@
             <p:cNvPr id="13" name="תיבת טקסט 12">
               <a:extLst>
                 <a:ext uri="{FF2B5EF4-FFF2-40B4-BE49-F238E27FC236}">
-                  <a16:creationId xmlns:a16="http://schemas.microsoft.com/office/drawing/2014/main" id="{7F5AA384-1738-3C51-BA0D-D3CDA87CF28A}"/>
+                  <a16:creationId xmlns:a16="http://schemas.microsoft.com/office/drawing/2014/main" id="{F7D383BE-2B52-3215-4290-67EBBAF96A8D}"/>
                 </a:ext>
               </a:extLst>
             </p:cNvPr>
@@ -6023,7 +6126,7 @@
             <p:cNvPr id="14" name="תיבת טקסט 13">
               <a:extLst>
                 <a:ext uri="{FF2B5EF4-FFF2-40B4-BE49-F238E27FC236}">
-                  <a16:creationId xmlns:a16="http://schemas.microsoft.com/office/drawing/2014/main" id="{85EE0BE8-0413-64A2-7DDD-FD99FA6E3C52}"/>
+                  <a16:creationId xmlns:a16="http://schemas.microsoft.com/office/drawing/2014/main" id="{59577345-8E86-162D-74A0-6E92B51E9DA0}"/>
                 </a:ext>
               </a:extLst>
             </p:cNvPr>
@@ -6072,7 +6175,7 @@
             <p:cNvPr id="16" name="מחבר חץ ישר 15">
               <a:extLst>
                 <a:ext uri="{FF2B5EF4-FFF2-40B4-BE49-F238E27FC236}">
-                  <a16:creationId xmlns:a16="http://schemas.microsoft.com/office/drawing/2014/main" id="{FDC0AB77-3D7F-206F-ECB1-4ED6F4BB63E8}"/>
+                  <a16:creationId xmlns:a16="http://schemas.microsoft.com/office/drawing/2014/main" id="{5342C7D6-0D31-51AD-04ED-CE2E0A6C28FD}"/>
                 </a:ext>
               </a:extLst>
             </p:cNvPr>
@@ -6118,7 +6221,7 @@
             <p:cNvPr id="22" name="מחבר: מרפקי 21">
               <a:extLst>
                 <a:ext uri="{FF2B5EF4-FFF2-40B4-BE49-F238E27FC236}">
-                  <a16:creationId xmlns:a16="http://schemas.microsoft.com/office/drawing/2014/main" id="{5A9A224A-E548-66D3-A694-2A66ABB2B5C8}"/>
+                  <a16:creationId xmlns:a16="http://schemas.microsoft.com/office/drawing/2014/main" id="{CC5FE44E-F536-ACD7-9300-29056101A737}"/>
                 </a:ext>
               </a:extLst>
             </p:cNvPr>
@@ -6165,7 +6268,7 @@
             <p:cNvPr id="26" name="מחבר: מרפקי 25">
               <a:extLst>
                 <a:ext uri="{FF2B5EF4-FFF2-40B4-BE49-F238E27FC236}">
-                  <a16:creationId xmlns:a16="http://schemas.microsoft.com/office/drawing/2014/main" id="{7A25E919-E0BF-545A-69DE-8FFA6AC8673B}"/>
+                  <a16:creationId xmlns:a16="http://schemas.microsoft.com/office/drawing/2014/main" id="{5A3DD336-3AFF-9F15-280D-60D59EE3F928}"/>
                 </a:ext>
               </a:extLst>
             </p:cNvPr>
@@ -6212,7 +6315,7 @@
             <p:cNvPr id="32" name="מחבר: מרפקי 31">
               <a:extLst>
                 <a:ext uri="{FF2B5EF4-FFF2-40B4-BE49-F238E27FC236}">
-                  <a16:creationId xmlns:a16="http://schemas.microsoft.com/office/drawing/2014/main" id="{67C2993A-C409-3B18-39A4-9CAD0306BA4C}"/>
+                  <a16:creationId xmlns:a16="http://schemas.microsoft.com/office/drawing/2014/main" id="{CC04B110-C35F-370A-CD2F-337EB36D215F}"/>
                 </a:ext>
               </a:extLst>
             </p:cNvPr>
@@ -6259,7 +6362,7 @@
             <p:cNvPr id="36" name="מחבר: מרפקי 35">
               <a:extLst>
                 <a:ext uri="{FF2B5EF4-FFF2-40B4-BE49-F238E27FC236}">
-                  <a16:creationId xmlns:a16="http://schemas.microsoft.com/office/drawing/2014/main" id="{C7151391-0472-7E16-39F3-7EFA7900C9D6}"/>
+                  <a16:creationId xmlns:a16="http://schemas.microsoft.com/office/drawing/2014/main" id="{1372909A-6E8F-FC97-1501-C76634EB8BA4}"/>
                 </a:ext>
               </a:extLst>
             </p:cNvPr>
@@ -6306,7 +6409,7 @@
             <p:cNvPr id="38" name="מחבר חץ ישר 37">
               <a:extLst>
                 <a:ext uri="{FF2B5EF4-FFF2-40B4-BE49-F238E27FC236}">
-                  <a16:creationId xmlns:a16="http://schemas.microsoft.com/office/drawing/2014/main" id="{1B1CDF3F-8661-CC6F-33E0-7F87DA800D3E}"/>
+                  <a16:creationId xmlns:a16="http://schemas.microsoft.com/office/drawing/2014/main" id="{614A500C-406B-6468-3E48-F2150482D392}"/>
                 </a:ext>
               </a:extLst>
             </p:cNvPr>
@@ -6351,7 +6454,7 @@
             <p:cNvPr id="41" name="מחבר חץ ישר 40">
               <a:extLst>
                 <a:ext uri="{FF2B5EF4-FFF2-40B4-BE49-F238E27FC236}">
-                  <a16:creationId xmlns:a16="http://schemas.microsoft.com/office/drawing/2014/main" id="{E2E874A5-EB9F-073B-F054-596A8BB27804}"/>
+                  <a16:creationId xmlns:a16="http://schemas.microsoft.com/office/drawing/2014/main" id="{2DE0BEE8-9790-2DEF-FAB6-2AFC0F42F0C9}"/>
                 </a:ext>
               </a:extLst>
             </p:cNvPr>
@@ -6396,7 +6499,7 @@
             <p:cNvPr id="43" name="מחבר: מרפקי 42">
               <a:extLst>
                 <a:ext uri="{FF2B5EF4-FFF2-40B4-BE49-F238E27FC236}">
-                  <a16:creationId xmlns:a16="http://schemas.microsoft.com/office/drawing/2014/main" id="{27D3A294-AB58-1942-3B1A-FE48F7F46D16}"/>
+                  <a16:creationId xmlns:a16="http://schemas.microsoft.com/office/drawing/2014/main" id="{7F6AB80E-180D-4B4A-9577-2ECDFADB91A2}"/>
                 </a:ext>
               </a:extLst>
             </p:cNvPr>
@@ -6442,7 +6545,7 @@
             <p:cNvPr id="45" name="מחבר: מרפקי 44">
               <a:extLst>
                 <a:ext uri="{FF2B5EF4-FFF2-40B4-BE49-F238E27FC236}">
-                  <a16:creationId xmlns:a16="http://schemas.microsoft.com/office/drawing/2014/main" id="{EC53CE51-588C-6A54-AE41-8E4EE62B9C15}"/>
+                  <a16:creationId xmlns:a16="http://schemas.microsoft.com/office/drawing/2014/main" id="{58024B18-9B1A-D2B4-73F9-02DDEDBC5BE2}"/>
                 </a:ext>
               </a:extLst>
             </p:cNvPr>
@@ -6489,7 +6592,7 @@
             <p:cNvPr id="48" name="מחבר חץ ישר 47">
               <a:extLst>
                 <a:ext uri="{FF2B5EF4-FFF2-40B4-BE49-F238E27FC236}">
-                  <a16:creationId xmlns:a16="http://schemas.microsoft.com/office/drawing/2014/main" id="{802ABB47-6380-01BE-4F0C-FABB6A1AB4FF}"/>
+                  <a16:creationId xmlns:a16="http://schemas.microsoft.com/office/drawing/2014/main" id="{78D34D48-3F02-52F5-354F-C7500E9D2EBF}"/>
                 </a:ext>
               </a:extLst>
             </p:cNvPr>
@@ -6534,7 +6637,7 @@
             <p:cNvPr id="50" name="מחבר: מרפקי 49">
               <a:extLst>
                 <a:ext uri="{FF2B5EF4-FFF2-40B4-BE49-F238E27FC236}">
-                  <a16:creationId xmlns:a16="http://schemas.microsoft.com/office/drawing/2014/main" id="{180B86C1-8658-A79D-9CFB-56529104BB81}"/>
+                  <a16:creationId xmlns:a16="http://schemas.microsoft.com/office/drawing/2014/main" id="{43A5E478-2796-BE72-ED14-3F475251042F}"/>
                 </a:ext>
               </a:extLst>
             </p:cNvPr>
@@ -6580,7 +6683,7 @@
             <p:cNvPr id="57" name="מחבר חץ ישר 56">
               <a:extLst>
                 <a:ext uri="{FF2B5EF4-FFF2-40B4-BE49-F238E27FC236}">
-                  <a16:creationId xmlns:a16="http://schemas.microsoft.com/office/drawing/2014/main" id="{FFED64B8-735B-D3BB-8099-96B0812D0F97}"/>
+                  <a16:creationId xmlns:a16="http://schemas.microsoft.com/office/drawing/2014/main" id="{D48626E6-AF7C-E18D-5671-19DB5226868C}"/>
                 </a:ext>
               </a:extLst>
             </p:cNvPr>
@@ -6625,7 +6728,7 @@
             <p:cNvPr id="63" name="מחבר: מרפקי 62">
               <a:extLst>
                 <a:ext uri="{FF2B5EF4-FFF2-40B4-BE49-F238E27FC236}">
-                  <a16:creationId xmlns:a16="http://schemas.microsoft.com/office/drawing/2014/main" id="{055CE2FA-BCD6-4E38-8E54-3433DFF40DA0}"/>
+                  <a16:creationId xmlns:a16="http://schemas.microsoft.com/office/drawing/2014/main" id="{004707B3-61E0-226D-95AA-719EEB6579BD}"/>
                 </a:ext>
               </a:extLst>
             </p:cNvPr>
@@ -6667,188 +6770,209 @@
           </p:style>
         </p:cxnSp>
       </p:grpSp>
-      <p:cxnSp>
-        <p:nvCxnSpPr>
-          <p:cNvPr id="5" name="מחבר חץ ישר 4">
+      <p:grpSp>
+        <p:nvGrpSpPr>
+          <p:cNvPr id="3" name="קבוצה 2">
             <a:extLst>
               <a:ext uri="{FF2B5EF4-FFF2-40B4-BE49-F238E27FC236}">
-                <a16:creationId xmlns:a16="http://schemas.microsoft.com/office/drawing/2014/main" id="{3DD513A4-F7D2-F3C1-EDCF-C805DBC0F960}"/>
+                <a16:creationId xmlns:a16="http://schemas.microsoft.com/office/drawing/2014/main" id="{BC5931C1-98B0-44DD-E888-5127C2899AB4}"/>
               </a:ext>
             </a:extLst>
           </p:cNvPr>
-          <p:cNvCxnSpPr/>
+          <p:cNvGrpSpPr/>
           <p:nvPr/>
-        </p:nvCxnSpPr>
-        <p:spPr>
-          <a:xfrm flipH="1">
-            <a:off x="1837944" y="722376"/>
-            <a:ext cx="804672" cy="0"/>
+        </p:nvGrpSpPr>
+        <p:grpSpPr>
+          <a:xfrm>
+            <a:off x="2246587" y="421056"/>
+            <a:ext cx="2115638" cy="690069"/>
+            <a:chOff x="536122" y="530352"/>
+            <a:chExt cx="2115638" cy="690069"/>
           </a:xfrm>
-          <a:prstGeom prst="straightConnector1">
-            <a:avLst/>
-          </a:prstGeom>
-          <a:ln w="38100">
-            <a:solidFill>
-              <a:schemeClr val="bg1"/>
-            </a:solidFill>
-            <a:tailEnd type="triangle"/>
-          </a:ln>
-        </p:spPr>
-        <p:style>
-          <a:lnRef idx="2">
-            <a:schemeClr val="accent1"/>
-          </a:lnRef>
-          <a:fillRef idx="0">
-            <a:schemeClr val="accent1"/>
-          </a:fillRef>
-          <a:effectRef idx="1">
-            <a:schemeClr val="accent1"/>
-          </a:effectRef>
-          <a:fontRef idx="minor">
-            <a:schemeClr val="tx1"/>
-          </a:fontRef>
-        </p:style>
-      </p:cxnSp>
-      <p:cxnSp>
-        <p:nvCxnSpPr>
-          <p:cNvPr id="15" name="מחבר חץ ישר 14">
-            <a:extLst>
-              <a:ext uri="{FF2B5EF4-FFF2-40B4-BE49-F238E27FC236}">
-                <a16:creationId xmlns:a16="http://schemas.microsoft.com/office/drawing/2014/main" id="{8360F11B-67E6-2E70-FEF0-5759270226A2}"/>
-              </a:ext>
-            </a:extLst>
-          </p:cNvPr>
-          <p:cNvCxnSpPr/>
-          <p:nvPr/>
-        </p:nvCxnSpPr>
-        <p:spPr>
-          <a:xfrm flipH="1">
-            <a:off x="1847088" y="1035755"/>
-            <a:ext cx="804672" cy="0"/>
-          </a:xfrm>
-          <a:prstGeom prst="straightConnector1">
-            <a:avLst/>
-          </a:prstGeom>
-          <a:ln w="38100">
-            <a:solidFill>
-              <a:srgbClr val="FFFF00"/>
-            </a:solidFill>
-            <a:tailEnd type="triangle"/>
-          </a:ln>
-        </p:spPr>
-        <p:style>
-          <a:lnRef idx="2">
-            <a:schemeClr val="accent1"/>
-          </a:lnRef>
-          <a:fillRef idx="0">
-            <a:schemeClr val="accent1"/>
-          </a:fillRef>
-          <a:effectRef idx="1">
-            <a:schemeClr val="accent1"/>
-          </a:effectRef>
-          <a:fontRef idx="minor">
-            <a:schemeClr val="tx1"/>
-          </a:fontRef>
-        </p:style>
-      </p:cxnSp>
-      <p:sp>
-        <p:nvSpPr>
-          <p:cNvPr id="17" name="תיבת טקסט 16">
-            <a:extLst>
-              <a:ext uri="{FF2B5EF4-FFF2-40B4-BE49-F238E27FC236}">
-                <a16:creationId xmlns:a16="http://schemas.microsoft.com/office/drawing/2014/main" id="{CE3DE175-8A18-4FDE-A7E6-E111854B42DB}"/>
-              </a:ext>
-            </a:extLst>
-          </p:cNvPr>
-          <p:cNvSpPr txBox="1"/>
-          <p:nvPr/>
-        </p:nvSpPr>
-        <p:spPr>
-          <a:xfrm>
-            <a:off x="536122" y="530352"/>
-            <a:ext cx="1173806" cy="369332"/>
-          </a:xfrm>
-          <a:prstGeom prst="rect">
-            <a:avLst/>
-          </a:prstGeom>
-          <a:noFill/>
-          <a:ln>
+        </p:grpSpPr>
+        <p:cxnSp>
+          <p:nvCxnSpPr>
+            <p:cNvPr id="19" name="מחבר חץ ישר 18">
+              <a:extLst>
+                <a:ext uri="{FF2B5EF4-FFF2-40B4-BE49-F238E27FC236}">
+                  <a16:creationId xmlns:a16="http://schemas.microsoft.com/office/drawing/2014/main" id="{42E2AE3B-45FD-437D-A8F1-03A9F811C7B6}"/>
+                </a:ext>
+              </a:extLst>
+            </p:cNvPr>
+            <p:cNvCxnSpPr/>
+            <p:nvPr/>
+          </p:nvCxnSpPr>
+          <p:spPr>
+            <a:xfrm flipH="1">
+              <a:off x="1837944" y="722376"/>
+              <a:ext cx="804672" cy="0"/>
+            </a:xfrm>
+            <a:prstGeom prst="straightConnector1">
+              <a:avLst/>
+            </a:prstGeom>
+            <a:ln w="38100">
+              <a:solidFill>
+                <a:schemeClr val="bg1"/>
+              </a:solidFill>
+              <a:tailEnd type="triangle"/>
+            </a:ln>
+          </p:spPr>
+          <p:style>
+            <a:lnRef idx="2">
+              <a:schemeClr val="accent1"/>
+            </a:lnRef>
+            <a:fillRef idx="0">
+              <a:schemeClr val="accent1"/>
+            </a:fillRef>
+            <a:effectRef idx="1">
+              <a:schemeClr val="accent1"/>
+            </a:effectRef>
+            <a:fontRef idx="minor">
+              <a:schemeClr val="tx1"/>
+            </a:fontRef>
+          </p:style>
+        </p:cxnSp>
+        <p:cxnSp>
+          <p:nvCxnSpPr>
+            <p:cNvPr id="20" name="מחבר חץ ישר 19">
+              <a:extLst>
+                <a:ext uri="{FF2B5EF4-FFF2-40B4-BE49-F238E27FC236}">
+                  <a16:creationId xmlns:a16="http://schemas.microsoft.com/office/drawing/2014/main" id="{E09032E5-5AD2-90D4-33B2-B7466467ACA5}"/>
+                </a:ext>
+              </a:extLst>
+            </p:cNvPr>
+            <p:cNvCxnSpPr/>
+            <p:nvPr/>
+          </p:nvCxnSpPr>
+          <p:spPr>
+            <a:xfrm flipH="1">
+              <a:off x="1847088" y="1035755"/>
+              <a:ext cx="804672" cy="0"/>
+            </a:xfrm>
+            <a:prstGeom prst="straightConnector1">
+              <a:avLst/>
+            </a:prstGeom>
+            <a:ln w="38100">
+              <a:solidFill>
+                <a:srgbClr val="FFFF00"/>
+              </a:solidFill>
+              <a:tailEnd type="triangle"/>
+            </a:ln>
+          </p:spPr>
+          <p:style>
+            <a:lnRef idx="2">
+              <a:schemeClr val="accent1"/>
+            </a:lnRef>
+            <a:fillRef idx="0">
+              <a:schemeClr val="accent1"/>
+            </a:fillRef>
+            <a:effectRef idx="1">
+              <a:schemeClr val="accent1"/>
+            </a:effectRef>
+            <a:fontRef idx="minor">
+              <a:schemeClr val="tx1"/>
+            </a:fontRef>
+          </p:style>
+        </p:cxnSp>
+        <p:sp>
+          <p:nvSpPr>
+            <p:cNvPr id="21" name="תיבת טקסט 20">
+              <a:extLst>
+                <a:ext uri="{FF2B5EF4-FFF2-40B4-BE49-F238E27FC236}">
+                  <a16:creationId xmlns:a16="http://schemas.microsoft.com/office/drawing/2014/main" id="{599C9C84-734F-67C0-0001-11B4FEA890D3}"/>
+                </a:ext>
+              </a:extLst>
+            </p:cNvPr>
+            <p:cNvSpPr txBox="1"/>
+            <p:nvPr/>
+          </p:nvSpPr>
+          <p:spPr>
+            <a:xfrm>
+              <a:off x="536122" y="530352"/>
+              <a:ext cx="1173806" cy="369332"/>
+            </a:xfrm>
+            <a:prstGeom prst="rect">
+              <a:avLst/>
+            </a:prstGeom>
             <a:noFill/>
-          </a:ln>
-        </p:spPr>
-        <p:txBody>
-          <a:bodyPr wrap="square" rtlCol="1">
-            <a:spAutoFit/>
-          </a:bodyPr>
-          <a:lstStyle/>
-          <a:p>
-            <a:r>
-              <a:rPr lang="en-US" dirty="0" err="1">
+            <a:ln>
+              <a:noFill/>
+            </a:ln>
+          </p:spPr>
+          <p:txBody>
+            <a:bodyPr wrap="square" rtlCol="1">
+              <a:spAutoFit/>
+            </a:bodyPr>
+            <a:lstStyle/>
+            <a:p>
+              <a:r>
+                <a:rPr lang="en-US" dirty="0" err="1">
+                  <a:solidFill>
+                    <a:schemeClr val="bg1"/>
+                  </a:solidFill>
+                </a:rPr>
+                <a:t>RestAPI</a:t>
+              </a:r>
+              <a:endParaRPr lang="he-IL" dirty="0">
                 <a:solidFill>
                   <a:schemeClr val="bg1"/>
                 </a:solidFill>
-              </a:rPr>
-              <a:t>RestAPI</a:t>
-            </a:r>
-            <a:endParaRPr lang="he-IL" dirty="0">
-              <a:solidFill>
-                <a:schemeClr val="bg1"/>
-              </a:solidFill>
-            </a:endParaRPr>
-          </a:p>
-        </p:txBody>
-      </p:sp>
-      <p:sp>
-        <p:nvSpPr>
-          <p:cNvPr id="18" name="תיבת טקסט 17">
-            <a:extLst>
-              <a:ext uri="{FF2B5EF4-FFF2-40B4-BE49-F238E27FC236}">
-                <a16:creationId xmlns:a16="http://schemas.microsoft.com/office/drawing/2014/main" id="{C5EB8F97-4EA4-7C47-E287-C63C7B8F702B}"/>
-              </a:ext>
-            </a:extLst>
-          </p:cNvPr>
-          <p:cNvSpPr txBox="1"/>
-          <p:nvPr/>
-        </p:nvSpPr>
-        <p:spPr>
-          <a:xfrm>
-            <a:off x="536122" y="851089"/>
-            <a:ext cx="1173806" cy="369332"/>
-          </a:xfrm>
-          <a:prstGeom prst="rect">
-            <a:avLst/>
-          </a:prstGeom>
-          <a:noFill/>
-          <a:ln>
+              </a:endParaRPr>
+            </a:p>
+          </p:txBody>
+        </p:sp>
+        <p:sp>
+          <p:nvSpPr>
+            <p:cNvPr id="23" name="תיבת טקסט 22">
+              <a:extLst>
+                <a:ext uri="{FF2B5EF4-FFF2-40B4-BE49-F238E27FC236}">
+                  <a16:creationId xmlns:a16="http://schemas.microsoft.com/office/drawing/2014/main" id="{6FA6C224-8C7D-565C-3FD2-1FD62202E2BB}"/>
+                </a:ext>
+              </a:extLst>
+            </p:cNvPr>
+            <p:cNvSpPr txBox="1"/>
+            <p:nvPr/>
+          </p:nvSpPr>
+          <p:spPr>
+            <a:xfrm>
+              <a:off x="536122" y="851089"/>
+              <a:ext cx="1173806" cy="369332"/>
+            </a:xfrm>
+            <a:prstGeom prst="rect">
+              <a:avLst/>
+            </a:prstGeom>
             <a:noFill/>
-          </a:ln>
-        </p:spPr>
-        <p:txBody>
-          <a:bodyPr wrap="square" rtlCol="1">
-            <a:spAutoFit/>
-          </a:bodyPr>
-          <a:lstStyle/>
-          <a:p>
-            <a:r>
-              <a:rPr lang="en-US" dirty="0">
+            <a:ln>
+              <a:noFill/>
+            </a:ln>
+          </p:spPr>
+          <p:txBody>
+            <a:bodyPr wrap="square" rtlCol="1">
+              <a:spAutoFit/>
+            </a:bodyPr>
+            <a:lstStyle/>
+            <a:p>
+              <a:r>
+                <a:rPr lang="en-US" dirty="0">
+                  <a:solidFill>
+                    <a:srgbClr val="FFFF00"/>
+                  </a:solidFill>
+                </a:rPr>
+                <a:t>Kafka</a:t>
+              </a:r>
+              <a:endParaRPr lang="he-IL" dirty="0">
                 <a:solidFill>
                   <a:srgbClr val="FFFF00"/>
                 </a:solidFill>
-              </a:rPr>
-              <a:t>Kafka</a:t>
-            </a:r>
-            <a:endParaRPr lang="he-IL" dirty="0">
-              <a:solidFill>
-                <a:srgbClr val="FFFF00"/>
-              </a:solidFill>
-            </a:endParaRPr>
-          </a:p>
-        </p:txBody>
-      </p:sp>
+              </a:endParaRPr>
+            </a:p>
+          </p:txBody>
+        </p:sp>
+      </p:grpSp>
     </p:spTree>
     <p:extLst>
       <p:ext uri="{BB962C8B-B14F-4D97-AF65-F5344CB8AC3E}">
-        <p14:creationId xmlns:p14="http://schemas.microsoft.com/office/powerpoint/2010/main" val="4059946886"/>
+        <p14:creationId xmlns:p14="http://schemas.microsoft.com/office/powerpoint/2010/main" val="2941472367"/>
       </p:ext>
     </p:extLst>
   </p:cSld>
@@ -9744,184 +9868,205 @@
           </p:style>
         </p:cxnSp>
       </p:grpSp>
-      <p:cxnSp>
-        <p:nvCxnSpPr>
-          <p:cNvPr id="5" name="מחבר חץ ישר 4">
+      <p:grpSp>
+        <p:nvGrpSpPr>
+          <p:cNvPr id="3" name="קבוצה 2">
             <a:extLst>
               <a:ext uri="{FF2B5EF4-FFF2-40B4-BE49-F238E27FC236}">
-                <a16:creationId xmlns:a16="http://schemas.microsoft.com/office/drawing/2014/main" id="{89EE10E1-4FCC-D5F3-EAE4-EC239907A0D1}"/>
+                <a16:creationId xmlns:a16="http://schemas.microsoft.com/office/drawing/2014/main" id="{D5C8E744-A6C0-B8A7-9686-D7098D2F9A58}"/>
               </a:ext>
             </a:extLst>
           </p:cNvPr>
-          <p:cNvCxnSpPr/>
+          <p:cNvGrpSpPr/>
           <p:nvPr/>
-        </p:nvCxnSpPr>
-        <p:spPr>
-          <a:xfrm flipH="1">
-            <a:off x="1837944" y="722376"/>
-            <a:ext cx="804672" cy="0"/>
+        </p:nvGrpSpPr>
+        <p:grpSpPr>
+          <a:xfrm>
+            <a:off x="2246587" y="421056"/>
+            <a:ext cx="2115638" cy="690069"/>
+            <a:chOff x="536122" y="530352"/>
+            <a:chExt cx="2115638" cy="690069"/>
           </a:xfrm>
-          <a:prstGeom prst="straightConnector1">
-            <a:avLst/>
-          </a:prstGeom>
-          <a:ln w="38100">
-            <a:solidFill>
-              <a:schemeClr val="bg1"/>
-            </a:solidFill>
-            <a:tailEnd type="triangle"/>
-          </a:ln>
-        </p:spPr>
-        <p:style>
-          <a:lnRef idx="2">
-            <a:schemeClr val="accent1"/>
-          </a:lnRef>
-          <a:fillRef idx="0">
-            <a:schemeClr val="accent1"/>
-          </a:fillRef>
-          <a:effectRef idx="1">
-            <a:schemeClr val="accent1"/>
-          </a:effectRef>
-          <a:fontRef idx="minor">
-            <a:schemeClr val="tx1"/>
-          </a:fontRef>
-        </p:style>
-      </p:cxnSp>
-      <p:cxnSp>
-        <p:nvCxnSpPr>
-          <p:cNvPr id="15" name="מחבר חץ ישר 14">
-            <a:extLst>
-              <a:ext uri="{FF2B5EF4-FFF2-40B4-BE49-F238E27FC236}">
-                <a16:creationId xmlns:a16="http://schemas.microsoft.com/office/drawing/2014/main" id="{B5E7B161-CFC3-A6BC-6A6E-3361353956C9}"/>
-              </a:ext>
-            </a:extLst>
-          </p:cNvPr>
-          <p:cNvCxnSpPr/>
-          <p:nvPr/>
-        </p:nvCxnSpPr>
-        <p:spPr>
-          <a:xfrm flipH="1">
-            <a:off x="1847088" y="1035755"/>
-            <a:ext cx="804672" cy="0"/>
-          </a:xfrm>
-          <a:prstGeom prst="straightConnector1">
-            <a:avLst/>
-          </a:prstGeom>
-          <a:ln w="38100">
-            <a:solidFill>
-              <a:srgbClr val="FFFF00"/>
-            </a:solidFill>
-            <a:tailEnd type="triangle"/>
-          </a:ln>
-        </p:spPr>
-        <p:style>
-          <a:lnRef idx="2">
-            <a:schemeClr val="accent1"/>
-          </a:lnRef>
-          <a:fillRef idx="0">
-            <a:schemeClr val="accent1"/>
-          </a:fillRef>
-          <a:effectRef idx="1">
-            <a:schemeClr val="accent1"/>
-          </a:effectRef>
-          <a:fontRef idx="minor">
-            <a:schemeClr val="tx1"/>
-          </a:fontRef>
-        </p:style>
-      </p:cxnSp>
-      <p:sp>
-        <p:nvSpPr>
-          <p:cNvPr id="17" name="תיבת טקסט 16">
-            <a:extLst>
-              <a:ext uri="{FF2B5EF4-FFF2-40B4-BE49-F238E27FC236}">
-                <a16:creationId xmlns:a16="http://schemas.microsoft.com/office/drawing/2014/main" id="{43A772D2-4218-9B0E-F038-DD5A3C1F49CA}"/>
-              </a:ext>
-            </a:extLst>
-          </p:cNvPr>
-          <p:cNvSpPr txBox="1"/>
-          <p:nvPr/>
-        </p:nvSpPr>
-        <p:spPr>
-          <a:xfrm>
-            <a:off x="536122" y="530352"/>
-            <a:ext cx="1173806" cy="369332"/>
-          </a:xfrm>
-          <a:prstGeom prst="rect">
-            <a:avLst/>
-          </a:prstGeom>
-          <a:noFill/>
-          <a:ln>
+        </p:grpSpPr>
+        <p:cxnSp>
+          <p:nvCxnSpPr>
+            <p:cNvPr id="5" name="מחבר חץ ישר 4">
+              <a:extLst>
+                <a:ext uri="{FF2B5EF4-FFF2-40B4-BE49-F238E27FC236}">
+                  <a16:creationId xmlns:a16="http://schemas.microsoft.com/office/drawing/2014/main" id="{89EE10E1-4FCC-D5F3-EAE4-EC239907A0D1}"/>
+                </a:ext>
+              </a:extLst>
+            </p:cNvPr>
+            <p:cNvCxnSpPr/>
+            <p:nvPr/>
+          </p:nvCxnSpPr>
+          <p:spPr>
+            <a:xfrm flipH="1">
+              <a:off x="1837944" y="722376"/>
+              <a:ext cx="804672" cy="0"/>
+            </a:xfrm>
+            <a:prstGeom prst="straightConnector1">
+              <a:avLst/>
+            </a:prstGeom>
+            <a:ln w="38100">
+              <a:solidFill>
+                <a:schemeClr val="bg1"/>
+              </a:solidFill>
+              <a:tailEnd type="triangle"/>
+            </a:ln>
+          </p:spPr>
+          <p:style>
+            <a:lnRef idx="2">
+              <a:schemeClr val="accent1"/>
+            </a:lnRef>
+            <a:fillRef idx="0">
+              <a:schemeClr val="accent1"/>
+            </a:fillRef>
+            <a:effectRef idx="1">
+              <a:schemeClr val="accent1"/>
+            </a:effectRef>
+            <a:fontRef idx="minor">
+              <a:schemeClr val="tx1"/>
+            </a:fontRef>
+          </p:style>
+        </p:cxnSp>
+        <p:cxnSp>
+          <p:nvCxnSpPr>
+            <p:cNvPr id="15" name="מחבר חץ ישר 14">
+              <a:extLst>
+                <a:ext uri="{FF2B5EF4-FFF2-40B4-BE49-F238E27FC236}">
+                  <a16:creationId xmlns:a16="http://schemas.microsoft.com/office/drawing/2014/main" id="{B5E7B161-CFC3-A6BC-6A6E-3361353956C9}"/>
+                </a:ext>
+              </a:extLst>
+            </p:cNvPr>
+            <p:cNvCxnSpPr/>
+            <p:nvPr/>
+          </p:nvCxnSpPr>
+          <p:spPr>
+            <a:xfrm flipH="1">
+              <a:off x="1847088" y="1035755"/>
+              <a:ext cx="804672" cy="0"/>
+            </a:xfrm>
+            <a:prstGeom prst="straightConnector1">
+              <a:avLst/>
+            </a:prstGeom>
+            <a:ln w="38100">
+              <a:solidFill>
+                <a:srgbClr val="FFFF00"/>
+              </a:solidFill>
+              <a:tailEnd type="triangle"/>
+            </a:ln>
+          </p:spPr>
+          <p:style>
+            <a:lnRef idx="2">
+              <a:schemeClr val="accent1"/>
+            </a:lnRef>
+            <a:fillRef idx="0">
+              <a:schemeClr val="accent1"/>
+            </a:fillRef>
+            <a:effectRef idx="1">
+              <a:schemeClr val="accent1"/>
+            </a:effectRef>
+            <a:fontRef idx="minor">
+              <a:schemeClr val="tx1"/>
+            </a:fontRef>
+          </p:style>
+        </p:cxnSp>
+        <p:sp>
+          <p:nvSpPr>
+            <p:cNvPr id="17" name="תיבת טקסט 16">
+              <a:extLst>
+                <a:ext uri="{FF2B5EF4-FFF2-40B4-BE49-F238E27FC236}">
+                  <a16:creationId xmlns:a16="http://schemas.microsoft.com/office/drawing/2014/main" id="{43A772D2-4218-9B0E-F038-DD5A3C1F49CA}"/>
+                </a:ext>
+              </a:extLst>
+            </p:cNvPr>
+            <p:cNvSpPr txBox="1"/>
+            <p:nvPr/>
+          </p:nvSpPr>
+          <p:spPr>
+            <a:xfrm>
+              <a:off x="536122" y="530352"/>
+              <a:ext cx="1173806" cy="369332"/>
+            </a:xfrm>
+            <a:prstGeom prst="rect">
+              <a:avLst/>
+            </a:prstGeom>
             <a:noFill/>
-          </a:ln>
-        </p:spPr>
-        <p:txBody>
-          <a:bodyPr wrap="square" rtlCol="1">
-            <a:spAutoFit/>
-          </a:bodyPr>
-          <a:lstStyle/>
-          <a:p>
-            <a:r>
-              <a:rPr lang="en-US" dirty="0" err="1">
+            <a:ln>
+              <a:noFill/>
+            </a:ln>
+          </p:spPr>
+          <p:txBody>
+            <a:bodyPr wrap="square" rtlCol="1">
+              <a:spAutoFit/>
+            </a:bodyPr>
+            <a:lstStyle/>
+            <a:p>
+              <a:r>
+                <a:rPr lang="en-US" dirty="0" err="1">
+                  <a:solidFill>
+                    <a:schemeClr val="bg1"/>
+                  </a:solidFill>
+                </a:rPr>
+                <a:t>RestAPI</a:t>
+              </a:r>
+              <a:endParaRPr lang="he-IL" dirty="0">
                 <a:solidFill>
                   <a:schemeClr val="bg1"/>
                 </a:solidFill>
-              </a:rPr>
-              <a:t>RestAPI</a:t>
-            </a:r>
-            <a:endParaRPr lang="he-IL" dirty="0">
-              <a:solidFill>
-                <a:schemeClr val="bg1"/>
-              </a:solidFill>
-            </a:endParaRPr>
-          </a:p>
-        </p:txBody>
-      </p:sp>
-      <p:sp>
-        <p:nvSpPr>
-          <p:cNvPr id="18" name="תיבת טקסט 17">
-            <a:extLst>
-              <a:ext uri="{FF2B5EF4-FFF2-40B4-BE49-F238E27FC236}">
-                <a16:creationId xmlns:a16="http://schemas.microsoft.com/office/drawing/2014/main" id="{EE2B245F-FFEC-E0C8-87D0-2C8AB1DCE95C}"/>
-              </a:ext>
-            </a:extLst>
-          </p:cNvPr>
-          <p:cNvSpPr txBox="1"/>
-          <p:nvPr/>
-        </p:nvSpPr>
-        <p:spPr>
-          <a:xfrm>
-            <a:off x="536122" y="851089"/>
-            <a:ext cx="1173806" cy="369332"/>
-          </a:xfrm>
-          <a:prstGeom prst="rect">
-            <a:avLst/>
-          </a:prstGeom>
-          <a:noFill/>
-          <a:ln>
+              </a:endParaRPr>
+            </a:p>
+          </p:txBody>
+        </p:sp>
+        <p:sp>
+          <p:nvSpPr>
+            <p:cNvPr id="18" name="תיבת טקסט 17">
+              <a:extLst>
+                <a:ext uri="{FF2B5EF4-FFF2-40B4-BE49-F238E27FC236}">
+                  <a16:creationId xmlns:a16="http://schemas.microsoft.com/office/drawing/2014/main" id="{EE2B245F-FFEC-E0C8-87D0-2C8AB1DCE95C}"/>
+                </a:ext>
+              </a:extLst>
+            </p:cNvPr>
+            <p:cNvSpPr txBox="1"/>
+            <p:nvPr/>
+          </p:nvSpPr>
+          <p:spPr>
+            <a:xfrm>
+              <a:off x="536122" y="851089"/>
+              <a:ext cx="1173806" cy="369332"/>
+            </a:xfrm>
+            <a:prstGeom prst="rect">
+              <a:avLst/>
+            </a:prstGeom>
             <a:noFill/>
-          </a:ln>
-        </p:spPr>
-        <p:txBody>
-          <a:bodyPr wrap="square" rtlCol="1">
-            <a:spAutoFit/>
-          </a:bodyPr>
-          <a:lstStyle/>
-          <a:p>
-            <a:r>
-              <a:rPr lang="en-US" dirty="0">
+            <a:ln>
+              <a:noFill/>
+            </a:ln>
+          </p:spPr>
+          <p:txBody>
+            <a:bodyPr wrap="square" rtlCol="1">
+              <a:spAutoFit/>
+            </a:bodyPr>
+            <a:lstStyle/>
+            <a:p>
+              <a:r>
+                <a:rPr lang="en-US" dirty="0">
+                  <a:solidFill>
+                    <a:srgbClr val="FFFF00"/>
+                  </a:solidFill>
+                </a:rPr>
+                <a:t>Kafka</a:t>
+              </a:r>
+              <a:endParaRPr lang="he-IL" dirty="0">
                 <a:solidFill>
                   <a:srgbClr val="FFFF00"/>
                 </a:solidFill>
-              </a:rPr>
-              <a:t>Kafka</a:t>
-            </a:r>
-            <a:endParaRPr lang="he-IL" dirty="0">
-              <a:solidFill>
-                <a:srgbClr val="FFFF00"/>
-              </a:solidFill>
-            </a:endParaRPr>
-          </a:p>
-        </p:txBody>
-      </p:sp>
+              </a:endParaRPr>
+            </a:p>
+          </p:txBody>
+        </p:sp>
+      </p:grpSp>
     </p:spTree>
     <p:extLst>
       <p:ext uri="{BB962C8B-B14F-4D97-AF65-F5344CB8AC3E}">
@@ -11055,184 +11200,205 @@
           </p:style>
         </p:cxnSp>
       </p:grpSp>
-      <p:cxnSp>
-        <p:nvCxnSpPr>
-          <p:cNvPr id="5" name="מחבר חץ ישר 4">
+      <p:grpSp>
+        <p:nvGrpSpPr>
+          <p:cNvPr id="3" name="קבוצה 2">
             <a:extLst>
               <a:ext uri="{FF2B5EF4-FFF2-40B4-BE49-F238E27FC236}">
-                <a16:creationId xmlns:a16="http://schemas.microsoft.com/office/drawing/2014/main" id="{39C89211-3557-12E1-4916-487ED308DCDC}"/>
+                <a16:creationId xmlns:a16="http://schemas.microsoft.com/office/drawing/2014/main" id="{83B8DB5D-C5D6-B4A0-335A-E0A8222EF863}"/>
               </a:ext>
             </a:extLst>
           </p:cNvPr>
-          <p:cNvCxnSpPr/>
+          <p:cNvGrpSpPr/>
           <p:nvPr/>
-        </p:nvCxnSpPr>
-        <p:spPr>
-          <a:xfrm flipH="1">
-            <a:off x="1837944" y="722376"/>
-            <a:ext cx="804672" cy="0"/>
+        </p:nvGrpSpPr>
+        <p:grpSpPr>
+          <a:xfrm>
+            <a:off x="2246587" y="421056"/>
+            <a:ext cx="2115638" cy="690069"/>
+            <a:chOff x="536122" y="530352"/>
+            <a:chExt cx="2115638" cy="690069"/>
           </a:xfrm>
-          <a:prstGeom prst="straightConnector1">
-            <a:avLst/>
-          </a:prstGeom>
-          <a:ln w="38100">
-            <a:solidFill>
-              <a:schemeClr val="bg1"/>
-            </a:solidFill>
-            <a:tailEnd type="triangle"/>
-          </a:ln>
-        </p:spPr>
-        <p:style>
-          <a:lnRef idx="2">
-            <a:schemeClr val="accent1"/>
-          </a:lnRef>
-          <a:fillRef idx="0">
-            <a:schemeClr val="accent1"/>
-          </a:fillRef>
-          <a:effectRef idx="1">
-            <a:schemeClr val="accent1"/>
-          </a:effectRef>
-          <a:fontRef idx="minor">
-            <a:schemeClr val="tx1"/>
-          </a:fontRef>
-        </p:style>
-      </p:cxnSp>
-      <p:cxnSp>
-        <p:nvCxnSpPr>
-          <p:cNvPr id="15" name="מחבר חץ ישר 14">
-            <a:extLst>
-              <a:ext uri="{FF2B5EF4-FFF2-40B4-BE49-F238E27FC236}">
-                <a16:creationId xmlns:a16="http://schemas.microsoft.com/office/drawing/2014/main" id="{3E2A7228-BACD-BB75-1860-FA7A64EEDFB4}"/>
-              </a:ext>
-            </a:extLst>
-          </p:cNvPr>
-          <p:cNvCxnSpPr/>
-          <p:nvPr/>
-        </p:nvCxnSpPr>
-        <p:spPr>
-          <a:xfrm flipH="1">
-            <a:off x="1847088" y="1035755"/>
-            <a:ext cx="804672" cy="0"/>
-          </a:xfrm>
-          <a:prstGeom prst="straightConnector1">
-            <a:avLst/>
-          </a:prstGeom>
-          <a:ln w="38100">
-            <a:solidFill>
-              <a:srgbClr val="FFFF00"/>
-            </a:solidFill>
-            <a:tailEnd type="triangle"/>
-          </a:ln>
-        </p:spPr>
-        <p:style>
-          <a:lnRef idx="2">
-            <a:schemeClr val="accent1"/>
-          </a:lnRef>
-          <a:fillRef idx="0">
-            <a:schemeClr val="accent1"/>
-          </a:fillRef>
-          <a:effectRef idx="1">
-            <a:schemeClr val="accent1"/>
-          </a:effectRef>
-          <a:fontRef idx="minor">
-            <a:schemeClr val="tx1"/>
-          </a:fontRef>
-        </p:style>
-      </p:cxnSp>
-      <p:sp>
-        <p:nvSpPr>
-          <p:cNvPr id="17" name="תיבת טקסט 16">
-            <a:extLst>
-              <a:ext uri="{FF2B5EF4-FFF2-40B4-BE49-F238E27FC236}">
-                <a16:creationId xmlns:a16="http://schemas.microsoft.com/office/drawing/2014/main" id="{B4F1B4D8-2F61-E2EE-1FF4-C9F45B1D090E}"/>
-              </a:ext>
-            </a:extLst>
-          </p:cNvPr>
-          <p:cNvSpPr txBox="1"/>
-          <p:nvPr/>
-        </p:nvSpPr>
-        <p:spPr>
-          <a:xfrm>
-            <a:off x="536122" y="530352"/>
-            <a:ext cx="1173806" cy="369332"/>
-          </a:xfrm>
-          <a:prstGeom prst="rect">
-            <a:avLst/>
-          </a:prstGeom>
-          <a:noFill/>
-          <a:ln>
+        </p:grpSpPr>
+        <p:cxnSp>
+          <p:nvCxnSpPr>
+            <p:cNvPr id="19" name="מחבר חץ ישר 18">
+              <a:extLst>
+                <a:ext uri="{FF2B5EF4-FFF2-40B4-BE49-F238E27FC236}">
+                  <a16:creationId xmlns:a16="http://schemas.microsoft.com/office/drawing/2014/main" id="{2A641A49-67C1-5352-F5A0-6BB079B2EB5D}"/>
+                </a:ext>
+              </a:extLst>
+            </p:cNvPr>
+            <p:cNvCxnSpPr/>
+            <p:nvPr/>
+          </p:nvCxnSpPr>
+          <p:spPr>
+            <a:xfrm flipH="1">
+              <a:off x="1837944" y="722376"/>
+              <a:ext cx="804672" cy="0"/>
+            </a:xfrm>
+            <a:prstGeom prst="straightConnector1">
+              <a:avLst/>
+            </a:prstGeom>
+            <a:ln w="38100">
+              <a:solidFill>
+                <a:schemeClr val="bg1"/>
+              </a:solidFill>
+              <a:tailEnd type="triangle"/>
+            </a:ln>
+          </p:spPr>
+          <p:style>
+            <a:lnRef idx="2">
+              <a:schemeClr val="accent1"/>
+            </a:lnRef>
+            <a:fillRef idx="0">
+              <a:schemeClr val="accent1"/>
+            </a:fillRef>
+            <a:effectRef idx="1">
+              <a:schemeClr val="accent1"/>
+            </a:effectRef>
+            <a:fontRef idx="minor">
+              <a:schemeClr val="tx1"/>
+            </a:fontRef>
+          </p:style>
+        </p:cxnSp>
+        <p:cxnSp>
+          <p:nvCxnSpPr>
+            <p:cNvPr id="20" name="מחבר חץ ישר 19">
+              <a:extLst>
+                <a:ext uri="{FF2B5EF4-FFF2-40B4-BE49-F238E27FC236}">
+                  <a16:creationId xmlns:a16="http://schemas.microsoft.com/office/drawing/2014/main" id="{E0B65E54-FC59-B528-6E77-7ABD65210F1C}"/>
+                </a:ext>
+              </a:extLst>
+            </p:cNvPr>
+            <p:cNvCxnSpPr/>
+            <p:nvPr/>
+          </p:nvCxnSpPr>
+          <p:spPr>
+            <a:xfrm flipH="1">
+              <a:off x="1847088" y="1035755"/>
+              <a:ext cx="804672" cy="0"/>
+            </a:xfrm>
+            <a:prstGeom prst="straightConnector1">
+              <a:avLst/>
+            </a:prstGeom>
+            <a:ln w="38100">
+              <a:solidFill>
+                <a:srgbClr val="FFFF00"/>
+              </a:solidFill>
+              <a:tailEnd type="triangle"/>
+            </a:ln>
+          </p:spPr>
+          <p:style>
+            <a:lnRef idx="2">
+              <a:schemeClr val="accent1"/>
+            </a:lnRef>
+            <a:fillRef idx="0">
+              <a:schemeClr val="accent1"/>
+            </a:fillRef>
+            <a:effectRef idx="1">
+              <a:schemeClr val="accent1"/>
+            </a:effectRef>
+            <a:fontRef idx="minor">
+              <a:schemeClr val="tx1"/>
+            </a:fontRef>
+          </p:style>
+        </p:cxnSp>
+        <p:sp>
+          <p:nvSpPr>
+            <p:cNvPr id="21" name="תיבת טקסט 20">
+              <a:extLst>
+                <a:ext uri="{FF2B5EF4-FFF2-40B4-BE49-F238E27FC236}">
+                  <a16:creationId xmlns:a16="http://schemas.microsoft.com/office/drawing/2014/main" id="{08A32EB7-4C2B-4678-5BA4-FAE2C324C671}"/>
+                </a:ext>
+              </a:extLst>
+            </p:cNvPr>
+            <p:cNvSpPr txBox="1"/>
+            <p:nvPr/>
+          </p:nvSpPr>
+          <p:spPr>
+            <a:xfrm>
+              <a:off x="536122" y="530352"/>
+              <a:ext cx="1173806" cy="369332"/>
+            </a:xfrm>
+            <a:prstGeom prst="rect">
+              <a:avLst/>
+            </a:prstGeom>
             <a:noFill/>
-          </a:ln>
-        </p:spPr>
-        <p:txBody>
-          <a:bodyPr wrap="square" rtlCol="1">
-            <a:spAutoFit/>
-          </a:bodyPr>
-          <a:lstStyle/>
-          <a:p>
-            <a:r>
-              <a:rPr lang="en-US" dirty="0" err="1">
+            <a:ln>
+              <a:noFill/>
+            </a:ln>
+          </p:spPr>
+          <p:txBody>
+            <a:bodyPr wrap="square" rtlCol="1">
+              <a:spAutoFit/>
+            </a:bodyPr>
+            <a:lstStyle/>
+            <a:p>
+              <a:r>
+                <a:rPr lang="en-US" dirty="0" err="1">
+                  <a:solidFill>
+                    <a:schemeClr val="bg1"/>
+                  </a:solidFill>
+                </a:rPr>
+                <a:t>RestAPI</a:t>
+              </a:r>
+              <a:endParaRPr lang="he-IL" dirty="0">
                 <a:solidFill>
                   <a:schemeClr val="bg1"/>
                 </a:solidFill>
-              </a:rPr>
-              <a:t>RestAPI</a:t>
-            </a:r>
-            <a:endParaRPr lang="he-IL" dirty="0">
-              <a:solidFill>
-                <a:schemeClr val="bg1"/>
-              </a:solidFill>
-            </a:endParaRPr>
-          </a:p>
-        </p:txBody>
-      </p:sp>
-      <p:sp>
-        <p:nvSpPr>
-          <p:cNvPr id="18" name="תיבת טקסט 17">
-            <a:extLst>
-              <a:ext uri="{FF2B5EF4-FFF2-40B4-BE49-F238E27FC236}">
-                <a16:creationId xmlns:a16="http://schemas.microsoft.com/office/drawing/2014/main" id="{68D9B37D-4E7C-93CB-4DF0-8AF87EC97E56}"/>
-              </a:ext>
-            </a:extLst>
-          </p:cNvPr>
-          <p:cNvSpPr txBox="1"/>
-          <p:nvPr/>
-        </p:nvSpPr>
-        <p:spPr>
-          <a:xfrm>
-            <a:off x="536122" y="851089"/>
-            <a:ext cx="1173806" cy="369332"/>
-          </a:xfrm>
-          <a:prstGeom prst="rect">
-            <a:avLst/>
-          </a:prstGeom>
-          <a:noFill/>
-          <a:ln>
+              </a:endParaRPr>
+            </a:p>
+          </p:txBody>
+        </p:sp>
+        <p:sp>
+          <p:nvSpPr>
+            <p:cNvPr id="23" name="תיבת טקסט 22">
+              <a:extLst>
+                <a:ext uri="{FF2B5EF4-FFF2-40B4-BE49-F238E27FC236}">
+                  <a16:creationId xmlns:a16="http://schemas.microsoft.com/office/drawing/2014/main" id="{8FB391AD-8A0A-F05F-70A8-7344F64BA564}"/>
+                </a:ext>
+              </a:extLst>
+            </p:cNvPr>
+            <p:cNvSpPr txBox="1"/>
+            <p:nvPr/>
+          </p:nvSpPr>
+          <p:spPr>
+            <a:xfrm>
+              <a:off x="536122" y="851089"/>
+              <a:ext cx="1173806" cy="369332"/>
+            </a:xfrm>
+            <a:prstGeom prst="rect">
+              <a:avLst/>
+            </a:prstGeom>
             <a:noFill/>
-          </a:ln>
-        </p:spPr>
-        <p:txBody>
-          <a:bodyPr wrap="square" rtlCol="1">
-            <a:spAutoFit/>
-          </a:bodyPr>
-          <a:lstStyle/>
-          <a:p>
-            <a:r>
-              <a:rPr lang="en-US" dirty="0">
+            <a:ln>
+              <a:noFill/>
+            </a:ln>
+          </p:spPr>
+          <p:txBody>
+            <a:bodyPr wrap="square" rtlCol="1">
+              <a:spAutoFit/>
+            </a:bodyPr>
+            <a:lstStyle/>
+            <a:p>
+              <a:r>
+                <a:rPr lang="en-US" dirty="0">
+                  <a:solidFill>
+                    <a:srgbClr val="FFFF00"/>
+                  </a:solidFill>
+                </a:rPr>
+                <a:t>Kafka</a:t>
+              </a:r>
+              <a:endParaRPr lang="he-IL" dirty="0">
                 <a:solidFill>
                   <a:srgbClr val="FFFF00"/>
                 </a:solidFill>
-              </a:rPr>
-              <a:t>Kafka</a:t>
-            </a:r>
-            <a:endParaRPr lang="he-IL" dirty="0">
-              <a:solidFill>
-                <a:srgbClr val="FFFF00"/>
-              </a:solidFill>
-            </a:endParaRPr>
-          </a:p>
-        </p:txBody>
-      </p:sp>
+              </a:endParaRPr>
+            </a:p>
+          </p:txBody>
+        </p:sp>
+      </p:grpSp>
     </p:spTree>
     <p:extLst>
       <p:ext uri="{BB962C8B-B14F-4D97-AF65-F5344CB8AC3E}">
@@ -11247,6 +11413,1338 @@
 </file>
 
 <file path=ppt/slides/slide6.xml><?xml version="1.0" encoding="utf-8"?>
+<p:sld xmlns:a="http://schemas.openxmlformats.org/drawingml/2006/main" xmlns:r="http://schemas.openxmlformats.org/officeDocument/2006/relationships" xmlns:p="http://schemas.openxmlformats.org/presentationml/2006/main">
+  <p:cSld>
+    <p:spTree>
+      <p:nvGrpSpPr>
+        <p:cNvPr id="1" name="">
+          <a:extLst>
+            <a:ext uri="{FF2B5EF4-FFF2-40B4-BE49-F238E27FC236}">
+              <a16:creationId xmlns:a16="http://schemas.microsoft.com/office/drawing/2014/main" id="{D4402788-F6AF-D444-A7CF-2847CC59A251}"/>
+            </a:ext>
+          </a:extLst>
+        </p:cNvPr>
+        <p:cNvGrpSpPr/>
+        <p:nvPr/>
+      </p:nvGrpSpPr>
+      <p:grpSpPr>
+        <a:xfrm>
+          <a:off x="0" y="0"/>
+          <a:ext cx="0" cy="0"/>
+          <a:chOff x="0" y="0"/>
+          <a:chExt cx="0" cy="0"/>
+        </a:xfrm>
+      </p:grpSpPr>
+      <p:pic>
+        <p:nvPicPr>
+          <p:cNvPr id="6" name="תמונה 5" descr="תמונה שמכילה גרפיקה, לוגו, עיצוב גרפי, צילום מסך&#10;&#10;תוכן שנוצר על-ידי בינה מלאכותית עשוי להיות שגוי.">
+            <a:extLst>
+              <a:ext uri="{FF2B5EF4-FFF2-40B4-BE49-F238E27FC236}">
+                <a16:creationId xmlns:a16="http://schemas.microsoft.com/office/drawing/2014/main" id="{E0545743-03DC-DF3B-4D37-6A4E3DE37236}"/>
+              </a:ext>
+            </a:extLst>
+          </p:cNvPr>
+          <p:cNvPicPr>
+            <a:picLocks noChangeAspect="1"/>
+          </p:cNvPicPr>
+          <p:nvPr/>
+        </p:nvPicPr>
+        <p:blipFill>
+          <a:blip r:embed="rId3">
+            <a:extLst>
+              <a:ext uri="{28A0092B-C50C-407E-A947-70E740481C1C}">
+                <a14:useLocalDpi xmlns:a14="http://schemas.microsoft.com/office/drawing/2010/main" val="0"/>
+              </a:ext>
+            </a:extLst>
+          </a:blip>
+          <a:stretch>
+            <a:fillRect/>
+          </a:stretch>
+        </p:blipFill>
+        <p:spPr>
+          <a:xfrm>
+            <a:off x="9780620" y="-125380"/>
+            <a:ext cx="1875258" cy="1875258"/>
+          </a:xfrm>
+          <a:prstGeom prst="rect">
+            <a:avLst/>
+          </a:prstGeom>
+        </p:spPr>
+      </p:pic>
+      <p:grpSp>
+        <p:nvGrpSpPr>
+          <p:cNvPr id="2" name="קבוצה 1">
+            <a:extLst>
+              <a:ext uri="{FF2B5EF4-FFF2-40B4-BE49-F238E27FC236}">
+                <a16:creationId xmlns:a16="http://schemas.microsoft.com/office/drawing/2014/main" id="{812986DE-FB38-3CF6-655A-9D4F9DE93160}"/>
+              </a:ext>
+            </a:extLst>
+          </p:cNvPr>
+          <p:cNvGrpSpPr/>
+          <p:nvPr/>
+        </p:nvGrpSpPr>
+        <p:grpSpPr>
+          <a:xfrm>
+            <a:off x="1119415" y="1257300"/>
+            <a:ext cx="9089572" cy="4744998"/>
+            <a:chOff x="217715" y="381000"/>
+            <a:chExt cx="9089572" cy="4744998"/>
+          </a:xfrm>
+        </p:grpSpPr>
+        <p:sp>
+          <p:nvSpPr>
+            <p:cNvPr id="4" name="תיבת טקסט 3">
+              <a:extLst>
+                <a:ext uri="{FF2B5EF4-FFF2-40B4-BE49-F238E27FC236}">
+                  <a16:creationId xmlns:a16="http://schemas.microsoft.com/office/drawing/2014/main" id="{FCA67BAC-9E18-8CA0-F998-AD48F95ABFCF}"/>
+                </a:ext>
+              </a:extLst>
+            </p:cNvPr>
+            <p:cNvSpPr txBox="1"/>
+            <p:nvPr/>
+          </p:nvSpPr>
+          <p:spPr>
+            <a:xfrm>
+              <a:off x="5529943" y="381000"/>
+              <a:ext cx="827314" cy="369332"/>
+            </a:xfrm>
+            <a:prstGeom prst="rect">
+              <a:avLst/>
+            </a:prstGeom>
+            <a:noFill/>
+            <a:ln>
+              <a:solidFill>
+                <a:schemeClr val="bg1"/>
+              </a:solidFill>
+            </a:ln>
+          </p:spPr>
+          <p:txBody>
+            <a:bodyPr wrap="square" rtlCol="1">
+              <a:spAutoFit/>
+            </a:bodyPr>
+            <a:lstStyle/>
+            <a:p>
+              <a:r>
+                <a:rPr lang="en-US" dirty="0">
+                  <a:solidFill>
+                    <a:schemeClr val="bg1"/>
+                  </a:solidFill>
+                </a:rPr>
+                <a:t>client</a:t>
+              </a:r>
+              <a:endParaRPr lang="he-IL" dirty="0">
+                <a:solidFill>
+                  <a:schemeClr val="bg1"/>
+                </a:solidFill>
+              </a:endParaRPr>
+            </a:p>
+          </p:txBody>
+        </p:sp>
+        <p:sp>
+          <p:nvSpPr>
+            <p:cNvPr id="7" name="תיבת טקסט 6">
+              <a:extLst>
+                <a:ext uri="{FF2B5EF4-FFF2-40B4-BE49-F238E27FC236}">
+                  <a16:creationId xmlns:a16="http://schemas.microsoft.com/office/drawing/2014/main" id="{3F855C44-A984-7E8A-5105-3E28830582F8}"/>
+                </a:ext>
+              </a:extLst>
+            </p:cNvPr>
+            <p:cNvSpPr txBox="1"/>
+            <p:nvPr/>
+          </p:nvSpPr>
+          <p:spPr>
+            <a:xfrm>
+              <a:off x="5323114" y="1351002"/>
+              <a:ext cx="1240971" cy="369332"/>
+            </a:xfrm>
+            <a:prstGeom prst="rect">
+              <a:avLst/>
+            </a:prstGeom>
+            <a:noFill/>
+            <a:ln>
+              <a:solidFill>
+                <a:schemeClr val="bg1"/>
+              </a:solidFill>
+            </a:ln>
+          </p:spPr>
+          <p:txBody>
+            <a:bodyPr wrap="square" rtlCol="1">
+              <a:spAutoFit/>
+            </a:bodyPr>
+            <a:lstStyle/>
+            <a:p>
+              <a:r>
+                <a:rPr lang="en-US" dirty="0">
+                  <a:solidFill>
+                    <a:schemeClr val="bg1"/>
+                  </a:solidFill>
+                </a:rPr>
+                <a:t>gateway</a:t>
+              </a:r>
+              <a:endParaRPr lang="he-IL" dirty="0">
+                <a:solidFill>
+                  <a:schemeClr val="bg1"/>
+                </a:solidFill>
+              </a:endParaRPr>
+            </a:p>
+          </p:txBody>
+        </p:sp>
+        <p:sp>
+          <p:nvSpPr>
+            <p:cNvPr id="8" name="תיבת טקסט 7">
+              <a:extLst>
+                <a:ext uri="{FF2B5EF4-FFF2-40B4-BE49-F238E27FC236}">
+                  <a16:creationId xmlns:a16="http://schemas.microsoft.com/office/drawing/2014/main" id="{A00E5443-D2A7-F32B-9FEB-5DD535B2C9E8}"/>
+                </a:ext>
+              </a:extLst>
+            </p:cNvPr>
+            <p:cNvSpPr txBox="1"/>
+            <p:nvPr/>
+          </p:nvSpPr>
+          <p:spPr>
+            <a:xfrm>
+              <a:off x="5475514" y="3408011"/>
+              <a:ext cx="1240971" cy="369332"/>
+            </a:xfrm>
+            <a:prstGeom prst="rect">
+              <a:avLst/>
+            </a:prstGeom>
+            <a:noFill/>
+            <a:ln w="38100">
+              <a:solidFill>
+                <a:srgbClr val="00B050"/>
+              </a:solidFill>
+            </a:ln>
+          </p:spPr>
+          <p:txBody>
+            <a:bodyPr wrap="square" rtlCol="1">
+              <a:spAutoFit/>
+            </a:bodyPr>
+            <a:lstStyle/>
+            <a:p>
+              <a:r>
+                <a:rPr lang="en-US" dirty="0" err="1">
+                  <a:highlight>
+                    <a:srgbClr val="00FFFF"/>
+                  </a:highlight>
+                </a:rPr>
+                <a:t>KeyCloak</a:t>
+              </a:r>
+              <a:endParaRPr lang="he-IL" dirty="0">
+                <a:highlight>
+                  <a:srgbClr val="00FFFF"/>
+                </a:highlight>
+              </a:endParaRPr>
+            </a:p>
+          </p:txBody>
+        </p:sp>
+        <p:sp>
+          <p:nvSpPr>
+            <p:cNvPr id="9" name="תיבת טקסט 8">
+              <a:extLst>
+                <a:ext uri="{FF2B5EF4-FFF2-40B4-BE49-F238E27FC236}">
+                  <a16:creationId xmlns:a16="http://schemas.microsoft.com/office/drawing/2014/main" id="{7D176EE1-BCA3-D2AF-EF81-4181720B800A}"/>
+                </a:ext>
+              </a:extLst>
+            </p:cNvPr>
+            <p:cNvSpPr txBox="1"/>
+            <p:nvPr/>
+          </p:nvSpPr>
+          <p:spPr>
+            <a:xfrm>
+              <a:off x="7685315" y="2177141"/>
+              <a:ext cx="1621972" cy="369332"/>
+            </a:xfrm>
+            <a:prstGeom prst="rect">
+              <a:avLst/>
+            </a:prstGeom>
+            <a:noFill/>
+            <a:ln>
+              <a:solidFill>
+                <a:schemeClr val="bg1"/>
+              </a:solidFill>
+            </a:ln>
+          </p:spPr>
+          <p:txBody>
+            <a:bodyPr wrap="square" rtlCol="1">
+              <a:spAutoFit/>
+            </a:bodyPr>
+            <a:lstStyle/>
+            <a:p>
+              <a:r>
+                <a:rPr lang="en-US" dirty="0">
+                  <a:solidFill>
+                    <a:schemeClr val="bg1"/>
+                  </a:solidFill>
+                </a:rPr>
+                <a:t>Data Manager</a:t>
+              </a:r>
+              <a:endParaRPr lang="he-IL" dirty="0">
+                <a:solidFill>
+                  <a:schemeClr val="bg1"/>
+                </a:solidFill>
+              </a:endParaRPr>
+            </a:p>
+          </p:txBody>
+        </p:sp>
+        <p:sp>
+          <p:nvSpPr>
+            <p:cNvPr id="10" name="תיבת טקסט 9">
+              <a:extLst>
+                <a:ext uri="{FF2B5EF4-FFF2-40B4-BE49-F238E27FC236}">
+                  <a16:creationId xmlns:a16="http://schemas.microsoft.com/office/drawing/2014/main" id="{2F5F76F9-E0F1-0102-AC15-7D71926BC0BA}"/>
+                </a:ext>
+              </a:extLst>
+            </p:cNvPr>
+            <p:cNvSpPr txBox="1"/>
+            <p:nvPr/>
+          </p:nvSpPr>
+          <p:spPr>
+            <a:xfrm>
+              <a:off x="3178630" y="2177141"/>
+              <a:ext cx="1709058" cy="369332"/>
+            </a:xfrm>
+            <a:prstGeom prst="rect">
+              <a:avLst/>
+            </a:prstGeom>
+            <a:noFill/>
+            <a:ln>
+              <a:solidFill>
+                <a:schemeClr val="bg1"/>
+              </a:solidFill>
+            </a:ln>
+          </p:spPr>
+          <p:txBody>
+            <a:bodyPr wrap="square" rtlCol="1">
+              <a:spAutoFit/>
+            </a:bodyPr>
+            <a:lstStyle/>
+            <a:p>
+              <a:r>
+                <a:rPr lang="en-US" dirty="0">
+                  <a:solidFill>
+                    <a:schemeClr val="bg1"/>
+                  </a:solidFill>
+                </a:rPr>
+                <a:t>News Manager</a:t>
+              </a:r>
+              <a:endParaRPr lang="he-IL" dirty="0">
+                <a:solidFill>
+                  <a:schemeClr val="bg1"/>
+                </a:solidFill>
+              </a:endParaRPr>
+            </a:p>
+          </p:txBody>
+        </p:sp>
+        <p:sp>
+          <p:nvSpPr>
+            <p:cNvPr id="11" name="תיבת טקסט 10">
+              <a:extLst>
+                <a:ext uri="{FF2B5EF4-FFF2-40B4-BE49-F238E27FC236}">
+                  <a16:creationId xmlns:a16="http://schemas.microsoft.com/office/drawing/2014/main" id="{E010532E-3778-BBD2-C361-A1FF3C64D3FA}"/>
+                </a:ext>
+              </a:extLst>
+            </p:cNvPr>
+            <p:cNvSpPr txBox="1"/>
+            <p:nvPr/>
+          </p:nvSpPr>
+          <p:spPr>
+            <a:xfrm>
+              <a:off x="217715" y="3526580"/>
+              <a:ext cx="1621972" cy="369332"/>
+            </a:xfrm>
+            <a:prstGeom prst="rect">
+              <a:avLst/>
+            </a:prstGeom>
+            <a:noFill/>
+            <a:ln>
+              <a:solidFill>
+                <a:schemeClr val="bg1"/>
+              </a:solidFill>
+            </a:ln>
+          </p:spPr>
+          <p:txBody>
+            <a:bodyPr wrap="square" rtlCol="1">
+              <a:spAutoFit/>
+            </a:bodyPr>
+            <a:lstStyle/>
+            <a:p>
+              <a:r>
+                <a:rPr lang="en-US" dirty="0">
+                  <a:solidFill>
+                    <a:schemeClr val="bg1"/>
+                  </a:solidFill>
+                </a:rPr>
+                <a:t>Notification</a:t>
+              </a:r>
+              <a:endParaRPr lang="he-IL" dirty="0">
+                <a:solidFill>
+                  <a:schemeClr val="bg1"/>
+                </a:solidFill>
+              </a:endParaRPr>
+            </a:p>
+          </p:txBody>
+        </p:sp>
+        <p:sp>
+          <p:nvSpPr>
+            <p:cNvPr id="12" name="תיבת טקסט 11">
+              <a:extLst>
+                <a:ext uri="{FF2B5EF4-FFF2-40B4-BE49-F238E27FC236}">
+                  <a16:creationId xmlns:a16="http://schemas.microsoft.com/office/drawing/2014/main" id="{0F86DEB8-8394-8303-AB85-D6B5152F6D1B}"/>
+                </a:ext>
+              </a:extLst>
+            </p:cNvPr>
+            <p:cNvSpPr txBox="1"/>
+            <p:nvPr/>
+          </p:nvSpPr>
+          <p:spPr>
+            <a:xfrm>
+              <a:off x="217715" y="1351002"/>
+              <a:ext cx="1621972" cy="369332"/>
+            </a:xfrm>
+            <a:prstGeom prst="rect">
+              <a:avLst/>
+            </a:prstGeom>
+            <a:noFill/>
+            <a:ln>
+              <a:solidFill>
+                <a:schemeClr val="bg1"/>
+              </a:solidFill>
+            </a:ln>
+          </p:spPr>
+          <p:txBody>
+            <a:bodyPr wrap="square" rtlCol="1">
+              <a:spAutoFit/>
+            </a:bodyPr>
+            <a:lstStyle/>
+            <a:p>
+              <a:r>
+                <a:rPr lang="en-US" dirty="0">
+                  <a:solidFill>
+                    <a:schemeClr val="bg1"/>
+                  </a:solidFill>
+                </a:rPr>
+                <a:t>LLM</a:t>
+              </a:r>
+              <a:endParaRPr lang="he-IL" dirty="0">
+                <a:solidFill>
+                  <a:schemeClr val="bg1"/>
+                </a:solidFill>
+              </a:endParaRPr>
+            </a:p>
+          </p:txBody>
+        </p:sp>
+        <p:sp>
+          <p:nvSpPr>
+            <p:cNvPr id="13" name="תיבת טקסט 12">
+              <a:extLst>
+                <a:ext uri="{FF2B5EF4-FFF2-40B4-BE49-F238E27FC236}">
+                  <a16:creationId xmlns:a16="http://schemas.microsoft.com/office/drawing/2014/main" id="{7F5AA384-1738-3C51-BA0D-D3CDA87CF28A}"/>
+                </a:ext>
+              </a:extLst>
+            </p:cNvPr>
+            <p:cNvSpPr txBox="1"/>
+            <p:nvPr/>
+          </p:nvSpPr>
+          <p:spPr>
+            <a:xfrm>
+              <a:off x="3178630" y="4756666"/>
+              <a:ext cx="1621972" cy="369332"/>
+            </a:xfrm>
+            <a:prstGeom prst="rect">
+              <a:avLst/>
+            </a:prstGeom>
+            <a:noFill/>
+            <a:ln>
+              <a:solidFill>
+                <a:schemeClr val="bg1"/>
+              </a:solidFill>
+            </a:ln>
+          </p:spPr>
+          <p:txBody>
+            <a:bodyPr wrap="square" rtlCol="1">
+              <a:spAutoFit/>
+            </a:bodyPr>
+            <a:lstStyle/>
+            <a:p>
+              <a:r>
+                <a:rPr lang="en-US" dirty="0">
+                  <a:solidFill>
+                    <a:schemeClr val="bg1"/>
+                  </a:solidFill>
+                </a:rPr>
+                <a:t>NewsData.IO</a:t>
+              </a:r>
+              <a:endParaRPr lang="he-IL" dirty="0">
+                <a:solidFill>
+                  <a:schemeClr val="bg1"/>
+                </a:solidFill>
+              </a:endParaRPr>
+            </a:p>
+          </p:txBody>
+        </p:sp>
+        <p:sp>
+          <p:nvSpPr>
+            <p:cNvPr id="14" name="תיבת טקסט 13">
+              <a:extLst>
+                <a:ext uri="{FF2B5EF4-FFF2-40B4-BE49-F238E27FC236}">
+                  <a16:creationId xmlns:a16="http://schemas.microsoft.com/office/drawing/2014/main" id="{85EE0BE8-0413-64A2-7DDD-FD99FA6E3C52}"/>
+                </a:ext>
+              </a:extLst>
+            </p:cNvPr>
+            <p:cNvSpPr txBox="1"/>
+            <p:nvPr/>
+          </p:nvSpPr>
+          <p:spPr>
+            <a:xfrm>
+              <a:off x="7685315" y="4560723"/>
+              <a:ext cx="1621972" cy="369332"/>
+            </a:xfrm>
+            <a:prstGeom prst="rect">
+              <a:avLst/>
+            </a:prstGeom>
+            <a:noFill/>
+            <a:ln>
+              <a:solidFill>
+                <a:schemeClr val="bg1"/>
+              </a:solidFill>
+            </a:ln>
+          </p:spPr>
+          <p:txBody>
+            <a:bodyPr wrap="square" rtlCol="1">
+              <a:spAutoFit/>
+            </a:bodyPr>
+            <a:lstStyle/>
+            <a:p>
+              <a:r>
+                <a:rPr lang="en-US" dirty="0">
+                  <a:solidFill>
+                    <a:schemeClr val="bg1"/>
+                  </a:solidFill>
+                </a:rPr>
+                <a:t>PostgreSQL</a:t>
+              </a:r>
+              <a:endParaRPr lang="he-IL" dirty="0">
+                <a:solidFill>
+                  <a:schemeClr val="bg1"/>
+                </a:solidFill>
+              </a:endParaRPr>
+            </a:p>
+          </p:txBody>
+        </p:sp>
+        <p:cxnSp>
+          <p:nvCxnSpPr>
+            <p:cNvPr id="16" name="מחבר חץ ישר 15">
+              <a:extLst>
+                <a:ext uri="{FF2B5EF4-FFF2-40B4-BE49-F238E27FC236}">
+                  <a16:creationId xmlns:a16="http://schemas.microsoft.com/office/drawing/2014/main" id="{FDC0AB77-3D7F-206F-ECB1-4ED6F4BB63E8}"/>
+                </a:ext>
+              </a:extLst>
+            </p:cNvPr>
+            <p:cNvCxnSpPr>
+              <a:stCxn id="4" idx="2"/>
+              <a:endCxn id="7" idx="0"/>
+            </p:cNvCxnSpPr>
+            <p:nvPr/>
+          </p:nvCxnSpPr>
+          <p:spPr>
+            <a:xfrm>
+              <a:off x="5943600" y="750332"/>
+              <a:ext cx="0" cy="600670"/>
+            </a:xfrm>
+            <a:prstGeom prst="straightConnector1">
+              <a:avLst/>
+            </a:prstGeom>
+            <a:ln w="38100">
+              <a:solidFill>
+                <a:schemeClr val="bg1"/>
+              </a:solidFill>
+              <a:headEnd type="triangle" w="med" len="med"/>
+              <a:tailEnd type="triangle" w="med" len="med"/>
+            </a:ln>
+          </p:spPr>
+          <p:style>
+            <a:lnRef idx="2">
+              <a:schemeClr val="accent1"/>
+            </a:lnRef>
+            <a:fillRef idx="0">
+              <a:schemeClr val="accent1"/>
+            </a:fillRef>
+            <a:effectRef idx="1">
+              <a:schemeClr val="accent1"/>
+            </a:effectRef>
+            <a:fontRef idx="minor">
+              <a:schemeClr val="tx1"/>
+            </a:fontRef>
+          </p:style>
+        </p:cxnSp>
+        <p:cxnSp>
+          <p:nvCxnSpPr>
+            <p:cNvPr id="22" name="מחבר: מרפקי 21">
+              <a:extLst>
+                <a:ext uri="{FF2B5EF4-FFF2-40B4-BE49-F238E27FC236}">
+                  <a16:creationId xmlns:a16="http://schemas.microsoft.com/office/drawing/2014/main" id="{5A9A224A-E548-66D3-A694-2A66ABB2B5C8}"/>
+                </a:ext>
+              </a:extLst>
+            </p:cNvPr>
+            <p:cNvCxnSpPr>
+              <a:cxnSpLocks/>
+              <a:stCxn id="7" idx="3"/>
+              <a:endCxn id="9" idx="0"/>
+            </p:cNvCxnSpPr>
+            <p:nvPr/>
+          </p:nvCxnSpPr>
+          <p:spPr>
+            <a:xfrm>
+              <a:off x="6564085" y="1535668"/>
+              <a:ext cx="1932216" cy="641473"/>
+            </a:xfrm>
+            <a:prstGeom prst="bentConnector2">
+              <a:avLst/>
+            </a:prstGeom>
+            <a:ln w="38100">
+              <a:solidFill>
+                <a:schemeClr val="bg1"/>
+              </a:solidFill>
+              <a:headEnd type="triangle" w="med" len="med"/>
+              <a:tailEnd type="triangle" w="med" len="med"/>
+            </a:ln>
+          </p:spPr>
+          <p:style>
+            <a:lnRef idx="2">
+              <a:schemeClr val="accent1"/>
+            </a:lnRef>
+            <a:fillRef idx="0">
+              <a:schemeClr val="accent1"/>
+            </a:fillRef>
+            <a:effectRef idx="1">
+              <a:schemeClr val="accent1"/>
+            </a:effectRef>
+            <a:fontRef idx="minor">
+              <a:schemeClr val="tx1"/>
+            </a:fontRef>
+          </p:style>
+        </p:cxnSp>
+        <p:cxnSp>
+          <p:nvCxnSpPr>
+            <p:cNvPr id="26" name="מחבר: מרפקי 25">
+              <a:extLst>
+                <a:ext uri="{FF2B5EF4-FFF2-40B4-BE49-F238E27FC236}">
+                  <a16:creationId xmlns:a16="http://schemas.microsoft.com/office/drawing/2014/main" id="{7A25E919-E0BF-545A-69DE-8FFA6AC8673B}"/>
+                </a:ext>
+              </a:extLst>
+            </p:cNvPr>
+            <p:cNvCxnSpPr>
+              <a:cxnSpLocks/>
+              <a:stCxn id="7" idx="1"/>
+              <a:endCxn id="10" idx="0"/>
+            </p:cNvCxnSpPr>
+            <p:nvPr/>
+          </p:nvCxnSpPr>
+          <p:spPr>
+            <a:xfrm rot="10800000" flipV="1">
+              <a:off x="4033160" y="1535667"/>
+              <a:ext cx="1289955" cy="641473"/>
+            </a:xfrm>
+            <a:prstGeom prst="bentConnector2">
+              <a:avLst/>
+            </a:prstGeom>
+            <a:ln w="38100">
+              <a:solidFill>
+                <a:schemeClr val="bg1"/>
+              </a:solidFill>
+              <a:headEnd type="triangle" w="med" len="med"/>
+              <a:tailEnd type="triangle" w="med" len="med"/>
+            </a:ln>
+          </p:spPr>
+          <p:style>
+            <a:lnRef idx="2">
+              <a:schemeClr val="accent1"/>
+            </a:lnRef>
+            <a:fillRef idx="0">
+              <a:schemeClr val="accent1"/>
+            </a:fillRef>
+            <a:effectRef idx="1">
+              <a:schemeClr val="accent1"/>
+            </a:effectRef>
+            <a:fontRef idx="minor">
+              <a:schemeClr val="tx1"/>
+            </a:fontRef>
+          </p:style>
+        </p:cxnSp>
+        <p:cxnSp>
+          <p:nvCxnSpPr>
+            <p:cNvPr id="32" name="מחבר: מרפקי 31">
+              <a:extLst>
+                <a:ext uri="{FF2B5EF4-FFF2-40B4-BE49-F238E27FC236}">
+                  <a16:creationId xmlns:a16="http://schemas.microsoft.com/office/drawing/2014/main" id="{67C2993A-C409-3B18-39A4-9CAD0306BA4C}"/>
+                </a:ext>
+              </a:extLst>
+            </p:cNvPr>
+            <p:cNvCxnSpPr>
+              <a:cxnSpLocks/>
+              <a:stCxn id="10" idx="1"/>
+              <a:endCxn id="12" idx="3"/>
+            </p:cNvCxnSpPr>
+            <p:nvPr/>
+          </p:nvCxnSpPr>
+          <p:spPr>
+            <a:xfrm rot="10800000">
+              <a:off x="1839688" y="1535669"/>
+              <a:ext cx="1338943" cy="826139"/>
+            </a:xfrm>
+            <a:prstGeom prst="bentConnector3">
+              <a:avLst/>
+            </a:prstGeom>
+            <a:ln w="38100">
+              <a:solidFill>
+                <a:srgbClr val="FFFF00"/>
+              </a:solidFill>
+              <a:headEnd type="triangle" w="med" len="med"/>
+              <a:tailEnd type="triangle" w="med" len="med"/>
+            </a:ln>
+          </p:spPr>
+          <p:style>
+            <a:lnRef idx="2">
+              <a:schemeClr val="accent1"/>
+            </a:lnRef>
+            <a:fillRef idx="0">
+              <a:schemeClr val="accent1"/>
+            </a:fillRef>
+            <a:effectRef idx="1">
+              <a:schemeClr val="accent1"/>
+            </a:effectRef>
+            <a:fontRef idx="minor">
+              <a:schemeClr val="tx1"/>
+            </a:fontRef>
+          </p:style>
+        </p:cxnSp>
+        <p:cxnSp>
+          <p:nvCxnSpPr>
+            <p:cNvPr id="36" name="מחבר: מרפקי 35">
+              <a:extLst>
+                <a:ext uri="{FF2B5EF4-FFF2-40B4-BE49-F238E27FC236}">
+                  <a16:creationId xmlns:a16="http://schemas.microsoft.com/office/drawing/2014/main" id="{C7151391-0472-7E16-39F3-7EFA7900C9D6}"/>
+                </a:ext>
+              </a:extLst>
+            </p:cNvPr>
+            <p:cNvCxnSpPr>
+              <a:cxnSpLocks/>
+              <a:stCxn id="10" idx="2"/>
+              <a:endCxn id="11" idx="0"/>
+            </p:cNvCxnSpPr>
+            <p:nvPr/>
+          </p:nvCxnSpPr>
+          <p:spPr>
+            <a:xfrm rot="5400000">
+              <a:off x="2040877" y="1534297"/>
+              <a:ext cx="980107" cy="3004458"/>
+            </a:xfrm>
+            <a:prstGeom prst="bentConnector3">
+              <a:avLst/>
+            </a:prstGeom>
+            <a:ln w="38100">
+              <a:solidFill>
+                <a:srgbClr val="FFFF00"/>
+              </a:solidFill>
+              <a:headEnd type="none" w="med" len="med"/>
+              <a:tailEnd type="triangle" w="med" len="med"/>
+            </a:ln>
+          </p:spPr>
+          <p:style>
+            <a:lnRef idx="2">
+              <a:schemeClr val="accent1"/>
+            </a:lnRef>
+            <a:fillRef idx="0">
+              <a:schemeClr val="accent1"/>
+            </a:fillRef>
+            <a:effectRef idx="1">
+              <a:schemeClr val="accent1"/>
+            </a:effectRef>
+            <a:fontRef idx="minor">
+              <a:schemeClr val="tx1"/>
+            </a:fontRef>
+          </p:style>
+        </p:cxnSp>
+        <p:cxnSp>
+          <p:nvCxnSpPr>
+            <p:cNvPr id="38" name="מחבר חץ ישר 37">
+              <a:extLst>
+                <a:ext uri="{FF2B5EF4-FFF2-40B4-BE49-F238E27FC236}">
+                  <a16:creationId xmlns:a16="http://schemas.microsoft.com/office/drawing/2014/main" id="{1B1CDF3F-8661-CC6F-33E0-7F87DA800D3E}"/>
+                </a:ext>
+              </a:extLst>
+            </p:cNvPr>
+            <p:cNvCxnSpPr>
+              <a:cxnSpLocks/>
+            </p:cNvCxnSpPr>
+            <p:nvPr/>
+          </p:nvCxnSpPr>
+          <p:spPr>
+            <a:xfrm>
+              <a:off x="4343400" y="2546473"/>
+              <a:ext cx="0" cy="2198916"/>
+            </a:xfrm>
+            <a:prstGeom prst="straightConnector1">
+              <a:avLst/>
+            </a:prstGeom>
+            <a:ln w="38100">
+              <a:solidFill>
+                <a:schemeClr val="bg1"/>
+              </a:solidFill>
+              <a:headEnd type="triangle" w="med" len="med"/>
+              <a:tailEnd type="triangle" w="med" len="med"/>
+            </a:ln>
+          </p:spPr>
+          <p:style>
+            <a:lnRef idx="2">
+              <a:schemeClr val="accent1"/>
+            </a:lnRef>
+            <a:fillRef idx="0">
+              <a:schemeClr val="accent1"/>
+            </a:fillRef>
+            <a:effectRef idx="1">
+              <a:schemeClr val="accent1"/>
+            </a:effectRef>
+            <a:fontRef idx="minor">
+              <a:schemeClr val="tx1"/>
+            </a:fontRef>
+          </p:style>
+        </p:cxnSp>
+        <p:cxnSp>
+          <p:nvCxnSpPr>
+            <p:cNvPr id="41" name="מחבר חץ ישר 40">
+              <a:extLst>
+                <a:ext uri="{FF2B5EF4-FFF2-40B4-BE49-F238E27FC236}">
+                  <a16:creationId xmlns:a16="http://schemas.microsoft.com/office/drawing/2014/main" id="{E2E874A5-EB9F-073B-F054-596A8BB27804}"/>
+                </a:ext>
+              </a:extLst>
+            </p:cNvPr>
+            <p:cNvCxnSpPr>
+              <a:cxnSpLocks/>
+            </p:cNvCxnSpPr>
+            <p:nvPr/>
+          </p:nvCxnSpPr>
+          <p:spPr>
+            <a:xfrm>
+              <a:off x="8650301" y="2546473"/>
+              <a:ext cx="0" cy="2014250"/>
+            </a:xfrm>
+            <a:prstGeom prst="straightConnector1">
+              <a:avLst/>
+            </a:prstGeom>
+            <a:ln w="38100">
+              <a:solidFill>
+                <a:schemeClr val="bg1"/>
+              </a:solidFill>
+              <a:headEnd type="triangle" w="med" len="med"/>
+              <a:tailEnd type="triangle" w="med" len="med"/>
+            </a:ln>
+          </p:spPr>
+          <p:style>
+            <a:lnRef idx="2">
+              <a:schemeClr val="accent1"/>
+            </a:lnRef>
+            <a:fillRef idx="0">
+              <a:schemeClr val="accent1"/>
+            </a:fillRef>
+            <a:effectRef idx="1">
+              <a:schemeClr val="accent1"/>
+            </a:effectRef>
+            <a:fontRef idx="minor">
+              <a:schemeClr val="tx1"/>
+            </a:fontRef>
+          </p:style>
+        </p:cxnSp>
+        <p:cxnSp>
+          <p:nvCxnSpPr>
+            <p:cNvPr id="43" name="מחבר: מרפקי 42">
+              <a:extLst>
+                <a:ext uri="{FF2B5EF4-FFF2-40B4-BE49-F238E27FC236}">
+                  <a16:creationId xmlns:a16="http://schemas.microsoft.com/office/drawing/2014/main" id="{27D3A294-AB58-1942-3B1A-FE48F7F46D16}"/>
+                </a:ext>
+              </a:extLst>
+            </p:cNvPr>
+            <p:cNvCxnSpPr>
+              <a:stCxn id="9" idx="2"/>
+              <a:endCxn id="8" idx="3"/>
+            </p:cNvCxnSpPr>
+            <p:nvPr/>
+          </p:nvCxnSpPr>
+          <p:spPr>
+            <a:xfrm rot="5400000">
+              <a:off x="7083291" y="2179667"/>
+              <a:ext cx="1046204" cy="1779816"/>
+            </a:xfrm>
+            <a:prstGeom prst="bentConnector2">
+              <a:avLst/>
+            </a:prstGeom>
+            <a:ln w="38100">
+              <a:solidFill>
+                <a:schemeClr val="bg1"/>
+              </a:solidFill>
+              <a:headEnd type="triangle" w="med" len="med"/>
+              <a:tailEnd type="triangle" w="med" len="med"/>
+            </a:ln>
+          </p:spPr>
+          <p:style>
+            <a:lnRef idx="2">
+              <a:schemeClr val="accent1"/>
+            </a:lnRef>
+            <a:fillRef idx="0">
+              <a:schemeClr val="accent1"/>
+            </a:fillRef>
+            <a:effectRef idx="1">
+              <a:schemeClr val="accent1"/>
+            </a:effectRef>
+            <a:fontRef idx="minor">
+              <a:schemeClr val="tx1"/>
+            </a:fontRef>
+          </p:style>
+        </p:cxnSp>
+        <p:cxnSp>
+          <p:nvCxnSpPr>
+            <p:cNvPr id="45" name="מחבר: מרפקי 44">
+              <a:extLst>
+                <a:ext uri="{FF2B5EF4-FFF2-40B4-BE49-F238E27FC236}">
+                  <a16:creationId xmlns:a16="http://schemas.microsoft.com/office/drawing/2014/main" id="{EC53CE51-588C-6A54-AE41-8E4EE62B9C15}"/>
+                </a:ext>
+              </a:extLst>
+            </p:cNvPr>
+            <p:cNvCxnSpPr>
+              <a:cxnSpLocks/>
+              <a:stCxn id="10" idx="3"/>
+              <a:endCxn id="8" idx="0"/>
+            </p:cNvCxnSpPr>
+            <p:nvPr/>
+          </p:nvCxnSpPr>
+          <p:spPr>
+            <a:xfrm>
+              <a:off x="4887688" y="2361807"/>
+              <a:ext cx="1208312" cy="1046204"/>
+            </a:xfrm>
+            <a:prstGeom prst="bentConnector2">
+              <a:avLst/>
+            </a:prstGeom>
+            <a:ln w="38100">
+              <a:solidFill>
+                <a:schemeClr val="bg1"/>
+              </a:solidFill>
+              <a:headEnd type="triangle" w="med" len="med"/>
+              <a:tailEnd type="triangle" w="med" len="med"/>
+            </a:ln>
+          </p:spPr>
+          <p:style>
+            <a:lnRef idx="2">
+              <a:schemeClr val="accent1"/>
+            </a:lnRef>
+            <a:fillRef idx="0">
+              <a:schemeClr val="accent1"/>
+            </a:fillRef>
+            <a:effectRef idx="1">
+              <a:schemeClr val="accent1"/>
+            </a:effectRef>
+            <a:fontRef idx="minor">
+              <a:schemeClr val="tx1"/>
+            </a:fontRef>
+          </p:style>
+        </p:cxnSp>
+        <p:cxnSp>
+          <p:nvCxnSpPr>
+            <p:cNvPr id="48" name="מחבר חץ ישר 47">
+              <a:extLst>
+                <a:ext uri="{FF2B5EF4-FFF2-40B4-BE49-F238E27FC236}">
+                  <a16:creationId xmlns:a16="http://schemas.microsoft.com/office/drawing/2014/main" id="{802ABB47-6380-01BE-4F0C-FABB6A1AB4FF}"/>
+                </a:ext>
+              </a:extLst>
+            </p:cNvPr>
+            <p:cNvCxnSpPr>
+              <a:stCxn id="7" idx="2"/>
+            </p:cNvCxnSpPr>
+            <p:nvPr/>
+          </p:nvCxnSpPr>
+          <p:spPr>
+            <a:xfrm flipH="1">
+              <a:off x="5943599" y="1720334"/>
+              <a:ext cx="1" cy="1708666"/>
+            </a:xfrm>
+            <a:prstGeom prst="straightConnector1">
+              <a:avLst/>
+            </a:prstGeom>
+            <a:ln w="38100">
+              <a:solidFill>
+                <a:schemeClr val="bg1"/>
+              </a:solidFill>
+              <a:headEnd type="triangle" w="med" len="med"/>
+              <a:tailEnd type="triangle" w="med" len="med"/>
+            </a:ln>
+          </p:spPr>
+          <p:style>
+            <a:lnRef idx="2">
+              <a:schemeClr val="accent1"/>
+            </a:lnRef>
+            <a:fillRef idx="0">
+              <a:schemeClr val="accent1"/>
+            </a:fillRef>
+            <a:effectRef idx="1">
+              <a:schemeClr val="accent1"/>
+            </a:effectRef>
+            <a:fontRef idx="minor">
+              <a:schemeClr val="tx1"/>
+            </a:fontRef>
+          </p:style>
+        </p:cxnSp>
+        <p:cxnSp>
+          <p:nvCxnSpPr>
+            <p:cNvPr id="50" name="מחבר: מרפקי 49">
+              <a:extLst>
+                <a:ext uri="{FF2B5EF4-FFF2-40B4-BE49-F238E27FC236}">
+                  <a16:creationId xmlns:a16="http://schemas.microsoft.com/office/drawing/2014/main" id="{180B86C1-8658-A79D-9CFB-56529104BB81}"/>
+                </a:ext>
+              </a:extLst>
+            </p:cNvPr>
+            <p:cNvCxnSpPr>
+              <a:cxnSpLocks/>
+            </p:cNvCxnSpPr>
+            <p:nvPr/>
+          </p:nvCxnSpPr>
+          <p:spPr>
+            <a:xfrm rot="10800000" flipV="1">
+              <a:off x="3733802" y="1409700"/>
+              <a:ext cx="1589312" cy="719142"/>
+            </a:xfrm>
+            <a:prstGeom prst="bentConnector3">
+              <a:avLst>
+                <a:gd name="adj1" fmla="val 99810"/>
+              </a:avLst>
+            </a:prstGeom>
+            <a:ln w="38100">
+              <a:solidFill>
+                <a:srgbClr val="FFFF00"/>
+              </a:solidFill>
+              <a:tailEnd type="triangle"/>
+            </a:ln>
+          </p:spPr>
+          <p:style>
+            <a:lnRef idx="2">
+              <a:schemeClr val="accent1"/>
+            </a:lnRef>
+            <a:fillRef idx="0">
+              <a:schemeClr val="accent1"/>
+            </a:fillRef>
+            <a:effectRef idx="1">
+              <a:schemeClr val="accent1"/>
+            </a:effectRef>
+            <a:fontRef idx="minor">
+              <a:schemeClr val="tx1"/>
+            </a:fontRef>
+          </p:style>
+        </p:cxnSp>
+        <p:cxnSp>
+          <p:nvCxnSpPr>
+            <p:cNvPr id="57" name="מחבר חץ ישר 56">
+              <a:extLst>
+                <a:ext uri="{FF2B5EF4-FFF2-40B4-BE49-F238E27FC236}">
+                  <a16:creationId xmlns:a16="http://schemas.microsoft.com/office/drawing/2014/main" id="{FFED64B8-735B-D3BB-8099-96B0812D0F97}"/>
+                </a:ext>
+              </a:extLst>
+            </p:cNvPr>
+            <p:cNvCxnSpPr>
+              <a:cxnSpLocks/>
+            </p:cNvCxnSpPr>
+            <p:nvPr/>
+          </p:nvCxnSpPr>
+          <p:spPr>
+            <a:xfrm flipH="1">
+              <a:off x="4887688" y="2255982"/>
+              <a:ext cx="2797627" cy="0"/>
+            </a:xfrm>
+            <a:prstGeom prst="straightConnector1">
+              <a:avLst/>
+            </a:prstGeom>
+            <a:ln w="38100">
+              <a:solidFill>
+                <a:schemeClr val="bg1"/>
+              </a:solidFill>
+              <a:headEnd type="triangle" w="med" len="med"/>
+              <a:tailEnd type="triangle" w="med" len="med"/>
+            </a:ln>
+          </p:spPr>
+          <p:style>
+            <a:lnRef idx="2">
+              <a:schemeClr val="accent1"/>
+            </a:lnRef>
+            <a:fillRef idx="0">
+              <a:schemeClr val="accent1"/>
+            </a:fillRef>
+            <a:effectRef idx="1">
+              <a:schemeClr val="accent1"/>
+            </a:effectRef>
+            <a:fontRef idx="minor">
+              <a:schemeClr val="tx1"/>
+            </a:fontRef>
+          </p:style>
+        </p:cxnSp>
+        <p:cxnSp>
+          <p:nvCxnSpPr>
+            <p:cNvPr id="63" name="מחבר: מרפקי 62">
+              <a:extLst>
+                <a:ext uri="{FF2B5EF4-FFF2-40B4-BE49-F238E27FC236}">
+                  <a16:creationId xmlns:a16="http://schemas.microsoft.com/office/drawing/2014/main" id="{055CE2FA-BCD6-4E38-8E54-3433DFF40DA0}"/>
+                </a:ext>
+              </a:extLst>
+            </p:cNvPr>
+            <p:cNvCxnSpPr>
+              <a:stCxn id="8" idx="2"/>
+              <a:endCxn id="14" idx="1"/>
+            </p:cNvCxnSpPr>
+            <p:nvPr/>
+          </p:nvCxnSpPr>
+          <p:spPr>
+            <a:xfrm rot="16200000" flipH="1">
+              <a:off x="6406634" y="3466708"/>
+              <a:ext cx="968046" cy="1589315"/>
+            </a:xfrm>
+            <a:prstGeom prst="bentConnector2">
+              <a:avLst/>
+            </a:prstGeom>
+            <a:ln w="38100">
+              <a:solidFill>
+                <a:schemeClr val="bg1"/>
+              </a:solidFill>
+              <a:headEnd type="triangle" w="med" len="med"/>
+              <a:tailEnd type="triangle" w="med" len="med"/>
+            </a:ln>
+          </p:spPr>
+          <p:style>
+            <a:lnRef idx="2">
+              <a:schemeClr val="accent1"/>
+            </a:lnRef>
+            <a:fillRef idx="0">
+              <a:schemeClr val="accent1"/>
+            </a:fillRef>
+            <a:effectRef idx="1">
+              <a:schemeClr val="accent1"/>
+            </a:effectRef>
+            <a:fontRef idx="minor">
+              <a:schemeClr val="tx1"/>
+            </a:fontRef>
+          </p:style>
+        </p:cxnSp>
+      </p:grpSp>
+      <p:grpSp>
+        <p:nvGrpSpPr>
+          <p:cNvPr id="3" name="קבוצה 2">
+            <a:extLst>
+              <a:ext uri="{FF2B5EF4-FFF2-40B4-BE49-F238E27FC236}">
+                <a16:creationId xmlns:a16="http://schemas.microsoft.com/office/drawing/2014/main" id="{EF381A61-4BC9-B229-A886-5883819E6734}"/>
+              </a:ext>
+            </a:extLst>
+          </p:cNvPr>
+          <p:cNvGrpSpPr/>
+          <p:nvPr/>
+        </p:nvGrpSpPr>
+        <p:grpSpPr>
+          <a:xfrm>
+            <a:off x="2246587" y="421056"/>
+            <a:ext cx="2115638" cy="690069"/>
+            <a:chOff x="536122" y="530352"/>
+            <a:chExt cx="2115638" cy="690069"/>
+          </a:xfrm>
+        </p:grpSpPr>
+        <p:cxnSp>
+          <p:nvCxnSpPr>
+            <p:cNvPr id="19" name="מחבר חץ ישר 18">
+              <a:extLst>
+                <a:ext uri="{FF2B5EF4-FFF2-40B4-BE49-F238E27FC236}">
+                  <a16:creationId xmlns:a16="http://schemas.microsoft.com/office/drawing/2014/main" id="{BE2D2CD6-4FE2-8756-726D-0E03F8DF8C4E}"/>
+                </a:ext>
+              </a:extLst>
+            </p:cNvPr>
+            <p:cNvCxnSpPr/>
+            <p:nvPr/>
+          </p:nvCxnSpPr>
+          <p:spPr>
+            <a:xfrm flipH="1">
+              <a:off x="1837944" y="722376"/>
+              <a:ext cx="804672" cy="0"/>
+            </a:xfrm>
+            <a:prstGeom prst="straightConnector1">
+              <a:avLst/>
+            </a:prstGeom>
+            <a:ln w="38100">
+              <a:solidFill>
+                <a:schemeClr val="bg1"/>
+              </a:solidFill>
+              <a:tailEnd type="triangle"/>
+            </a:ln>
+          </p:spPr>
+          <p:style>
+            <a:lnRef idx="2">
+              <a:schemeClr val="accent1"/>
+            </a:lnRef>
+            <a:fillRef idx="0">
+              <a:schemeClr val="accent1"/>
+            </a:fillRef>
+            <a:effectRef idx="1">
+              <a:schemeClr val="accent1"/>
+            </a:effectRef>
+            <a:fontRef idx="minor">
+              <a:schemeClr val="tx1"/>
+            </a:fontRef>
+          </p:style>
+        </p:cxnSp>
+        <p:cxnSp>
+          <p:nvCxnSpPr>
+            <p:cNvPr id="20" name="מחבר חץ ישר 19">
+              <a:extLst>
+                <a:ext uri="{FF2B5EF4-FFF2-40B4-BE49-F238E27FC236}">
+                  <a16:creationId xmlns:a16="http://schemas.microsoft.com/office/drawing/2014/main" id="{AC397CE3-3C44-C165-3325-F6135919BF35}"/>
+                </a:ext>
+              </a:extLst>
+            </p:cNvPr>
+            <p:cNvCxnSpPr/>
+            <p:nvPr/>
+          </p:nvCxnSpPr>
+          <p:spPr>
+            <a:xfrm flipH="1">
+              <a:off x="1847088" y="1035755"/>
+              <a:ext cx="804672" cy="0"/>
+            </a:xfrm>
+            <a:prstGeom prst="straightConnector1">
+              <a:avLst/>
+            </a:prstGeom>
+            <a:ln w="38100">
+              <a:solidFill>
+                <a:srgbClr val="FFFF00"/>
+              </a:solidFill>
+              <a:tailEnd type="triangle"/>
+            </a:ln>
+          </p:spPr>
+          <p:style>
+            <a:lnRef idx="2">
+              <a:schemeClr val="accent1"/>
+            </a:lnRef>
+            <a:fillRef idx="0">
+              <a:schemeClr val="accent1"/>
+            </a:fillRef>
+            <a:effectRef idx="1">
+              <a:schemeClr val="accent1"/>
+            </a:effectRef>
+            <a:fontRef idx="minor">
+              <a:schemeClr val="tx1"/>
+            </a:fontRef>
+          </p:style>
+        </p:cxnSp>
+        <p:sp>
+          <p:nvSpPr>
+            <p:cNvPr id="21" name="תיבת טקסט 20">
+              <a:extLst>
+                <a:ext uri="{FF2B5EF4-FFF2-40B4-BE49-F238E27FC236}">
+                  <a16:creationId xmlns:a16="http://schemas.microsoft.com/office/drawing/2014/main" id="{506F0DA7-E26C-BCC5-A18E-306E411B6686}"/>
+                </a:ext>
+              </a:extLst>
+            </p:cNvPr>
+            <p:cNvSpPr txBox="1"/>
+            <p:nvPr/>
+          </p:nvSpPr>
+          <p:spPr>
+            <a:xfrm>
+              <a:off x="536122" y="530352"/>
+              <a:ext cx="1173806" cy="369332"/>
+            </a:xfrm>
+            <a:prstGeom prst="rect">
+              <a:avLst/>
+            </a:prstGeom>
+            <a:noFill/>
+            <a:ln>
+              <a:noFill/>
+            </a:ln>
+          </p:spPr>
+          <p:txBody>
+            <a:bodyPr wrap="square" rtlCol="1">
+              <a:spAutoFit/>
+            </a:bodyPr>
+            <a:lstStyle/>
+            <a:p>
+              <a:r>
+                <a:rPr lang="en-US" dirty="0" err="1">
+                  <a:solidFill>
+                    <a:schemeClr val="bg1"/>
+                  </a:solidFill>
+                </a:rPr>
+                <a:t>RestAPI</a:t>
+              </a:r>
+              <a:endParaRPr lang="he-IL" dirty="0">
+                <a:solidFill>
+                  <a:schemeClr val="bg1"/>
+                </a:solidFill>
+              </a:endParaRPr>
+            </a:p>
+          </p:txBody>
+        </p:sp>
+        <p:sp>
+          <p:nvSpPr>
+            <p:cNvPr id="23" name="תיבת טקסט 22">
+              <a:extLst>
+                <a:ext uri="{FF2B5EF4-FFF2-40B4-BE49-F238E27FC236}">
+                  <a16:creationId xmlns:a16="http://schemas.microsoft.com/office/drawing/2014/main" id="{E9F4F8CF-2818-BD94-53FD-00A7ECA788C4}"/>
+                </a:ext>
+              </a:extLst>
+            </p:cNvPr>
+            <p:cNvSpPr txBox="1"/>
+            <p:nvPr/>
+          </p:nvSpPr>
+          <p:spPr>
+            <a:xfrm>
+              <a:off x="536122" y="851089"/>
+              <a:ext cx="1173806" cy="369332"/>
+            </a:xfrm>
+            <a:prstGeom prst="rect">
+              <a:avLst/>
+            </a:prstGeom>
+            <a:noFill/>
+            <a:ln>
+              <a:noFill/>
+            </a:ln>
+          </p:spPr>
+          <p:txBody>
+            <a:bodyPr wrap="square" rtlCol="1">
+              <a:spAutoFit/>
+            </a:bodyPr>
+            <a:lstStyle/>
+            <a:p>
+              <a:r>
+                <a:rPr lang="en-US" dirty="0">
+                  <a:solidFill>
+                    <a:srgbClr val="FFFF00"/>
+                  </a:solidFill>
+                </a:rPr>
+                <a:t>Kafka</a:t>
+              </a:r>
+              <a:endParaRPr lang="he-IL" dirty="0">
+                <a:solidFill>
+                  <a:srgbClr val="FFFF00"/>
+                </a:solidFill>
+              </a:endParaRPr>
+            </a:p>
+          </p:txBody>
+        </p:sp>
+      </p:grpSp>
+    </p:spTree>
+    <p:extLst>
+      <p:ext uri="{BB962C8B-B14F-4D97-AF65-F5344CB8AC3E}">
+        <p14:creationId xmlns:p14="http://schemas.microsoft.com/office/powerpoint/2010/main" val="4059946886"/>
+      </p:ext>
+    </p:extLst>
+  </p:cSld>
+  <p:clrMapOvr>
+    <a:masterClrMapping/>
+  </p:clrMapOvr>
+</p:sld>
+</file>
+
+<file path=ppt/slides/slide7.xml><?xml version="1.0" encoding="utf-8"?>
 <p:sld xmlns:a="http://schemas.openxmlformats.org/drawingml/2006/main" xmlns:r="http://schemas.openxmlformats.org/officeDocument/2006/relationships" xmlns:p="http://schemas.openxmlformats.org/presentationml/2006/main">
   <p:cSld>
     <p:spTree>
@@ -12366,184 +13864,205 @@
           </p:style>
         </p:cxnSp>
       </p:grpSp>
-      <p:cxnSp>
-        <p:nvCxnSpPr>
-          <p:cNvPr id="5" name="מחבר חץ ישר 4">
+      <p:grpSp>
+        <p:nvGrpSpPr>
+          <p:cNvPr id="3" name="קבוצה 2">
             <a:extLst>
               <a:ext uri="{FF2B5EF4-FFF2-40B4-BE49-F238E27FC236}">
-                <a16:creationId xmlns:a16="http://schemas.microsoft.com/office/drawing/2014/main" id="{9B0EFACF-245B-601C-A789-ACB01A54332A}"/>
+                <a16:creationId xmlns:a16="http://schemas.microsoft.com/office/drawing/2014/main" id="{ED591992-196F-32B6-478F-7858C450A6FA}"/>
               </a:ext>
             </a:extLst>
           </p:cNvPr>
-          <p:cNvCxnSpPr/>
+          <p:cNvGrpSpPr/>
           <p:nvPr/>
-        </p:nvCxnSpPr>
-        <p:spPr>
-          <a:xfrm flipH="1">
-            <a:off x="1837944" y="722376"/>
-            <a:ext cx="804672" cy="0"/>
+        </p:nvGrpSpPr>
+        <p:grpSpPr>
+          <a:xfrm>
+            <a:off x="2246587" y="421056"/>
+            <a:ext cx="2115638" cy="690069"/>
+            <a:chOff x="536122" y="530352"/>
+            <a:chExt cx="2115638" cy="690069"/>
           </a:xfrm>
-          <a:prstGeom prst="straightConnector1">
-            <a:avLst/>
-          </a:prstGeom>
-          <a:ln w="38100">
-            <a:solidFill>
-              <a:schemeClr val="bg1"/>
-            </a:solidFill>
-            <a:tailEnd type="triangle"/>
-          </a:ln>
-        </p:spPr>
-        <p:style>
-          <a:lnRef idx="2">
-            <a:schemeClr val="accent1"/>
-          </a:lnRef>
-          <a:fillRef idx="0">
-            <a:schemeClr val="accent1"/>
-          </a:fillRef>
-          <a:effectRef idx="1">
-            <a:schemeClr val="accent1"/>
-          </a:effectRef>
-          <a:fontRef idx="minor">
-            <a:schemeClr val="tx1"/>
-          </a:fontRef>
-        </p:style>
-      </p:cxnSp>
-      <p:cxnSp>
-        <p:nvCxnSpPr>
-          <p:cNvPr id="15" name="מחבר חץ ישר 14">
-            <a:extLst>
-              <a:ext uri="{FF2B5EF4-FFF2-40B4-BE49-F238E27FC236}">
-                <a16:creationId xmlns:a16="http://schemas.microsoft.com/office/drawing/2014/main" id="{1EF83CD8-2AE6-0BB0-D488-4DC05069CF02}"/>
-              </a:ext>
-            </a:extLst>
-          </p:cNvPr>
-          <p:cNvCxnSpPr/>
-          <p:nvPr/>
-        </p:nvCxnSpPr>
-        <p:spPr>
-          <a:xfrm flipH="1">
-            <a:off x="1847088" y="1035755"/>
-            <a:ext cx="804672" cy="0"/>
-          </a:xfrm>
-          <a:prstGeom prst="straightConnector1">
-            <a:avLst/>
-          </a:prstGeom>
-          <a:ln w="38100">
-            <a:solidFill>
-              <a:srgbClr val="FFFF00"/>
-            </a:solidFill>
-            <a:tailEnd type="triangle"/>
-          </a:ln>
-        </p:spPr>
-        <p:style>
-          <a:lnRef idx="2">
-            <a:schemeClr val="accent1"/>
-          </a:lnRef>
-          <a:fillRef idx="0">
-            <a:schemeClr val="accent1"/>
-          </a:fillRef>
-          <a:effectRef idx="1">
-            <a:schemeClr val="accent1"/>
-          </a:effectRef>
-          <a:fontRef idx="minor">
-            <a:schemeClr val="tx1"/>
-          </a:fontRef>
-        </p:style>
-      </p:cxnSp>
-      <p:sp>
-        <p:nvSpPr>
-          <p:cNvPr id="17" name="תיבת טקסט 16">
-            <a:extLst>
-              <a:ext uri="{FF2B5EF4-FFF2-40B4-BE49-F238E27FC236}">
-                <a16:creationId xmlns:a16="http://schemas.microsoft.com/office/drawing/2014/main" id="{36AF78C4-2B02-8227-5F18-FA89762DE5FE}"/>
-              </a:ext>
-            </a:extLst>
-          </p:cNvPr>
-          <p:cNvSpPr txBox="1"/>
-          <p:nvPr/>
-        </p:nvSpPr>
-        <p:spPr>
-          <a:xfrm>
-            <a:off x="536122" y="530352"/>
-            <a:ext cx="1173806" cy="369332"/>
-          </a:xfrm>
-          <a:prstGeom prst="rect">
-            <a:avLst/>
-          </a:prstGeom>
-          <a:noFill/>
-          <a:ln>
+        </p:grpSpPr>
+        <p:cxnSp>
+          <p:nvCxnSpPr>
+            <p:cNvPr id="19" name="מחבר חץ ישר 18">
+              <a:extLst>
+                <a:ext uri="{FF2B5EF4-FFF2-40B4-BE49-F238E27FC236}">
+                  <a16:creationId xmlns:a16="http://schemas.microsoft.com/office/drawing/2014/main" id="{087DB0D7-A479-63F0-2D74-5F0789331D55}"/>
+                </a:ext>
+              </a:extLst>
+            </p:cNvPr>
+            <p:cNvCxnSpPr/>
+            <p:nvPr/>
+          </p:nvCxnSpPr>
+          <p:spPr>
+            <a:xfrm flipH="1">
+              <a:off x="1837944" y="722376"/>
+              <a:ext cx="804672" cy="0"/>
+            </a:xfrm>
+            <a:prstGeom prst="straightConnector1">
+              <a:avLst/>
+            </a:prstGeom>
+            <a:ln w="38100">
+              <a:solidFill>
+                <a:schemeClr val="bg1"/>
+              </a:solidFill>
+              <a:tailEnd type="triangle"/>
+            </a:ln>
+          </p:spPr>
+          <p:style>
+            <a:lnRef idx="2">
+              <a:schemeClr val="accent1"/>
+            </a:lnRef>
+            <a:fillRef idx="0">
+              <a:schemeClr val="accent1"/>
+            </a:fillRef>
+            <a:effectRef idx="1">
+              <a:schemeClr val="accent1"/>
+            </a:effectRef>
+            <a:fontRef idx="minor">
+              <a:schemeClr val="tx1"/>
+            </a:fontRef>
+          </p:style>
+        </p:cxnSp>
+        <p:cxnSp>
+          <p:nvCxnSpPr>
+            <p:cNvPr id="20" name="מחבר חץ ישר 19">
+              <a:extLst>
+                <a:ext uri="{FF2B5EF4-FFF2-40B4-BE49-F238E27FC236}">
+                  <a16:creationId xmlns:a16="http://schemas.microsoft.com/office/drawing/2014/main" id="{CE1E86D2-D400-605E-8CD5-0533B58BE387}"/>
+                </a:ext>
+              </a:extLst>
+            </p:cNvPr>
+            <p:cNvCxnSpPr/>
+            <p:nvPr/>
+          </p:nvCxnSpPr>
+          <p:spPr>
+            <a:xfrm flipH="1">
+              <a:off x="1847088" y="1035755"/>
+              <a:ext cx="804672" cy="0"/>
+            </a:xfrm>
+            <a:prstGeom prst="straightConnector1">
+              <a:avLst/>
+            </a:prstGeom>
+            <a:ln w="38100">
+              <a:solidFill>
+                <a:srgbClr val="FFFF00"/>
+              </a:solidFill>
+              <a:tailEnd type="triangle"/>
+            </a:ln>
+          </p:spPr>
+          <p:style>
+            <a:lnRef idx="2">
+              <a:schemeClr val="accent1"/>
+            </a:lnRef>
+            <a:fillRef idx="0">
+              <a:schemeClr val="accent1"/>
+            </a:fillRef>
+            <a:effectRef idx="1">
+              <a:schemeClr val="accent1"/>
+            </a:effectRef>
+            <a:fontRef idx="minor">
+              <a:schemeClr val="tx1"/>
+            </a:fontRef>
+          </p:style>
+        </p:cxnSp>
+        <p:sp>
+          <p:nvSpPr>
+            <p:cNvPr id="21" name="תיבת טקסט 20">
+              <a:extLst>
+                <a:ext uri="{FF2B5EF4-FFF2-40B4-BE49-F238E27FC236}">
+                  <a16:creationId xmlns:a16="http://schemas.microsoft.com/office/drawing/2014/main" id="{29C7BE00-CA9E-DF4D-86C1-C93CC85848E4}"/>
+                </a:ext>
+              </a:extLst>
+            </p:cNvPr>
+            <p:cNvSpPr txBox="1"/>
+            <p:nvPr/>
+          </p:nvSpPr>
+          <p:spPr>
+            <a:xfrm>
+              <a:off x="536122" y="530352"/>
+              <a:ext cx="1173806" cy="369332"/>
+            </a:xfrm>
+            <a:prstGeom prst="rect">
+              <a:avLst/>
+            </a:prstGeom>
             <a:noFill/>
-          </a:ln>
-        </p:spPr>
-        <p:txBody>
-          <a:bodyPr wrap="square" rtlCol="1">
-            <a:spAutoFit/>
-          </a:bodyPr>
-          <a:lstStyle/>
-          <a:p>
-            <a:r>
-              <a:rPr lang="en-US" dirty="0" err="1">
+            <a:ln>
+              <a:noFill/>
+            </a:ln>
+          </p:spPr>
+          <p:txBody>
+            <a:bodyPr wrap="square" rtlCol="1">
+              <a:spAutoFit/>
+            </a:bodyPr>
+            <a:lstStyle/>
+            <a:p>
+              <a:r>
+                <a:rPr lang="en-US" dirty="0" err="1">
+                  <a:solidFill>
+                    <a:schemeClr val="bg1"/>
+                  </a:solidFill>
+                </a:rPr>
+                <a:t>RestAPI</a:t>
+              </a:r>
+              <a:endParaRPr lang="he-IL" dirty="0">
                 <a:solidFill>
                   <a:schemeClr val="bg1"/>
                 </a:solidFill>
-              </a:rPr>
-              <a:t>RestAPI</a:t>
-            </a:r>
-            <a:endParaRPr lang="he-IL" dirty="0">
-              <a:solidFill>
-                <a:schemeClr val="bg1"/>
-              </a:solidFill>
-            </a:endParaRPr>
-          </a:p>
-        </p:txBody>
-      </p:sp>
-      <p:sp>
-        <p:nvSpPr>
-          <p:cNvPr id="18" name="תיבת טקסט 17">
-            <a:extLst>
-              <a:ext uri="{FF2B5EF4-FFF2-40B4-BE49-F238E27FC236}">
-                <a16:creationId xmlns:a16="http://schemas.microsoft.com/office/drawing/2014/main" id="{18BEE652-7DF9-1C46-D704-4B4351ED4D02}"/>
-              </a:ext>
-            </a:extLst>
-          </p:cNvPr>
-          <p:cNvSpPr txBox="1"/>
-          <p:nvPr/>
-        </p:nvSpPr>
-        <p:spPr>
-          <a:xfrm>
-            <a:off x="536122" y="851089"/>
-            <a:ext cx="1173806" cy="369332"/>
-          </a:xfrm>
-          <a:prstGeom prst="rect">
-            <a:avLst/>
-          </a:prstGeom>
-          <a:noFill/>
-          <a:ln>
+              </a:endParaRPr>
+            </a:p>
+          </p:txBody>
+        </p:sp>
+        <p:sp>
+          <p:nvSpPr>
+            <p:cNvPr id="23" name="תיבת טקסט 22">
+              <a:extLst>
+                <a:ext uri="{FF2B5EF4-FFF2-40B4-BE49-F238E27FC236}">
+                  <a16:creationId xmlns:a16="http://schemas.microsoft.com/office/drawing/2014/main" id="{26404A83-BFA7-1FEB-E851-B0DD95656BAC}"/>
+                </a:ext>
+              </a:extLst>
+            </p:cNvPr>
+            <p:cNvSpPr txBox="1"/>
+            <p:nvPr/>
+          </p:nvSpPr>
+          <p:spPr>
+            <a:xfrm>
+              <a:off x="536122" y="851089"/>
+              <a:ext cx="1173806" cy="369332"/>
+            </a:xfrm>
+            <a:prstGeom prst="rect">
+              <a:avLst/>
+            </a:prstGeom>
             <a:noFill/>
-          </a:ln>
-        </p:spPr>
-        <p:txBody>
-          <a:bodyPr wrap="square" rtlCol="1">
-            <a:spAutoFit/>
-          </a:bodyPr>
-          <a:lstStyle/>
-          <a:p>
-            <a:r>
-              <a:rPr lang="en-US" dirty="0">
+            <a:ln>
+              <a:noFill/>
+            </a:ln>
+          </p:spPr>
+          <p:txBody>
+            <a:bodyPr wrap="square" rtlCol="1">
+              <a:spAutoFit/>
+            </a:bodyPr>
+            <a:lstStyle/>
+            <a:p>
+              <a:r>
+                <a:rPr lang="en-US" dirty="0">
+                  <a:solidFill>
+                    <a:srgbClr val="FFFF00"/>
+                  </a:solidFill>
+                </a:rPr>
+                <a:t>Kafka</a:t>
+              </a:r>
+              <a:endParaRPr lang="he-IL" dirty="0">
                 <a:solidFill>
                   <a:srgbClr val="FFFF00"/>
                 </a:solidFill>
-              </a:rPr>
-              <a:t>Kafka</a:t>
-            </a:r>
-            <a:endParaRPr lang="he-IL" dirty="0">
-              <a:solidFill>
-                <a:srgbClr val="FFFF00"/>
-              </a:solidFill>
-            </a:endParaRPr>
-          </a:p>
-        </p:txBody>
-      </p:sp>
+              </a:endParaRPr>
+            </a:p>
+          </p:txBody>
+        </p:sp>
+      </p:grpSp>
     </p:spTree>
     <p:extLst>
       <p:ext uri="{BB962C8B-B14F-4D97-AF65-F5344CB8AC3E}">
@@ -12557,7 +14076,7 @@
 </p:sld>
 </file>
 
-<file path=ppt/slides/slide7.xml><?xml version="1.0" encoding="utf-8"?>
+<file path=ppt/slides/slide8.xml><?xml version="1.0" encoding="utf-8"?>
 <p:sld xmlns:a="http://schemas.openxmlformats.org/drawingml/2006/main" xmlns:r="http://schemas.openxmlformats.org/officeDocument/2006/relationships" xmlns:p="http://schemas.openxmlformats.org/presentationml/2006/main">
   <p:cSld>
     <p:spTree>
@@ -13677,184 +15196,205 @@
           </p:style>
         </p:cxnSp>
       </p:grpSp>
-      <p:cxnSp>
-        <p:nvCxnSpPr>
-          <p:cNvPr id="5" name="מחבר חץ ישר 4">
+      <p:grpSp>
+        <p:nvGrpSpPr>
+          <p:cNvPr id="3" name="קבוצה 2">
             <a:extLst>
               <a:ext uri="{FF2B5EF4-FFF2-40B4-BE49-F238E27FC236}">
-                <a16:creationId xmlns:a16="http://schemas.microsoft.com/office/drawing/2014/main" id="{7455ADA0-07AD-F241-6D4F-0A987EAC1F11}"/>
+                <a16:creationId xmlns:a16="http://schemas.microsoft.com/office/drawing/2014/main" id="{579114F0-6F78-C3CE-ABB8-4A64D9461B80}"/>
               </a:ext>
             </a:extLst>
           </p:cNvPr>
-          <p:cNvCxnSpPr/>
+          <p:cNvGrpSpPr/>
           <p:nvPr/>
-        </p:nvCxnSpPr>
-        <p:spPr>
-          <a:xfrm flipH="1">
-            <a:off x="1837944" y="722376"/>
-            <a:ext cx="804672" cy="0"/>
+        </p:nvGrpSpPr>
+        <p:grpSpPr>
+          <a:xfrm>
+            <a:off x="2246587" y="421056"/>
+            <a:ext cx="2115638" cy="690069"/>
+            <a:chOff x="536122" y="530352"/>
+            <a:chExt cx="2115638" cy="690069"/>
           </a:xfrm>
-          <a:prstGeom prst="straightConnector1">
-            <a:avLst/>
-          </a:prstGeom>
-          <a:ln w="38100">
-            <a:solidFill>
-              <a:schemeClr val="bg1"/>
-            </a:solidFill>
-            <a:tailEnd type="triangle"/>
-          </a:ln>
-        </p:spPr>
-        <p:style>
-          <a:lnRef idx="2">
-            <a:schemeClr val="accent1"/>
-          </a:lnRef>
-          <a:fillRef idx="0">
-            <a:schemeClr val="accent1"/>
-          </a:fillRef>
-          <a:effectRef idx="1">
-            <a:schemeClr val="accent1"/>
-          </a:effectRef>
-          <a:fontRef idx="minor">
-            <a:schemeClr val="tx1"/>
-          </a:fontRef>
-        </p:style>
-      </p:cxnSp>
-      <p:cxnSp>
-        <p:nvCxnSpPr>
-          <p:cNvPr id="15" name="מחבר חץ ישר 14">
-            <a:extLst>
-              <a:ext uri="{FF2B5EF4-FFF2-40B4-BE49-F238E27FC236}">
-                <a16:creationId xmlns:a16="http://schemas.microsoft.com/office/drawing/2014/main" id="{3BCF26F1-8FB8-9014-63E3-0352C498F6D7}"/>
-              </a:ext>
-            </a:extLst>
-          </p:cNvPr>
-          <p:cNvCxnSpPr/>
-          <p:nvPr/>
-        </p:nvCxnSpPr>
-        <p:spPr>
-          <a:xfrm flipH="1">
-            <a:off x="1847088" y="1035755"/>
-            <a:ext cx="804672" cy="0"/>
-          </a:xfrm>
-          <a:prstGeom prst="straightConnector1">
-            <a:avLst/>
-          </a:prstGeom>
-          <a:ln w="38100">
-            <a:solidFill>
-              <a:srgbClr val="FFFF00"/>
-            </a:solidFill>
-            <a:tailEnd type="triangle"/>
-          </a:ln>
-        </p:spPr>
-        <p:style>
-          <a:lnRef idx="2">
-            <a:schemeClr val="accent1"/>
-          </a:lnRef>
-          <a:fillRef idx="0">
-            <a:schemeClr val="accent1"/>
-          </a:fillRef>
-          <a:effectRef idx="1">
-            <a:schemeClr val="accent1"/>
-          </a:effectRef>
-          <a:fontRef idx="minor">
-            <a:schemeClr val="tx1"/>
-          </a:fontRef>
-        </p:style>
-      </p:cxnSp>
-      <p:sp>
-        <p:nvSpPr>
-          <p:cNvPr id="17" name="תיבת טקסט 16">
-            <a:extLst>
-              <a:ext uri="{FF2B5EF4-FFF2-40B4-BE49-F238E27FC236}">
-                <a16:creationId xmlns:a16="http://schemas.microsoft.com/office/drawing/2014/main" id="{5A61503D-6086-4D1B-004F-62357AD08D41}"/>
-              </a:ext>
-            </a:extLst>
-          </p:cNvPr>
-          <p:cNvSpPr txBox="1"/>
-          <p:nvPr/>
-        </p:nvSpPr>
-        <p:spPr>
-          <a:xfrm>
-            <a:off x="536122" y="530352"/>
-            <a:ext cx="1173806" cy="369332"/>
-          </a:xfrm>
-          <a:prstGeom prst="rect">
-            <a:avLst/>
-          </a:prstGeom>
-          <a:noFill/>
-          <a:ln>
+        </p:grpSpPr>
+        <p:cxnSp>
+          <p:nvCxnSpPr>
+            <p:cNvPr id="19" name="מחבר חץ ישר 18">
+              <a:extLst>
+                <a:ext uri="{FF2B5EF4-FFF2-40B4-BE49-F238E27FC236}">
+                  <a16:creationId xmlns:a16="http://schemas.microsoft.com/office/drawing/2014/main" id="{61CA8AEB-2B36-6A47-5727-1F562D53675E}"/>
+                </a:ext>
+              </a:extLst>
+            </p:cNvPr>
+            <p:cNvCxnSpPr/>
+            <p:nvPr/>
+          </p:nvCxnSpPr>
+          <p:spPr>
+            <a:xfrm flipH="1">
+              <a:off x="1837944" y="722376"/>
+              <a:ext cx="804672" cy="0"/>
+            </a:xfrm>
+            <a:prstGeom prst="straightConnector1">
+              <a:avLst/>
+            </a:prstGeom>
+            <a:ln w="38100">
+              <a:solidFill>
+                <a:schemeClr val="bg1"/>
+              </a:solidFill>
+              <a:tailEnd type="triangle"/>
+            </a:ln>
+          </p:spPr>
+          <p:style>
+            <a:lnRef idx="2">
+              <a:schemeClr val="accent1"/>
+            </a:lnRef>
+            <a:fillRef idx="0">
+              <a:schemeClr val="accent1"/>
+            </a:fillRef>
+            <a:effectRef idx="1">
+              <a:schemeClr val="accent1"/>
+            </a:effectRef>
+            <a:fontRef idx="minor">
+              <a:schemeClr val="tx1"/>
+            </a:fontRef>
+          </p:style>
+        </p:cxnSp>
+        <p:cxnSp>
+          <p:nvCxnSpPr>
+            <p:cNvPr id="20" name="מחבר חץ ישר 19">
+              <a:extLst>
+                <a:ext uri="{FF2B5EF4-FFF2-40B4-BE49-F238E27FC236}">
+                  <a16:creationId xmlns:a16="http://schemas.microsoft.com/office/drawing/2014/main" id="{EABEF1C1-0DE0-E305-7FFF-89CBC1A61305}"/>
+                </a:ext>
+              </a:extLst>
+            </p:cNvPr>
+            <p:cNvCxnSpPr/>
+            <p:nvPr/>
+          </p:nvCxnSpPr>
+          <p:spPr>
+            <a:xfrm flipH="1">
+              <a:off x="1847088" y="1035755"/>
+              <a:ext cx="804672" cy="0"/>
+            </a:xfrm>
+            <a:prstGeom prst="straightConnector1">
+              <a:avLst/>
+            </a:prstGeom>
+            <a:ln w="38100">
+              <a:solidFill>
+                <a:srgbClr val="FFFF00"/>
+              </a:solidFill>
+              <a:tailEnd type="triangle"/>
+            </a:ln>
+          </p:spPr>
+          <p:style>
+            <a:lnRef idx="2">
+              <a:schemeClr val="accent1"/>
+            </a:lnRef>
+            <a:fillRef idx="0">
+              <a:schemeClr val="accent1"/>
+            </a:fillRef>
+            <a:effectRef idx="1">
+              <a:schemeClr val="accent1"/>
+            </a:effectRef>
+            <a:fontRef idx="minor">
+              <a:schemeClr val="tx1"/>
+            </a:fontRef>
+          </p:style>
+        </p:cxnSp>
+        <p:sp>
+          <p:nvSpPr>
+            <p:cNvPr id="21" name="תיבת טקסט 20">
+              <a:extLst>
+                <a:ext uri="{FF2B5EF4-FFF2-40B4-BE49-F238E27FC236}">
+                  <a16:creationId xmlns:a16="http://schemas.microsoft.com/office/drawing/2014/main" id="{D7DE3A81-CAED-344F-B0D3-1A2B967DCA12}"/>
+                </a:ext>
+              </a:extLst>
+            </p:cNvPr>
+            <p:cNvSpPr txBox="1"/>
+            <p:nvPr/>
+          </p:nvSpPr>
+          <p:spPr>
+            <a:xfrm>
+              <a:off x="536122" y="530352"/>
+              <a:ext cx="1173806" cy="369332"/>
+            </a:xfrm>
+            <a:prstGeom prst="rect">
+              <a:avLst/>
+            </a:prstGeom>
             <a:noFill/>
-          </a:ln>
-        </p:spPr>
-        <p:txBody>
-          <a:bodyPr wrap="square" rtlCol="1">
-            <a:spAutoFit/>
-          </a:bodyPr>
-          <a:lstStyle/>
-          <a:p>
-            <a:r>
-              <a:rPr lang="en-US" dirty="0" err="1">
+            <a:ln>
+              <a:noFill/>
+            </a:ln>
+          </p:spPr>
+          <p:txBody>
+            <a:bodyPr wrap="square" rtlCol="1">
+              <a:spAutoFit/>
+            </a:bodyPr>
+            <a:lstStyle/>
+            <a:p>
+              <a:r>
+                <a:rPr lang="en-US" dirty="0" err="1">
+                  <a:solidFill>
+                    <a:schemeClr val="bg1"/>
+                  </a:solidFill>
+                </a:rPr>
+                <a:t>RestAPI</a:t>
+              </a:r>
+              <a:endParaRPr lang="he-IL" dirty="0">
                 <a:solidFill>
                   <a:schemeClr val="bg1"/>
                 </a:solidFill>
-              </a:rPr>
-              <a:t>RestAPI</a:t>
-            </a:r>
-            <a:endParaRPr lang="he-IL" dirty="0">
-              <a:solidFill>
-                <a:schemeClr val="bg1"/>
-              </a:solidFill>
-            </a:endParaRPr>
-          </a:p>
-        </p:txBody>
-      </p:sp>
-      <p:sp>
-        <p:nvSpPr>
-          <p:cNvPr id="18" name="תיבת טקסט 17">
-            <a:extLst>
-              <a:ext uri="{FF2B5EF4-FFF2-40B4-BE49-F238E27FC236}">
-                <a16:creationId xmlns:a16="http://schemas.microsoft.com/office/drawing/2014/main" id="{6B70889E-6483-F37A-BE5C-83C94240ABE4}"/>
-              </a:ext>
-            </a:extLst>
-          </p:cNvPr>
-          <p:cNvSpPr txBox="1"/>
-          <p:nvPr/>
-        </p:nvSpPr>
-        <p:spPr>
-          <a:xfrm>
-            <a:off x="536122" y="851089"/>
-            <a:ext cx="1173806" cy="369332"/>
-          </a:xfrm>
-          <a:prstGeom prst="rect">
-            <a:avLst/>
-          </a:prstGeom>
-          <a:noFill/>
-          <a:ln>
+              </a:endParaRPr>
+            </a:p>
+          </p:txBody>
+        </p:sp>
+        <p:sp>
+          <p:nvSpPr>
+            <p:cNvPr id="23" name="תיבת טקסט 22">
+              <a:extLst>
+                <a:ext uri="{FF2B5EF4-FFF2-40B4-BE49-F238E27FC236}">
+                  <a16:creationId xmlns:a16="http://schemas.microsoft.com/office/drawing/2014/main" id="{12256E9F-AA06-7C0A-2E13-28B2469AE8CE}"/>
+                </a:ext>
+              </a:extLst>
+            </p:cNvPr>
+            <p:cNvSpPr txBox="1"/>
+            <p:nvPr/>
+          </p:nvSpPr>
+          <p:spPr>
+            <a:xfrm>
+              <a:off x="536122" y="851089"/>
+              <a:ext cx="1173806" cy="369332"/>
+            </a:xfrm>
+            <a:prstGeom prst="rect">
+              <a:avLst/>
+            </a:prstGeom>
             <a:noFill/>
-          </a:ln>
-        </p:spPr>
-        <p:txBody>
-          <a:bodyPr wrap="square" rtlCol="1">
-            <a:spAutoFit/>
-          </a:bodyPr>
-          <a:lstStyle/>
-          <a:p>
-            <a:r>
-              <a:rPr lang="en-US" dirty="0">
+            <a:ln>
+              <a:noFill/>
+            </a:ln>
+          </p:spPr>
+          <p:txBody>
+            <a:bodyPr wrap="square" rtlCol="1">
+              <a:spAutoFit/>
+            </a:bodyPr>
+            <a:lstStyle/>
+            <a:p>
+              <a:r>
+                <a:rPr lang="en-US" dirty="0">
+                  <a:solidFill>
+                    <a:srgbClr val="FFFF00"/>
+                  </a:solidFill>
+                </a:rPr>
+                <a:t>Kafka</a:t>
+              </a:r>
+              <a:endParaRPr lang="he-IL" dirty="0">
                 <a:solidFill>
                   <a:srgbClr val="FFFF00"/>
                 </a:solidFill>
-              </a:rPr>
-              <a:t>Kafka</a:t>
-            </a:r>
-            <a:endParaRPr lang="he-IL" dirty="0">
-              <a:solidFill>
-                <a:srgbClr val="FFFF00"/>
-              </a:solidFill>
-            </a:endParaRPr>
-          </a:p>
-        </p:txBody>
-      </p:sp>
+              </a:endParaRPr>
+            </a:p>
+          </p:txBody>
+        </p:sp>
+      </p:grpSp>
     </p:spTree>
     <p:extLst>
       <p:ext uri="{BB962C8B-B14F-4D97-AF65-F5344CB8AC3E}">
@@ -13868,7 +15408,7 @@
 </p:sld>
 </file>
 
-<file path=ppt/slides/slide8.xml><?xml version="1.0" encoding="utf-8"?>
+<file path=ppt/slides/slide9.xml><?xml version="1.0" encoding="utf-8"?>
 <p:sld xmlns:a="http://schemas.openxmlformats.org/drawingml/2006/main" xmlns:r="http://schemas.openxmlformats.org/officeDocument/2006/relationships" xmlns:p="http://schemas.openxmlformats.org/presentationml/2006/main">
   <p:cSld>
     <p:spTree>
@@ -14988,262 +16528,12 @@
           </p:style>
         </p:cxnSp>
       </p:grpSp>
-      <p:cxnSp>
-        <p:nvCxnSpPr>
-          <p:cNvPr id="5" name="מחבר חץ ישר 4">
+      <p:grpSp>
+        <p:nvGrpSpPr>
+          <p:cNvPr id="3" name="קבוצה 2">
             <a:extLst>
               <a:ext uri="{FF2B5EF4-FFF2-40B4-BE49-F238E27FC236}">
-                <a16:creationId xmlns:a16="http://schemas.microsoft.com/office/drawing/2014/main" id="{F36881FC-E8F9-3129-3646-F70D8663B052}"/>
-              </a:ext>
-            </a:extLst>
-          </p:cNvPr>
-          <p:cNvCxnSpPr/>
-          <p:nvPr/>
-        </p:nvCxnSpPr>
-        <p:spPr>
-          <a:xfrm flipH="1">
-            <a:off x="1837944" y="722376"/>
-            <a:ext cx="804672" cy="0"/>
-          </a:xfrm>
-          <a:prstGeom prst="straightConnector1">
-            <a:avLst/>
-          </a:prstGeom>
-          <a:ln w="38100">
-            <a:solidFill>
-              <a:schemeClr val="bg1"/>
-            </a:solidFill>
-            <a:tailEnd type="triangle"/>
-          </a:ln>
-        </p:spPr>
-        <p:style>
-          <a:lnRef idx="2">
-            <a:schemeClr val="accent1"/>
-          </a:lnRef>
-          <a:fillRef idx="0">
-            <a:schemeClr val="accent1"/>
-          </a:fillRef>
-          <a:effectRef idx="1">
-            <a:schemeClr val="accent1"/>
-          </a:effectRef>
-          <a:fontRef idx="minor">
-            <a:schemeClr val="tx1"/>
-          </a:fontRef>
-        </p:style>
-      </p:cxnSp>
-      <p:cxnSp>
-        <p:nvCxnSpPr>
-          <p:cNvPr id="15" name="מחבר חץ ישר 14">
-            <a:extLst>
-              <a:ext uri="{FF2B5EF4-FFF2-40B4-BE49-F238E27FC236}">
-                <a16:creationId xmlns:a16="http://schemas.microsoft.com/office/drawing/2014/main" id="{A52A06A8-80B4-57E7-355F-C863BF3C4369}"/>
-              </a:ext>
-            </a:extLst>
-          </p:cNvPr>
-          <p:cNvCxnSpPr/>
-          <p:nvPr/>
-        </p:nvCxnSpPr>
-        <p:spPr>
-          <a:xfrm flipH="1">
-            <a:off x="1847088" y="1035755"/>
-            <a:ext cx="804672" cy="0"/>
-          </a:xfrm>
-          <a:prstGeom prst="straightConnector1">
-            <a:avLst/>
-          </a:prstGeom>
-          <a:ln w="38100">
-            <a:solidFill>
-              <a:srgbClr val="FFFF00"/>
-            </a:solidFill>
-            <a:tailEnd type="triangle"/>
-          </a:ln>
-        </p:spPr>
-        <p:style>
-          <a:lnRef idx="2">
-            <a:schemeClr val="accent1"/>
-          </a:lnRef>
-          <a:fillRef idx="0">
-            <a:schemeClr val="accent1"/>
-          </a:fillRef>
-          <a:effectRef idx="1">
-            <a:schemeClr val="accent1"/>
-          </a:effectRef>
-          <a:fontRef idx="minor">
-            <a:schemeClr val="tx1"/>
-          </a:fontRef>
-        </p:style>
-      </p:cxnSp>
-      <p:sp>
-        <p:nvSpPr>
-          <p:cNvPr id="17" name="תיבת טקסט 16">
-            <a:extLst>
-              <a:ext uri="{FF2B5EF4-FFF2-40B4-BE49-F238E27FC236}">
-                <a16:creationId xmlns:a16="http://schemas.microsoft.com/office/drawing/2014/main" id="{3E4ACDB3-8265-24AD-458F-8013F1F441F4}"/>
-              </a:ext>
-            </a:extLst>
-          </p:cNvPr>
-          <p:cNvSpPr txBox="1"/>
-          <p:nvPr/>
-        </p:nvSpPr>
-        <p:spPr>
-          <a:xfrm>
-            <a:off x="536122" y="530352"/>
-            <a:ext cx="1173806" cy="369332"/>
-          </a:xfrm>
-          <a:prstGeom prst="rect">
-            <a:avLst/>
-          </a:prstGeom>
-          <a:noFill/>
-          <a:ln>
-            <a:noFill/>
-          </a:ln>
-        </p:spPr>
-        <p:txBody>
-          <a:bodyPr wrap="square" rtlCol="1">
-            <a:spAutoFit/>
-          </a:bodyPr>
-          <a:lstStyle/>
-          <a:p>
-            <a:r>
-              <a:rPr lang="en-US" dirty="0" err="1">
-                <a:solidFill>
-                  <a:schemeClr val="bg1"/>
-                </a:solidFill>
-              </a:rPr>
-              <a:t>RestAPI</a:t>
-            </a:r>
-            <a:endParaRPr lang="he-IL" dirty="0">
-              <a:solidFill>
-                <a:schemeClr val="bg1"/>
-              </a:solidFill>
-            </a:endParaRPr>
-          </a:p>
-        </p:txBody>
-      </p:sp>
-      <p:sp>
-        <p:nvSpPr>
-          <p:cNvPr id="18" name="תיבת טקסט 17">
-            <a:extLst>
-              <a:ext uri="{FF2B5EF4-FFF2-40B4-BE49-F238E27FC236}">
-                <a16:creationId xmlns:a16="http://schemas.microsoft.com/office/drawing/2014/main" id="{9007220F-0677-0A39-E778-74C93AF784B6}"/>
-              </a:ext>
-            </a:extLst>
-          </p:cNvPr>
-          <p:cNvSpPr txBox="1"/>
-          <p:nvPr/>
-        </p:nvSpPr>
-        <p:spPr>
-          <a:xfrm>
-            <a:off x="536122" y="851089"/>
-            <a:ext cx="1173806" cy="369332"/>
-          </a:xfrm>
-          <a:prstGeom prst="rect">
-            <a:avLst/>
-          </a:prstGeom>
-          <a:noFill/>
-          <a:ln>
-            <a:noFill/>
-          </a:ln>
-        </p:spPr>
-        <p:txBody>
-          <a:bodyPr wrap="square" rtlCol="1">
-            <a:spAutoFit/>
-          </a:bodyPr>
-          <a:lstStyle/>
-          <a:p>
-            <a:r>
-              <a:rPr lang="en-US" dirty="0">
-                <a:solidFill>
-                  <a:srgbClr val="FFFF00"/>
-                </a:solidFill>
-              </a:rPr>
-              <a:t>Kafka</a:t>
-            </a:r>
-            <a:endParaRPr lang="he-IL" dirty="0">
-              <a:solidFill>
-                <a:srgbClr val="FFFF00"/>
-              </a:solidFill>
-            </a:endParaRPr>
-          </a:p>
-        </p:txBody>
-      </p:sp>
-    </p:spTree>
-    <p:extLst>
-      <p:ext uri="{BB962C8B-B14F-4D97-AF65-F5344CB8AC3E}">
-        <p14:creationId xmlns:p14="http://schemas.microsoft.com/office/powerpoint/2010/main" val="3875451982"/>
-      </p:ext>
-    </p:extLst>
-  </p:cSld>
-  <p:clrMapOvr>
-    <a:masterClrMapping/>
-  </p:clrMapOvr>
-</p:sld>
-</file>
-
-<file path=ppt/slides/slide9.xml><?xml version="1.0" encoding="utf-8"?>
-<p:sld xmlns:a="http://schemas.openxmlformats.org/drawingml/2006/main" xmlns:r="http://schemas.openxmlformats.org/officeDocument/2006/relationships" xmlns:p="http://schemas.openxmlformats.org/presentationml/2006/main">
-  <p:cSld>
-    <p:spTree>
-      <p:nvGrpSpPr>
-        <p:cNvPr id="1" name="">
-          <a:extLst>
-            <a:ext uri="{FF2B5EF4-FFF2-40B4-BE49-F238E27FC236}">
-              <a16:creationId xmlns:a16="http://schemas.microsoft.com/office/drawing/2014/main" id="{D3BCC0DA-8717-33B4-DE23-9406CE72731C}"/>
-            </a:ext>
-          </a:extLst>
-        </p:cNvPr>
-        <p:cNvGrpSpPr/>
-        <p:nvPr/>
-      </p:nvGrpSpPr>
-      <p:grpSpPr>
-        <a:xfrm>
-          <a:off x="0" y="0"/>
-          <a:ext cx="0" cy="0"/>
-          <a:chOff x="0" y="0"/>
-          <a:chExt cx="0" cy="0"/>
-        </a:xfrm>
-      </p:grpSpPr>
-      <p:pic>
-        <p:nvPicPr>
-          <p:cNvPr id="6" name="תמונה 5" descr="תמונה שמכילה גרפיקה, לוגו, עיצוב גרפי, צילום מסך&#10;&#10;תוכן שנוצר על-ידי בינה מלאכותית עשוי להיות שגוי.">
-            <a:extLst>
-              <a:ext uri="{FF2B5EF4-FFF2-40B4-BE49-F238E27FC236}">
-                <a16:creationId xmlns:a16="http://schemas.microsoft.com/office/drawing/2014/main" id="{51F2B015-B084-3F60-7E61-A5CE297E276E}"/>
-              </a:ext>
-            </a:extLst>
-          </p:cNvPr>
-          <p:cNvPicPr>
-            <a:picLocks noChangeAspect="1"/>
-          </p:cNvPicPr>
-          <p:nvPr/>
-        </p:nvPicPr>
-        <p:blipFill>
-          <a:blip r:embed="rId3">
-            <a:extLst>
-              <a:ext uri="{28A0092B-C50C-407E-A947-70E740481C1C}">
-                <a14:useLocalDpi xmlns:a14="http://schemas.microsoft.com/office/drawing/2010/main" val="0"/>
-              </a:ext>
-            </a:extLst>
-          </a:blip>
-          <a:stretch>
-            <a:fillRect/>
-          </a:stretch>
-        </p:blipFill>
-        <p:spPr>
-          <a:xfrm>
-            <a:off x="9780620" y="-125380"/>
-            <a:ext cx="1875258" cy="1875258"/>
-          </a:xfrm>
-          <a:prstGeom prst="rect">
-            <a:avLst/>
-          </a:prstGeom>
-        </p:spPr>
-      </p:pic>
-      <p:grpSp>
-        <p:nvGrpSpPr>
-          <p:cNvPr id="2" name="קבוצה 1">
-            <a:extLst>
-              <a:ext uri="{FF2B5EF4-FFF2-40B4-BE49-F238E27FC236}">
-                <a16:creationId xmlns:a16="http://schemas.microsoft.com/office/drawing/2014/main" id="{E3FF6BA5-E812-BF64-B7D2-F19F8F84B1D9}"/>
+                <a16:creationId xmlns:a16="http://schemas.microsoft.com/office/drawing/2014/main" id="{25597A4D-C601-7CFE-31CA-F78439063D4F}"/>
               </a:ext>
             </a:extLst>
           </p:cNvPr>
@@ -15252,37 +16542,119 @@
         </p:nvGrpSpPr>
         <p:grpSpPr>
           <a:xfrm>
-            <a:off x="1119415" y="1257300"/>
-            <a:ext cx="9089572" cy="4744998"/>
-            <a:chOff x="217715" y="381000"/>
-            <a:chExt cx="9089572" cy="4744998"/>
+            <a:off x="2246587" y="421056"/>
+            <a:ext cx="2115638" cy="690069"/>
+            <a:chOff x="536122" y="530352"/>
+            <a:chExt cx="2115638" cy="690069"/>
           </a:xfrm>
         </p:grpSpPr>
-        <p:sp>
-          <p:nvSpPr>
-            <p:cNvPr id="4" name="תיבת טקסט 3">
-              <a:extLst>
-                <a:ext uri="{FF2B5EF4-FFF2-40B4-BE49-F238E27FC236}">
-                  <a16:creationId xmlns:a16="http://schemas.microsoft.com/office/drawing/2014/main" id="{BA6393D9-4802-E68C-2918-61FA47E425E0}"/>
-                </a:ext>
-              </a:extLst>
-            </p:cNvPr>
-            <p:cNvSpPr txBox="1"/>
-            <p:nvPr/>
-          </p:nvSpPr>
-          <p:spPr>
-            <a:xfrm>
-              <a:off x="5529943" y="381000"/>
-              <a:ext cx="827314" cy="369332"/>
-            </a:xfrm>
-            <a:prstGeom prst="rect">
-              <a:avLst/>
-            </a:prstGeom>
-            <a:noFill/>
-            <a:ln>
+        <p:cxnSp>
+          <p:nvCxnSpPr>
+            <p:cNvPr id="19" name="מחבר חץ ישר 18">
+              <a:extLst>
+                <a:ext uri="{FF2B5EF4-FFF2-40B4-BE49-F238E27FC236}">
+                  <a16:creationId xmlns:a16="http://schemas.microsoft.com/office/drawing/2014/main" id="{47739FF0-7CAC-951E-7F87-D8B338E0348D}"/>
+                </a:ext>
+              </a:extLst>
+            </p:cNvPr>
+            <p:cNvCxnSpPr/>
+            <p:nvPr/>
+          </p:nvCxnSpPr>
+          <p:spPr>
+            <a:xfrm flipH="1">
+              <a:off x="1837944" y="722376"/>
+              <a:ext cx="804672" cy="0"/>
+            </a:xfrm>
+            <a:prstGeom prst="straightConnector1">
+              <a:avLst/>
+            </a:prstGeom>
+            <a:ln w="38100">
               <a:solidFill>
                 <a:schemeClr val="bg1"/>
               </a:solidFill>
+              <a:tailEnd type="triangle"/>
+            </a:ln>
+          </p:spPr>
+          <p:style>
+            <a:lnRef idx="2">
+              <a:schemeClr val="accent1"/>
+            </a:lnRef>
+            <a:fillRef idx="0">
+              <a:schemeClr val="accent1"/>
+            </a:fillRef>
+            <a:effectRef idx="1">
+              <a:schemeClr val="accent1"/>
+            </a:effectRef>
+            <a:fontRef idx="minor">
+              <a:schemeClr val="tx1"/>
+            </a:fontRef>
+          </p:style>
+        </p:cxnSp>
+        <p:cxnSp>
+          <p:nvCxnSpPr>
+            <p:cNvPr id="20" name="מחבר חץ ישר 19">
+              <a:extLst>
+                <a:ext uri="{FF2B5EF4-FFF2-40B4-BE49-F238E27FC236}">
+                  <a16:creationId xmlns:a16="http://schemas.microsoft.com/office/drawing/2014/main" id="{25488C8A-58B1-8969-4745-9593A922EE51}"/>
+                </a:ext>
+              </a:extLst>
+            </p:cNvPr>
+            <p:cNvCxnSpPr/>
+            <p:nvPr/>
+          </p:nvCxnSpPr>
+          <p:spPr>
+            <a:xfrm flipH="1">
+              <a:off x="1847088" y="1035755"/>
+              <a:ext cx="804672" cy="0"/>
+            </a:xfrm>
+            <a:prstGeom prst="straightConnector1">
+              <a:avLst/>
+            </a:prstGeom>
+            <a:ln w="38100">
+              <a:solidFill>
+                <a:srgbClr val="FFFF00"/>
+              </a:solidFill>
+              <a:tailEnd type="triangle"/>
+            </a:ln>
+          </p:spPr>
+          <p:style>
+            <a:lnRef idx="2">
+              <a:schemeClr val="accent1"/>
+            </a:lnRef>
+            <a:fillRef idx="0">
+              <a:schemeClr val="accent1"/>
+            </a:fillRef>
+            <a:effectRef idx="1">
+              <a:schemeClr val="accent1"/>
+            </a:effectRef>
+            <a:fontRef idx="minor">
+              <a:schemeClr val="tx1"/>
+            </a:fontRef>
+          </p:style>
+        </p:cxnSp>
+        <p:sp>
+          <p:nvSpPr>
+            <p:cNvPr id="21" name="תיבת טקסט 20">
+              <a:extLst>
+                <a:ext uri="{FF2B5EF4-FFF2-40B4-BE49-F238E27FC236}">
+                  <a16:creationId xmlns:a16="http://schemas.microsoft.com/office/drawing/2014/main" id="{3DE9E541-3FDD-DBDE-A00C-52D8177F1D8C}"/>
+                </a:ext>
+              </a:extLst>
+            </p:cNvPr>
+            <p:cNvSpPr txBox="1"/>
+            <p:nvPr/>
+          </p:nvSpPr>
+          <p:spPr>
+            <a:xfrm>
+              <a:off x="536122" y="530352"/>
+              <a:ext cx="1173806" cy="369332"/>
+            </a:xfrm>
+            <a:prstGeom prst="rect">
+              <a:avLst/>
+            </a:prstGeom>
+            <a:noFill/>
+            <a:ln>
+              <a:noFill/>
             </a:ln>
           </p:spPr>
           <p:txBody>
@@ -15292,12 +16664,12 @@
             <a:lstStyle/>
             <a:p>
               <a:r>
-                <a:rPr lang="en-US" dirty="0">
+                <a:rPr lang="en-US" dirty="0" err="1">
                   <a:solidFill>
                     <a:schemeClr val="bg1"/>
                   </a:solidFill>
                 </a:rPr>
-                <a:t>client</a:t>
+                <a:t>RestAPI</a:t>
               </a:r>
               <a:endParaRPr lang="he-IL" dirty="0">
                 <a:solidFill>
@@ -15309,10 +16681,10 @@
         </p:sp>
         <p:sp>
           <p:nvSpPr>
-            <p:cNvPr id="7" name="תיבת טקסט 6">
-              <a:extLst>
-                <a:ext uri="{FF2B5EF4-FFF2-40B4-BE49-F238E27FC236}">
-                  <a16:creationId xmlns:a16="http://schemas.microsoft.com/office/drawing/2014/main" id="{08CA930A-30F5-49EE-4412-58C28B5B4150}"/>
+            <p:cNvPr id="23" name="תיבת טקסט 22">
+              <a:extLst>
+                <a:ext uri="{FF2B5EF4-FFF2-40B4-BE49-F238E27FC236}">
+                  <a16:creationId xmlns:a16="http://schemas.microsoft.com/office/drawing/2014/main" id="{9A92F3D7-4F24-657E-96DF-30F52749F6A8}"/>
                 </a:ext>
               </a:extLst>
             </p:cNvPr>
@@ -15321,17 +16693,15 @@
           </p:nvSpPr>
           <p:spPr>
             <a:xfrm>
-              <a:off x="5323114" y="1351002"/>
-              <a:ext cx="1240971" cy="369332"/>
+              <a:off x="536122" y="851089"/>
+              <a:ext cx="1173806" cy="369332"/>
             </a:xfrm>
             <a:prstGeom prst="rect">
               <a:avLst/>
             </a:prstGeom>
             <a:noFill/>
             <a:ln>
-              <a:solidFill>
-                <a:schemeClr val="bg1"/>
-              </a:solidFill>
+              <a:noFill/>
             </a:ln>
           </p:spPr>
           <p:txBody>
@@ -15343,1144 +16713,24 @@
               <a:r>
                 <a:rPr lang="en-US" dirty="0">
                   <a:solidFill>
-                    <a:schemeClr val="bg1"/>
+                    <a:srgbClr val="FFFF00"/>
                   </a:solidFill>
                 </a:rPr>
-                <a:t>gateway</a:t>
+                <a:t>Kafka</a:t>
               </a:r>
               <a:endParaRPr lang="he-IL" dirty="0">
                 <a:solidFill>
-                  <a:schemeClr val="bg1"/>
+                  <a:srgbClr val="FFFF00"/>
                 </a:solidFill>
               </a:endParaRPr>
             </a:p>
           </p:txBody>
         </p:sp>
-        <p:sp>
-          <p:nvSpPr>
-            <p:cNvPr id="8" name="תיבת טקסט 7">
-              <a:extLst>
-                <a:ext uri="{FF2B5EF4-FFF2-40B4-BE49-F238E27FC236}">
-                  <a16:creationId xmlns:a16="http://schemas.microsoft.com/office/drawing/2014/main" id="{C51A0F83-69F4-2FF5-7831-5C534E20A13F}"/>
-                </a:ext>
-              </a:extLst>
-            </p:cNvPr>
-            <p:cNvSpPr txBox="1"/>
-            <p:nvPr/>
-          </p:nvSpPr>
-          <p:spPr>
-            <a:xfrm>
-              <a:off x="5475514" y="3408011"/>
-              <a:ext cx="1240971" cy="369332"/>
-            </a:xfrm>
-            <a:prstGeom prst="rect">
-              <a:avLst/>
-            </a:prstGeom>
-            <a:noFill/>
-            <a:ln>
-              <a:solidFill>
-                <a:schemeClr val="bg1"/>
-              </a:solidFill>
-            </a:ln>
-          </p:spPr>
-          <p:txBody>
-            <a:bodyPr wrap="square" rtlCol="1">
-              <a:spAutoFit/>
-            </a:bodyPr>
-            <a:lstStyle/>
-            <a:p>
-              <a:r>
-                <a:rPr lang="en-US" dirty="0">
-                  <a:solidFill>
-                    <a:schemeClr val="bg1"/>
-                  </a:solidFill>
-                </a:rPr>
-                <a:t>KeyCloak</a:t>
-              </a:r>
-              <a:endParaRPr lang="he-IL" dirty="0">
-                <a:solidFill>
-                  <a:schemeClr val="bg1"/>
-                </a:solidFill>
-              </a:endParaRPr>
-            </a:p>
-          </p:txBody>
-        </p:sp>
-        <p:sp>
-          <p:nvSpPr>
-            <p:cNvPr id="9" name="תיבת טקסט 8">
-              <a:extLst>
-                <a:ext uri="{FF2B5EF4-FFF2-40B4-BE49-F238E27FC236}">
-                  <a16:creationId xmlns:a16="http://schemas.microsoft.com/office/drawing/2014/main" id="{C7CD45FC-78A7-7ED8-1692-75097C80B968}"/>
-                </a:ext>
-              </a:extLst>
-            </p:cNvPr>
-            <p:cNvSpPr txBox="1"/>
-            <p:nvPr/>
-          </p:nvSpPr>
-          <p:spPr>
-            <a:xfrm>
-              <a:off x="7685315" y="2177141"/>
-              <a:ext cx="1621972" cy="369332"/>
-            </a:xfrm>
-            <a:prstGeom prst="rect">
-              <a:avLst/>
-            </a:prstGeom>
-            <a:noFill/>
-            <a:ln>
-              <a:solidFill>
-                <a:schemeClr val="bg1"/>
-              </a:solidFill>
-            </a:ln>
-          </p:spPr>
-          <p:txBody>
-            <a:bodyPr wrap="square" rtlCol="1">
-              <a:spAutoFit/>
-            </a:bodyPr>
-            <a:lstStyle/>
-            <a:p>
-              <a:r>
-                <a:rPr lang="en-US" dirty="0">
-                  <a:solidFill>
-                    <a:schemeClr val="bg1"/>
-                  </a:solidFill>
-                </a:rPr>
-                <a:t>Data Manager</a:t>
-              </a:r>
-              <a:endParaRPr lang="he-IL" dirty="0">
-                <a:solidFill>
-                  <a:schemeClr val="bg1"/>
-                </a:solidFill>
-              </a:endParaRPr>
-            </a:p>
-          </p:txBody>
-        </p:sp>
-        <p:sp>
-          <p:nvSpPr>
-            <p:cNvPr id="10" name="תיבת טקסט 9">
-              <a:extLst>
-                <a:ext uri="{FF2B5EF4-FFF2-40B4-BE49-F238E27FC236}">
-                  <a16:creationId xmlns:a16="http://schemas.microsoft.com/office/drawing/2014/main" id="{E033A260-C7EC-46BD-A3B1-B4983EF0DA05}"/>
-                </a:ext>
-              </a:extLst>
-            </p:cNvPr>
-            <p:cNvSpPr txBox="1"/>
-            <p:nvPr/>
-          </p:nvSpPr>
-          <p:spPr>
-            <a:xfrm>
-              <a:off x="3178630" y="2177141"/>
-              <a:ext cx="1709058" cy="369332"/>
-            </a:xfrm>
-            <a:prstGeom prst="rect">
-              <a:avLst/>
-            </a:prstGeom>
-            <a:noFill/>
-            <a:ln>
-              <a:solidFill>
-                <a:schemeClr val="bg1"/>
-              </a:solidFill>
-            </a:ln>
-          </p:spPr>
-          <p:txBody>
-            <a:bodyPr wrap="square" rtlCol="1">
-              <a:spAutoFit/>
-            </a:bodyPr>
-            <a:lstStyle/>
-            <a:p>
-              <a:r>
-                <a:rPr lang="en-US" dirty="0">
-                  <a:solidFill>
-                    <a:schemeClr val="bg1"/>
-                  </a:solidFill>
-                </a:rPr>
-                <a:t>News Manager</a:t>
-              </a:r>
-              <a:endParaRPr lang="he-IL" dirty="0">
-                <a:solidFill>
-                  <a:schemeClr val="bg1"/>
-                </a:solidFill>
-              </a:endParaRPr>
-            </a:p>
-          </p:txBody>
-        </p:sp>
-        <p:sp>
-          <p:nvSpPr>
-            <p:cNvPr id="11" name="תיבת טקסט 10">
-              <a:extLst>
-                <a:ext uri="{FF2B5EF4-FFF2-40B4-BE49-F238E27FC236}">
-                  <a16:creationId xmlns:a16="http://schemas.microsoft.com/office/drawing/2014/main" id="{5EB1DD46-8ABC-CF58-0386-C4D6E61B57EB}"/>
-                </a:ext>
-              </a:extLst>
-            </p:cNvPr>
-            <p:cNvSpPr txBox="1"/>
-            <p:nvPr/>
-          </p:nvSpPr>
-          <p:spPr>
-            <a:xfrm>
-              <a:off x="217715" y="3526580"/>
-              <a:ext cx="1621972" cy="369332"/>
-            </a:xfrm>
-            <a:prstGeom prst="rect">
-              <a:avLst/>
-            </a:prstGeom>
-            <a:noFill/>
-            <a:ln w="38100">
-              <a:solidFill>
-                <a:srgbClr val="00B050"/>
-              </a:solidFill>
-            </a:ln>
-          </p:spPr>
-          <p:txBody>
-            <a:bodyPr wrap="square" rtlCol="1">
-              <a:spAutoFit/>
-            </a:bodyPr>
-            <a:lstStyle/>
-            <a:p>
-              <a:r>
-                <a:rPr lang="en-US" dirty="0">
-                  <a:highlight>
-                    <a:srgbClr val="00FFFF"/>
-                  </a:highlight>
-                </a:rPr>
-                <a:t>Notification</a:t>
-              </a:r>
-              <a:endParaRPr lang="he-IL" dirty="0">
-                <a:highlight>
-                  <a:srgbClr val="00FFFF"/>
-                </a:highlight>
-              </a:endParaRPr>
-            </a:p>
-          </p:txBody>
-        </p:sp>
-        <p:sp>
-          <p:nvSpPr>
-            <p:cNvPr id="12" name="תיבת טקסט 11">
-              <a:extLst>
-                <a:ext uri="{FF2B5EF4-FFF2-40B4-BE49-F238E27FC236}">
-                  <a16:creationId xmlns:a16="http://schemas.microsoft.com/office/drawing/2014/main" id="{8611CB22-DB38-AB47-1121-CC9495594C46}"/>
-                </a:ext>
-              </a:extLst>
-            </p:cNvPr>
-            <p:cNvSpPr txBox="1"/>
-            <p:nvPr/>
-          </p:nvSpPr>
-          <p:spPr>
-            <a:xfrm>
-              <a:off x="217715" y="1351002"/>
-              <a:ext cx="1621972" cy="369332"/>
-            </a:xfrm>
-            <a:prstGeom prst="rect">
-              <a:avLst/>
-            </a:prstGeom>
-            <a:noFill/>
-            <a:ln>
-              <a:solidFill>
-                <a:schemeClr val="bg1"/>
-              </a:solidFill>
-            </a:ln>
-          </p:spPr>
-          <p:txBody>
-            <a:bodyPr wrap="square" rtlCol="1">
-              <a:spAutoFit/>
-            </a:bodyPr>
-            <a:lstStyle/>
-            <a:p>
-              <a:r>
-                <a:rPr lang="en-US" dirty="0">
-                  <a:solidFill>
-                    <a:schemeClr val="bg1"/>
-                  </a:solidFill>
-                </a:rPr>
-                <a:t>LLM</a:t>
-              </a:r>
-              <a:endParaRPr lang="he-IL" dirty="0">
-                <a:solidFill>
-                  <a:schemeClr val="bg1"/>
-                </a:solidFill>
-              </a:endParaRPr>
-            </a:p>
-          </p:txBody>
-        </p:sp>
-        <p:sp>
-          <p:nvSpPr>
-            <p:cNvPr id="13" name="תיבת טקסט 12">
-              <a:extLst>
-                <a:ext uri="{FF2B5EF4-FFF2-40B4-BE49-F238E27FC236}">
-                  <a16:creationId xmlns:a16="http://schemas.microsoft.com/office/drawing/2014/main" id="{F7D383BE-2B52-3215-4290-67EBBAF96A8D}"/>
-                </a:ext>
-              </a:extLst>
-            </p:cNvPr>
-            <p:cNvSpPr txBox="1"/>
-            <p:nvPr/>
-          </p:nvSpPr>
-          <p:spPr>
-            <a:xfrm>
-              <a:off x="3178630" y="4756666"/>
-              <a:ext cx="1621972" cy="369332"/>
-            </a:xfrm>
-            <a:prstGeom prst="rect">
-              <a:avLst/>
-            </a:prstGeom>
-            <a:noFill/>
-            <a:ln>
-              <a:solidFill>
-                <a:schemeClr val="bg1"/>
-              </a:solidFill>
-            </a:ln>
-          </p:spPr>
-          <p:txBody>
-            <a:bodyPr wrap="square" rtlCol="1">
-              <a:spAutoFit/>
-            </a:bodyPr>
-            <a:lstStyle/>
-            <a:p>
-              <a:r>
-                <a:rPr lang="en-US" dirty="0">
-                  <a:solidFill>
-                    <a:schemeClr val="bg1"/>
-                  </a:solidFill>
-                </a:rPr>
-                <a:t>NewsData.IO</a:t>
-              </a:r>
-              <a:endParaRPr lang="he-IL" dirty="0">
-                <a:solidFill>
-                  <a:schemeClr val="bg1"/>
-                </a:solidFill>
-              </a:endParaRPr>
-            </a:p>
-          </p:txBody>
-        </p:sp>
-        <p:sp>
-          <p:nvSpPr>
-            <p:cNvPr id="14" name="תיבת טקסט 13">
-              <a:extLst>
-                <a:ext uri="{FF2B5EF4-FFF2-40B4-BE49-F238E27FC236}">
-                  <a16:creationId xmlns:a16="http://schemas.microsoft.com/office/drawing/2014/main" id="{59577345-8E86-162D-74A0-6E92B51E9DA0}"/>
-                </a:ext>
-              </a:extLst>
-            </p:cNvPr>
-            <p:cNvSpPr txBox="1"/>
-            <p:nvPr/>
-          </p:nvSpPr>
-          <p:spPr>
-            <a:xfrm>
-              <a:off x="7685315" y="4560723"/>
-              <a:ext cx="1621972" cy="369332"/>
-            </a:xfrm>
-            <a:prstGeom prst="rect">
-              <a:avLst/>
-            </a:prstGeom>
-            <a:noFill/>
-            <a:ln>
-              <a:solidFill>
-                <a:schemeClr val="bg1"/>
-              </a:solidFill>
-            </a:ln>
-          </p:spPr>
-          <p:txBody>
-            <a:bodyPr wrap="square" rtlCol="1">
-              <a:spAutoFit/>
-            </a:bodyPr>
-            <a:lstStyle/>
-            <a:p>
-              <a:r>
-                <a:rPr lang="en-US" dirty="0">
-                  <a:solidFill>
-                    <a:schemeClr val="bg1"/>
-                  </a:solidFill>
-                </a:rPr>
-                <a:t>PostgreSQL</a:t>
-              </a:r>
-              <a:endParaRPr lang="he-IL" dirty="0">
-                <a:solidFill>
-                  <a:schemeClr val="bg1"/>
-                </a:solidFill>
-              </a:endParaRPr>
-            </a:p>
-          </p:txBody>
-        </p:sp>
-        <p:cxnSp>
-          <p:nvCxnSpPr>
-            <p:cNvPr id="16" name="מחבר חץ ישר 15">
-              <a:extLst>
-                <a:ext uri="{FF2B5EF4-FFF2-40B4-BE49-F238E27FC236}">
-                  <a16:creationId xmlns:a16="http://schemas.microsoft.com/office/drawing/2014/main" id="{5342C7D6-0D31-51AD-04ED-CE2E0A6C28FD}"/>
-                </a:ext>
-              </a:extLst>
-            </p:cNvPr>
-            <p:cNvCxnSpPr>
-              <a:stCxn id="4" idx="2"/>
-              <a:endCxn id="7" idx="0"/>
-            </p:cNvCxnSpPr>
-            <p:nvPr/>
-          </p:nvCxnSpPr>
-          <p:spPr>
-            <a:xfrm>
-              <a:off x="5943600" y="750332"/>
-              <a:ext cx="0" cy="600670"/>
-            </a:xfrm>
-            <a:prstGeom prst="straightConnector1">
-              <a:avLst/>
-            </a:prstGeom>
-            <a:ln w="38100">
-              <a:solidFill>
-                <a:schemeClr val="bg1"/>
-              </a:solidFill>
-              <a:headEnd type="triangle" w="med" len="med"/>
-              <a:tailEnd type="triangle" w="med" len="med"/>
-            </a:ln>
-          </p:spPr>
-          <p:style>
-            <a:lnRef idx="2">
-              <a:schemeClr val="accent1"/>
-            </a:lnRef>
-            <a:fillRef idx="0">
-              <a:schemeClr val="accent1"/>
-            </a:fillRef>
-            <a:effectRef idx="1">
-              <a:schemeClr val="accent1"/>
-            </a:effectRef>
-            <a:fontRef idx="minor">
-              <a:schemeClr val="tx1"/>
-            </a:fontRef>
-          </p:style>
-        </p:cxnSp>
-        <p:cxnSp>
-          <p:nvCxnSpPr>
-            <p:cNvPr id="22" name="מחבר: מרפקי 21">
-              <a:extLst>
-                <a:ext uri="{FF2B5EF4-FFF2-40B4-BE49-F238E27FC236}">
-                  <a16:creationId xmlns:a16="http://schemas.microsoft.com/office/drawing/2014/main" id="{CC5FE44E-F536-ACD7-9300-29056101A737}"/>
-                </a:ext>
-              </a:extLst>
-            </p:cNvPr>
-            <p:cNvCxnSpPr>
-              <a:cxnSpLocks/>
-              <a:stCxn id="7" idx="3"/>
-              <a:endCxn id="9" idx="0"/>
-            </p:cNvCxnSpPr>
-            <p:nvPr/>
-          </p:nvCxnSpPr>
-          <p:spPr>
-            <a:xfrm>
-              <a:off x="6564085" y="1535668"/>
-              <a:ext cx="1932216" cy="641473"/>
-            </a:xfrm>
-            <a:prstGeom prst="bentConnector2">
-              <a:avLst/>
-            </a:prstGeom>
-            <a:ln w="38100">
-              <a:solidFill>
-                <a:schemeClr val="bg1"/>
-              </a:solidFill>
-              <a:headEnd type="triangle" w="med" len="med"/>
-              <a:tailEnd type="triangle" w="med" len="med"/>
-            </a:ln>
-          </p:spPr>
-          <p:style>
-            <a:lnRef idx="2">
-              <a:schemeClr val="accent1"/>
-            </a:lnRef>
-            <a:fillRef idx="0">
-              <a:schemeClr val="accent1"/>
-            </a:fillRef>
-            <a:effectRef idx="1">
-              <a:schemeClr val="accent1"/>
-            </a:effectRef>
-            <a:fontRef idx="minor">
-              <a:schemeClr val="tx1"/>
-            </a:fontRef>
-          </p:style>
-        </p:cxnSp>
-        <p:cxnSp>
-          <p:nvCxnSpPr>
-            <p:cNvPr id="26" name="מחבר: מרפקי 25">
-              <a:extLst>
-                <a:ext uri="{FF2B5EF4-FFF2-40B4-BE49-F238E27FC236}">
-                  <a16:creationId xmlns:a16="http://schemas.microsoft.com/office/drawing/2014/main" id="{5A3DD336-3AFF-9F15-280D-60D59EE3F928}"/>
-                </a:ext>
-              </a:extLst>
-            </p:cNvPr>
-            <p:cNvCxnSpPr>
-              <a:cxnSpLocks/>
-              <a:stCxn id="7" idx="1"/>
-              <a:endCxn id="10" idx="0"/>
-            </p:cNvCxnSpPr>
-            <p:nvPr/>
-          </p:nvCxnSpPr>
-          <p:spPr>
-            <a:xfrm rot="10800000" flipV="1">
-              <a:off x="4033160" y="1535667"/>
-              <a:ext cx="1289955" cy="641473"/>
-            </a:xfrm>
-            <a:prstGeom prst="bentConnector2">
-              <a:avLst/>
-            </a:prstGeom>
-            <a:ln w="38100">
-              <a:solidFill>
-                <a:schemeClr val="bg1"/>
-              </a:solidFill>
-              <a:headEnd type="triangle" w="med" len="med"/>
-              <a:tailEnd type="triangle" w="med" len="med"/>
-            </a:ln>
-          </p:spPr>
-          <p:style>
-            <a:lnRef idx="2">
-              <a:schemeClr val="accent1"/>
-            </a:lnRef>
-            <a:fillRef idx="0">
-              <a:schemeClr val="accent1"/>
-            </a:fillRef>
-            <a:effectRef idx="1">
-              <a:schemeClr val="accent1"/>
-            </a:effectRef>
-            <a:fontRef idx="minor">
-              <a:schemeClr val="tx1"/>
-            </a:fontRef>
-          </p:style>
-        </p:cxnSp>
-        <p:cxnSp>
-          <p:nvCxnSpPr>
-            <p:cNvPr id="32" name="מחבר: מרפקי 31">
-              <a:extLst>
-                <a:ext uri="{FF2B5EF4-FFF2-40B4-BE49-F238E27FC236}">
-                  <a16:creationId xmlns:a16="http://schemas.microsoft.com/office/drawing/2014/main" id="{CC04B110-C35F-370A-CD2F-337EB36D215F}"/>
-                </a:ext>
-              </a:extLst>
-            </p:cNvPr>
-            <p:cNvCxnSpPr>
-              <a:cxnSpLocks/>
-              <a:stCxn id="10" idx="1"/>
-              <a:endCxn id="12" idx="3"/>
-            </p:cNvCxnSpPr>
-            <p:nvPr/>
-          </p:nvCxnSpPr>
-          <p:spPr>
-            <a:xfrm rot="10800000">
-              <a:off x="1839688" y="1535669"/>
-              <a:ext cx="1338943" cy="826139"/>
-            </a:xfrm>
-            <a:prstGeom prst="bentConnector3">
-              <a:avLst/>
-            </a:prstGeom>
-            <a:ln w="38100">
-              <a:solidFill>
-                <a:srgbClr val="FFFF00"/>
-              </a:solidFill>
-              <a:headEnd type="triangle" w="med" len="med"/>
-              <a:tailEnd type="triangle" w="med" len="med"/>
-            </a:ln>
-          </p:spPr>
-          <p:style>
-            <a:lnRef idx="2">
-              <a:schemeClr val="accent1"/>
-            </a:lnRef>
-            <a:fillRef idx="0">
-              <a:schemeClr val="accent1"/>
-            </a:fillRef>
-            <a:effectRef idx="1">
-              <a:schemeClr val="accent1"/>
-            </a:effectRef>
-            <a:fontRef idx="minor">
-              <a:schemeClr val="tx1"/>
-            </a:fontRef>
-          </p:style>
-        </p:cxnSp>
-        <p:cxnSp>
-          <p:nvCxnSpPr>
-            <p:cNvPr id="36" name="מחבר: מרפקי 35">
-              <a:extLst>
-                <a:ext uri="{FF2B5EF4-FFF2-40B4-BE49-F238E27FC236}">
-                  <a16:creationId xmlns:a16="http://schemas.microsoft.com/office/drawing/2014/main" id="{1372909A-6E8F-FC97-1501-C76634EB8BA4}"/>
-                </a:ext>
-              </a:extLst>
-            </p:cNvPr>
-            <p:cNvCxnSpPr>
-              <a:cxnSpLocks/>
-              <a:stCxn id="10" idx="2"/>
-              <a:endCxn id="11" idx="0"/>
-            </p:cNvCxnSpPr>
-            <p:nvPr/>
-          </p:nvCxnSpPr>
-          <p:spPr>
-            <a:xfrm rot="5400000">
-              <a:off x="2040877" y="1534297"/>
-              <a:ext cx="980107" cy="3004458"/>
-            </a:xfrm>
-            <a:prstGeom prst="bentConnector3">
-              <a:avLst/>
-            </a:prstGeom>
-            <a:ln w="38100">
-              <a:solidFill>
-                <a:srgbClr val="FFFF00"/>
-              </a:solidFill>
-              <a:headEnd type="none" w="med" len="med"/>
-              <a:tailEnd type="triangle" w="med" len="med"/>
-            </a:ln>
-          </p:spPr>
-          <p:style>
-            <a:lnRef idx="2">
-              <a:schemeClr val="accent1"/>
-            </a:lnRef>
-            <a:fillRef idx="0">
-              <a:schemeClr val="accent1"/>
-            </a:fillRef>
-            <a:effectRef idx="1">
-              <a:schemeClr val="accent1"/>
-            </a:effectRef>
-            <a:fontRef idx="minor">
-              <a:schemeClr val="tx1"/>
-            </a:fontRef>
-          </p:style>
-        </p:cxnSp>
-        <p:cxnSp>
-          <p:nvCxnSpPr>
-            <p:cNvPr id="38" name="מחבר חץ ישר 37">
-              <a:extLst>
-                <a:ext uri="{FF2B5EF4-FFF2-40B4-BE49-F238E27FC236}">
-                  <a16:creationId xmlns:a16="http://schemas.microsoft.com/office/drawing/2014/main" id="{614A500C-406B-6468-3E48-F2150482D392}"/>
-                </a:ext>
-              </a:extLst>
-            </p:cNvPr>
-            <p:cNvCxnSpPr>
-              <a:cxnSpLocks/>
-            </p:cNvCxnSpPr>
-            <p:nvPr/>
-          </p:nvCxnSpPr>
-          <p:spPr>
-            <a:xfrm>
-              <a:off x="4343400" y="2546473"/>
-              <a:ext cx="0" cy="2198916"/>
-            </a:xfrm>
-            <a:prstGeom prst="straightConnector1">
-              <a:avLst/>
-            </a:prstGeom>
-            <a:ln w="38100">
-              <a:solidFill>
-                <a:schemeClr val="bg1"/>
-              </a:solidFill>
-              <a:headEnd type="triangle" w="med" len="med"/>
-              <a:tailEnd type="triangle" w="med" len="med"/>
-            </a:ln>
-          </p:spPr>
-          <p:style>
-            <a:lnRef idx="2">
-              <a:schemeClr val="accent1"/>
-            </a:lnRef>
-            <a:fillRef idx="0">
-              <a:schemeClr val="accent1"/>
-            </a:fillRef>
-            <a:effectRef idx="1">
-              <a:schemeClr val="accent1"/>
-            </a:effectRef>
-            <a:fontRef idx="minor">
-              <a:schemeClr val="tx1"/>
-            </a:fontRef>
-          </p:style>
-        </p:cxnSp>
-        <p:cxnSp>
-          <p:nvCxnSpPr>
-            <p:cNvPr id="41" name="מחבר חץ ישר 40">
-              <a:extLst>
-                <a:ext uri="{FF2B5EF4-FFF2-40B4-BE49-F238E27FC236}">
-                  <a16:creationId xmlns:a16="http://schemas.microsoft.com/office/drawing/2014/main" id="{2DE0BEE8-9790-2DEF-FAB6-2AFC0F42F0C9}"/>
-                </a:ext>
-              </a:extLst>
-            </p:cNvPr>
-            <p:cNvCxnSpPr>
-              <a:cxnSpLocks/>
-            </p:cNvCxnSpPr>
-            <p:nvPr/>
-          </p:nvCxnSpPr>
-          <p:spPr>
-            <a:xfrm>
-              <a:off x="8650301" y="2546473"/>
-              <a:ext cx="0" cy="2014250"/>
-            </a:xfrm>
-            <a:prstGeom prst="straightConnector1">
-              <a:avLst/>
-            </a:prstGeom>
-            <a:ln w="38100">
-              <a:solidFill>
-                <a:schemeClr val="bg1"/>
-              </a:solidFill>
-              <a:headEnd type="triangle" w="med" len="med"/>
-              <a:tailEnd type="triangle" w="med" len="med"/>
-            </a:ln>
-          </p:spPr>
-          <p:style>
-            <a:lnRef idx="2">
-              <a:schemeClr val="accent1"/>
-            </a:lnRef>
-            <a:fillRef idx="0">
-              <a:schemeClr val="accent1"/>
-            </a:fillRef>
-            <a:effectRef idx="1">
-              <a:schemeClr val="accent1"/>
-            </a:effectRef>
-            <a:fontRef idx="minor">
-              <a:schemeClr val="tx1"/>
-            </a:fontRef>
-          </p:style>
-        </p:cxnSp>
-        <p:cxnSp>
-          <p:nvCxnSpPr>
-            <p:cNvPr id="43" name="מחבר: מרפקי 42">
-              <a:extLst>
-                <a:ext uri="{FF2B5EF4-FFF2-40B4-BE49-F238E27FC236}">
-                  <a16:creationId xmlns:a16="http://schemas.microsoft.com/office/drawing/2014/main" id="{7F6AB80E-180D-4B4A-9577-2ECDFADB91A2}"/>
-                </a:ext>
-              </a:extLst>
-            </p:cNvPr>
-            <p:cNvCxnSpPr>
-              <a:stCxn id="9" idx="2"/>
-              <a:endCxn id="8" idx="3"/>
-            </p:cNvCxnSpPr>
-            <p:nvPr/>
-          </p:nvCxnSpPr>
-          <p:spPr>
-            <a:xfrm rot="5400000">
-              <a:off x="7083291" y="2179667"/>
-              <a:ext cx="1046204" cy="1779816"/>
-            </a:xfrm>
-            <a:prstGeom prst="bentConnector2">
-              <a:avLst/>
-            </a:prstGeom>
-            <a:ln w="38100">
-              <a:solidFill>
-                <a:schemeClr val="bg1"/>
-              </a:solidFill>
-              <a:headEnd type="triangle" w="med" len="med"/>
-              <a:tailEnd type="triangle" w="med" len="med"/>
-            </a:ln>
-          </p:spPr>
-          <p:style>
-            <a:lnRef idx="2">
-              <a:schemeClr val="accent1"/>
-            </a:lnRef>
-            <a:fillRef idx="0">
-              <a:schemeClr val="accent1"/>
-            </a:fillRef>
-            <a:effectRef idx="1">
-              <a:schemeClr val="accent1"/>
-            </a:effectRef>
-            <a:fontRef idx="minor">
-              <a:schemeClr val="tx1"/>
-            </a:fontRef>
-          </p:style>
-        </p:cxnSp>
-        <p:cxnSp>
-          <p:nvCxnSpPr>
-            <p:cNvPr id="45" name="מחבר: מרפקי 44">
-              <a:extLst>
-                <a:ext uri="{FF2B5EF4-FFF2-40B4-BE49-F238E27FC236}">
-                  <a16:creationId xmlns:a16="http://schemas.microsoft.com/office/drawing/2014/main" id="{58024B18-9B1A-D2B4-73F9-02DDEDBC5BE2}"/>
-                </a:ext>
-              </a:extLst>
-            </p:cNvPr>
-            <p:cNvCxnSpPr>
-              <a:cxnSpLocks/>
-              <a:stCxn id="10" idx="3"/>
-              <a:endCxn id="8" idx="0"/>
-            </p:cNvCxnSpPr>
-            <p:nvPr/>
-          </p:nvCxnSpPr>
-          <p:spPr>
-            <a:xfrm>
-              <a:off x="4887688" y="2361807"/>
-              <a:ext cx="1208312" cy="1046204"/>
-            </a:xfrm>
-            <a:prstGeom prst="bentConnector2">
-              <a:avLst/>
-            </a:prstGeom>
-            <a:ln w="38100">
-              <a:solidFill>
-                <a:schemeClr val="bg1"/>
-              </a:solidFill>
-              <a:headEnd type="triangle" w="med" len="med"/>
-              <a:tailEnd type="triangle" w="med" len="med"/>
-            </a:ln>
-          </p:spPr>
-          <p:style>
-            <a:lnRef idx="2">
-              <a:schemeClr val="accent1"/>
-            </a:lnRef>
-            <a:fillRef idx="0">
-              <a:schemeClr val="accent1"/>
-            </a:fillRef>
-            <a:effectRef idx="1">
-              <a:schemeClr val="accent1"/>
-            </a:effectRef>
-            <a:fontRef idx="minor">
-              <a:schemeClr val="tx1"/>
-            </a:fontRef>
-          </p:style>
-        </p:cxnSp>
-        <p:cxnSp>
-          <p:nvCxnSpPr>
-            <p:cNvPr id="48" name="מחבר חץ ישר 47">
-              <a:extLst>
-                <a:ext uri="{FF2B5EF4-FFF2-40B4-BE49-F238E27FC236}">
-                  <a16:creationId xmlns:a16="http://schemas.microsoft.com/office/drawing/2014/main" id="{78D34D48-3F02-52F5-354F-C7500E9D2EBF}"/>
-                </a:ext>
-              </a:extLst>
-            </p:cNvPr>
-            <p:cNvCxnSpPr>
-              <a:stCxn id="7" idx="2"/>
-            </p:cNvCxnSpPr>
-            <p:nvPr/>
-          </p:nvCxnSpPr>
-          <p:spPr>
-            <a:xfrm flipH="1">
-              <a:off x="5943599" y="1720334"/>
-              <a:ext cx="1" cy="1708666"/>
-            </a:xfrm>
-            <a:prstGeom prst="straightConnector1">
-              <a:avLst/>
-            </a:prstGeom>
-            <a:ln w="38100">
-              <a:solidFill>
-                <a:schemeClr val="bg1"/>
-              </a:solidFill>
-              <a:headEnd type="triangle" w="med" len="med"/>
-              <a:tailEnd type="triangle" w="med" len="med"/>
-            </a:ln>
-          </p:spPr>
-          <p:style>
-            <a:lnRef idx="2">
-              <a:schemeClr val="accent1"/>
-            </a:lnRef>
-            <a:fillRef idx="0">
-              <a:schemeClr val="accent1"/>
-            </a:fillRef>
-            <a:effectRef idx="1">
-              <a:schemeClr val="accent1"/>
-            </a:effectRef>
-            <a:fontRef idx="minor">
-              <a:schemeClr val="tx1"/>
-            </a:fontRef>
-          </p:style>
-        </p:cxnSp>
-        <p:cxnSp>
-          <p:nvCxnSpPr>
-            <p:cNvPr id="50" name="מחבר: מרפקי 49">
-              <a:extLst>
-                <a:ext uri="{FF2B5EF4-FFF2-40B4-BE49-F238E27FC236}">
-                  <a16:creationId xmlns:a16="http://schemas.microsoft.com/office/drawing/2014/main" id="{43A5E478-2796-BE72-ED14-3F475251042F}"/>
-                </a:ext>
-              </a:extLst>
-            </p:cNvPr>
-            <p:cNvCxnSpPr>
-              <a:cxnSpLocks/>
-            </p:cNvCxnSpPr>
-            <p:nvPr/>
-          </p:nvCxnSpPr>
-          <p:spPr>
-            <a:xfrm rot="10800000" flipV="1">
-              <a:off x="3733802" y="1409700"/>
-              <a:ext cx="1589312" cy="719142"/>
-            </a:xfrm>
-            <a:prstGeom prst="bentConnector3">
-              <a:avLst>
-                <a:gd name="adj1" fmla="val 99810"/>
-              </a:avLst>
-            </a:prstGeom>
-            <a:ln w="38100">
-              <a:solidFill>
-                <a:srgbClr val="FFFF00"/>
-              </a:solidFill>
-              <a:tailEnd type="triangle"/>
-            </a:ln>
-          </p:spPr>
-          <p:style>
-            <a:lnRef idx="2">
-              <a:schemeClr val="accent1"/>
-            </a:lnRef>
-            <a:fillRef idx="0">
-              <a:schemeClr val="accent1"/>
-            </a:fillRef>
-            <a:effectRef idx="1">
-              <a:schemeClr val="accent1"/>
-            </a:effectRef>
-            <a:fontRef idx="minor">
-              <a:schemeClr val="tx1"/>
-            </a:fontRef>
-          </p:style>
-        </p:cxnSp>
-        <p:cxnSp>
-          <p:nvCxnSpPr>
-            <p:cNvPr id="57" name="מחבר חץ ישר 56">
-              <a:extLst>
-                <a:ext uri="{FF2B5EF4-FFF2-40B4-BE49-F238E27FC236}">
-                  <a16:creationId xmlns:a16="http://schemas.microsoft.com/office/drawing/2014/main" id="{D48626E6-AF7C-E18D-5671-19DB5226868C}"/>
-                </a:ext>
-              </a:extLst>
-            </p:cNvPr>
-            <p:cNvCxnSpPr>
-              <a:cxnSpLocks/>
-            </p:cNvCxnSpPr>
-            <p:nvPr/>
-          </p:nvCxnSpPr>
-          <p:spPr>
-            <a:xfrm flipH="1">
-              <a:off x="4887688" y="2255982"/>
-              <a:ext cx="2797627" cy="0"/>
-            </a:xfrm>
-            <a:prstGeom prst="straightConnector1">
-              <a:avLst/>
-            </a:prstGeom>
-            <a:ln w="38100">
-              <a:solidFill>
-                <a:schemeClr val="bg1"/>
-              </a:solidFill>
-              <a:headEnd type="triangle" w="med" len="med"/>
-              <a:tailEnd type="triangle" w="med" len="med"/>
-            </a:ln>
-          </p:spPr>
-          <p:style>
-            <a:lnRef idx="2">
-              <a:schemeClr val="accent1"/>
-            </a:lnRef>
-            <a:fillRef idx="0">
-              <a:schemeClr val="accent1"/>
-            </a:fillRef>
-            <a:effectRef idx="1">
-              <a:schemeClr val="accent1"/>
-            </a:effectRef>
-            <a:fontRef idx="minor">
-              <a:schemeClr val="tx1"/>
-            </a:fontRef>
-          </p:style>
-        </p:cxnSp>
-        <p:cxnSp>
-          <p:nvCxnSpPr>
-            <p:cNvPr id="63" name="מחבר: מרפקי 62">
-              <a:extLst>
-                <a:ext uri="{FF2B5EF4-FFF2-40B4-BE49-F238E27FC236}">
-                  <a16:creationId xmlns:a16="http://schemas.microsoft.com/office/drawing/2014/main" id="{004707B3-61E0-226D-95AA-719EEB6579BD}"/>
-                </a:ext>
-              </a:extLst>
-            </p:cNvPr>
-            <p:cNvCxnSpPr>
-              <a:stCxn id="8" idx="2"/>
-              <a:endCxn id="14" idx="1"/>
-            </p:cNvCxnSpPr>
-            <p:nvPr/>
-          </p:nvCxnSpPr>
-          <p:spPr>
-            <a:xfrm rot="16200000" flipH="1">
-              <a:off x="6406634" y="3466708"/>
-              <a:ext cx="968046" cy="1589315"/>
-            </a:xfrm>
-            <a:prstGeom prst="bentConnector2">
-              <a:avLst/>
-            </a:prstGeom>
-            <a:ln w="38100">
-              <a:solidFill>
-                <a:schemeClr val="bg1"/>
-              </a:solidFill>
-              <a:headEnd type="triangle" w="med" len="med"/>
-              <a:tailEnd type="triangle" w="med" len="med"/>
-            </a:ln>
-          </p:spPr>
-          <p:style>
-            <a:lnRef idx="2">
-              <a:schemeClr val="accent1"/>
-            </a:lnRef>
-            <a:fillRef idx="0">
-              <a:schemeClr val="accent1"/>
-            </a:fillRef>
-            <a:effectRef idx="1">
-              <a:schemeClr val="accent1"/>
-            </a:effectRef>
-            <a:fontRef idx="minor">
-              <a:schemeClr val="tx1"/>
-            </a:fontRef>
-          </p:style>
-        </p:cxnSp>
       </p:grpSp>
-      <p:cxnSp>
-        <p:nvCxnSpPr>
-          <p:cNvPr id="5" name="מחבר חץ ישר 4">
-            <a:extLst>
-              <a:ext uri="{FF2B5EF4-FFF2-40B4-BE49-F238E27FC236}">
-                <a16:creationId xmlns:a16="http://schemas.microsoft.com/office/drawing/2014/main" id="{28E2D13A-9759-8BBD-3EB5-C55A1F1E15B8}"/>
-              </a:ext>
-            </a:extLst>
-          </p:cNvPr>
-          <p:cNvCxnSpPr/>
-          <p:nvPr/>
-        </p:nvCxnSpPr>
-        <p:spPr>
-          <a:xfrm flipH="1">
-            <a:off x="1837944" y="722376"/>
-            <a:ext cx="804672" cy="0"/>
-          </a:xfrm>
-          <a:prstGeom prst="straightConnector1">
-            <a:avLst/>
-          </a:prstGeom>
-          <a:ln w="38100">
-            <a:solidFill>
-              <a:schemeClr val="bg1"/>
-            </a:solidFill>
-            <a:tailEnd type="triangle"/>
-          </a:ln>
-        </p:spPr>
-        <p:style>
-          <a:lnRef idx="2">
-            <a:schemeClr val="accent1"/>
-          </a:lnRef>
-          <a:fillRef idx="0">
-            <a:schemeClr val="accent1"/>
-          </a:fillRef>
-          <a:effectRef idx="1">
-            <a:schemeClr val="accent1"/>
-          </a:effectRef>
-          <a:fontRef idx="minor">
-            <a:schemeClr val="tx1"/>
-          </a:fontRef>
-        </p:style>
-      </p:cxnSp>
-      <p:cxnSp>
-        <p:nvCxnSpPr>
-          <p:cNvPr id="15" name="מחבר חץ ישר 14">
-            <a:extLst>
-              <a:ext uri="{FF2B5EF4-FFF2-40B4-BE49-F238E27FC236}">
-                <a16:creationId xmlns:a16="http://schemas.microsoft.com/office/drawing/2014/main" id="{591D964B-0A91-9D80-E953-9CA7D1D9762A}"/>
-              </a:ext>
-            </a:extLst>
-          </p:cNvPr>
-          <p:cNvCxnSpPr/>
-          <p:nvPr/>
-        </p:nvCxnSpPr>
-        <p:spPr>
-          <a:xfrm flipH="1">
-            <a:off x="1847088" y="1035755"/>
-            <a:ext cx="804672" cy="0"/>
-          </a:xfrm>
-          <a:prstGeom prst="straightConnector1">
-            <a:avLst/>
-          </a:prstGeom>
-          <a:ln w="38100">
-            <a:solidFill>
-              <a:srgbClr val="FFFF00"/>
-            </a:solidFill>
-            <a:tailEnd type="triangle"/>
-          </a:ln>
-        </p:spPr>
-        <p:style>
-          <a:lnRef idx="2">
-            <a:schemeClr val="accent1"/>
-          </a:lnRef>
-          <a:fillRef idx="0">
-            <a:schemeClr val="accent1"/>
-          </a:fillRef>
-          <a:effectRef idx="1">
-            <a:schemeClr val="accent1"/>
-          </a:effectRef>
-          <a:fontRef idx="minor">
-            <a:schemeClr val="tx1"/>
-          </a:fontRef>
-        </p:style>
-      </p:cxnSp>
-      <p:sp>
-        <p:nvSpPr>
-          <p:cNvPr id="17" name="תיבת טקסט 16">
-            <a:extLst>
-              <a:ext uri="{FF2B5EF4-FFF2-40B4-BE49-F238E27FC236}">
-                <a16:creationId xmlns:a16="http://schemas.microsoft.com/office/drawing/2014/main" id="{3F9E95EA-989E-3993-9854-DDA954A2070A}"/>
-              </a:ext>
-            </a:extLst>
-          </p:cNvPr>
-          <p:cNvSpPr txBox="1"/>
-          <p:nvPr/>
-        </p:nvSpPr>
-        <p:spPr>
-          <a:xfrm>
-            <a:off x="536122" y="530352"/>
-            <a:ext cx="1173806" cy="369332"/>
-          </a:xfrm>
-          <a:prstGeom prst="rect">
-            <a:avLst/>
-          </a:prstGeom>
-          <a:noFill/>
-          <a:ln>
-            <a:noFill/>
-          </a:ln>
-        </p:spPr>
-        <p:txBody>
-          <a:bodyPr wrap="square" rtlCol="1">
-            <a:spAutoFit/>
-          </a:bodyPr>
-          <a:lstStyle/>
-          <a:p>
-            <a:r>
-              <a:rPr lang="en-US" dirty="0" err="1">
-                <a:solidFill>
-                  <a:schemeClr val="bg1"/>
-                </a:solidFill>
-              </a:rPr>
-              <a:t>RestAPI</a:t>
-            </a:r>
-            <a:endParaRPr lang="he-IL" dirty="0">
-              <a:solidFill>
-                <a:schemeClr val="bg1"/>
-              </a:solidFill>
-            </a:endParaRPr>
-          </a:p>
-        </p:txBody>
-      </p:sp>
-      <p:sp>
-        <p:nvSpPr>
-          <p:cNvPr id="18" name="תיבת טקסט 17">
-            <a:extLst>
-              <a:ext uri="{FF2B5EF4-FFF2-40B4-BE49-F238E27FC236}">
-                <a16:creationId xmlns:a16="http://schemas.microsoft.com/office/drawing/2014/main" id="{A9E5319B-95A7-8B57-C5AD-91B4FFD66117}"/>
-              </a:ext>
-            </a:extLst>
-          </p:cNvPr>
-          <p:cNvSpPr txBox="1"/>
-          <p:nvPr/>
-        </p:nvSpPr>
-        <p:spPr>
-          <a:xfrm>
-            <a:off x="536122" y="851089"/>
-            <a:ext cx="1173806" cy="369332"/>
-          </a:xfrm>
-          <a:prstGeom prst="rect">
-            <a:avLst/>
-          </a:prstGeom>
-          <a:noFill/>
-          <a:ln>
-            <a:noFill/>
-          </a:ln>
-        </p:spPr>
-        <p:txBody>
-          <a:bodyPr wrap="square" rtlCol="1">
-            <a:spAutoFit/>
-          </a:bodyPr>
-          <a:lstStyle/>
-          <a:p>
-            <a:r>
-              <a:rPr lang="en-US" dirty="0">
-                <a:solidFill>
-                  <a:srgbClr val="FFFF00"/>
-                </a:solidFill>
-              </a:rPr>
-              <a:t>Kafka</a:t>
-            </a:r>
-            <a:endParaRPr lang="he-IL" dirty="0">
-              <a:solidFill>
-                <a:srgbClr val="FFFF00"/>
-              </a:solidFill>
-            </a:endParaRPr>
-          </a:p>
-        </p:txBody>
-      </p:sp>
     </p:spTree>
     <p:extLst>
       <p:ext uri="{BB962C8B-B14F-4D97-AF65-F5344CB8AC3E}">
-        <p14:creationId xmlns:p14="http://schemas.microsoft.com/office/powerpoint/2010/main" val="2941472367"/>
+        <p14:creationId xmlns:p14="http://schemas.microsoft.com/office/powerpoint/2010/main" val="3875451982"/>
       </p:ext>
     </p:extLst>
   </p:cSld>
